--- a/images/figures.pptx
+++ b/images/figures.pptx
@@ -5,14 +5,15 @@
     <p:sldMasterId id="2147483702" r:id="rId1"/>
   </p:sldMasterIdLst>
   <p:notesMasterIdLst>
-    <p:notesMasterId r:id="rId4"/>
+    <p:notesMasterId r:id="rId5"/>
   </p:notesMasterIdLst>
   <p:handoutMasterIdLst>
-    <p:handoutMasterId r:id="rId5"/>
+    <p:handoutMasterId r:id="rId6"/>
   </p:handoutMasterIdLst>
   <p:sldIdLst>
     <p:sldId id="2147474490" r:id="rId2"/>
     <p:sldId id="2147474479" r:id="rId3"/>
+    <p:sldId id="2147474491" r:id="rId4"/>
   </p:sldIdLst>
   <p:sldSz cx="12192000" cy="6858000"/>
   <p:notesSz cx="9866313" cy="6735763"/>
@@ -118,6 +119,7 @@
           <p14:sldIdLst>
             <p14:sldId id="2147474490"/>
             <p14:sldId id="2147474479"/>
+            <p14:sldId id="2147474491"/>
           </p14:sldIdLst>
         </p14:section>
       </p14:sectionLst>
@@ -253,7 +255,7 @@
           <a:p>
             <a:fld id="{FD2B4BCF-55E2-4653-B607-A4A4F08D7C21}" type="datetimeFigureOut">
               <a:rPr kumimoji="1" lang="ja-JP" altLang="en-US" smtClean="0"/>
-              <a:t>2026/3/31</a:t>
+              <a:t>2026/4/8</a:t>
             </a:fld>
             <a:endParaRPr kumimoji="1" lang="ja-JP" altLang="en-US"/>
           </a:p>
@@ -435,7 +437,7 @@
           <a:p>
             <a:fld id="{FDE72336-AA09-41ED-BEA9-7779C42A9B89}" type="datetimeFigureOut">
               <a:rPr kumimoji="1" lang="ja-JP" altLang="en-US" smtClean="0"/>
-              <a:t>2026/3/31</a:t>
+              <a:t>2026/4/8</a:t>
             </a:fld>
             <a:endParaRPr kumimoji="1" lang="ja-JP" altLang="en-US"/>
           </a:p>
@@ -821,7 +823,7 @@
             <a:fld id="{E84295F0-F485-4B4E-B58A-F247BEEDA1D0}" type="datetime1">
               <a:rPr lang="ja-JP" altLang="en-US" smtClean="0"/>
               <a:pPr/>
-              <a:t>2026/3/31</a:t>
+              <a:t>2026/4/8</a:t>
             </a:fld>
             <a:endParaRPr lang="ja-JP" altLang="en-US"/>
           </a:p>
@@ -1591,7 +1593,7 @@
           <a:p>
             <a:fld id="{D8ADE345-DDEA-4E47-B76C-5997699471F1}" type="datetime1">
               <a:rPr lang="ja-JP" altLang="en-US" smtClean="0"/>
-              <a:t>2026/3/31</a:t>
+              <a:t>2026/4/8</a:t>
             </a:fld>
             <a:endParaRPr lang="ja-JP" altLang="en-US"/>
           </a:p>
@@ -5353,8 +5355,8 @@
               <a:chExt cx="5018194" cy="2265431"/>
             </a:xfrm>
           </p:grpSpPr>
-          <mc:AlternateContent xmlns:mc="http://schemas.openxmlformats.org/markup-compatibility/2006">
-            <mc:Choice xmlns:a14="http://schemas.microsoft.com/office/drawing/2010/main" Requires="a14">
+          <mc:AlternateContent xmlns:mc="http://schemas.openxmlformats.org/markup-compatibility/2006" xmlns:a14="http://schemas.microsoft.com/office/drawing/2010/main">
+            <mc:Choice Requires="a14">
               <p:sp>
                 <p:nvSpPr>
                   <p:cNvPr id="44" name="テキスト ボックス 43">
@@ -5752,7 +5754,7 @@
                 </p:txBody>
               </p:sp>
             </mc:Choice>
-            <mc:Fallback>
+            <mc:Fallback xmlns="">
               <p:sp>
                 <p:nvSpPr>
                   <p:cNvPr id="44" name="テキスト ボックス 43">
@@ -6624,6 +6626,219 @@
 </p:sld>
 </file>
 
+<file path=ppt/slides/slide3.xml><?xml version="1.0" encoding="utf-8"?>
+<p:sld xmlns:a="http://schemas.openxmlformats.org/drawingml/2006/main" xmlns:r="http://schemas.openxmlformats.org/officeDocument/2006/relationships" xmlns:p="http://schemas.openxmlformats.org/presentationml/2006/main">
+  <p:cSld>
+    <p:spTree>
+      <p:nvGrpSpPr>
+        <p:cNvPr id="1" name=""/>
+        <p:cNvGrpSpPr/>
+        <p:nvPr/>
+      </p:nvGrpSpPr>
+      <p:grpSpPr>
+        <a:xfrm>
+          <a:off x="0" y="0"/>
+          <a:ext cx="0" cy="0"/>
+          <a:chOff x="0" y="0"/>
+          <a:chExt cx="0" cy="0"/>
+        </a:xfrm>
+      </p:grpSpPr>
+      <p:sp>
+        <p:nvSpPr>
+          <p:cNvPr id="2" name="タイトル 1">
+            <a:extLst>
+              <a:ext uri="{FF2B5EF4-FFF2-40B4-BE49-F238E27FC236}">
+                <a16:creationId xmlns:a16="http://schemas.microsoft.com/office/drawing/2014/main" id="{694C8095-136A-AE5F-EB57-F160490A70B2}"/>
+              </a:ext>
+            </a:extLst>
+          </p:cNvPr>
+          <p:cNvSpPr>
+            <a:spLocks noGrp="1"/>
+          </p:cNvSpPr>
+          <p:nvPr>
+            <p:ph type="title"/>
+          </p:nvPr>
+        </p:nvSpPr>
+        <p:spPr/>
+        <p:txBody>
+          <a:bodyPr/>
+          <a:lstStyle/>
+          <a:p>
+            <a:endParaRPr kumimoji="1" lang="ja-JP" altLang="en-US" dirty="0"/>
+          </a:p>
+        </p:txBody>
+      </p:sp>
+      <p:sp>
+        <p:nvSpPr>
+          <p:cNvPr id="3" name="スライド番号プレースホルダー 2">
+            <a:extLst>
+              <a:ext uri="{FF2B5EF4-FFF2-40B4-BE49-F238E27FC236}">
+                <a16:creationId xmlns:a16="http://schemas.microsoft.com/office/drawing/2014/main" id="{2051BA32-5A4A-474E-27A3-4B289778A666}"/>
+              </a:ext>
+            </a:extLst>
+          </p:cNvPr>
+          <p:cNvSpPr>
+            <a:spLocks noGrp="1"/>
+          </p:cNvSpPr>
+          <p:nvPr>
+            <p:ph type="sldNum" sz="quarter" idx="12"/>
+          </p:nvPr>
+        </p:nvSpPr>
+        <p:spPr/>
+        <p:txBody>
+          <a:bodyPr/>
+          <a:lstStyle/>
+          <a:p>
+            <a:fld id="{E7EAB151-777E-4256-8867-8A5AB6026266}" type="slidenum">
+              <a:rPr lang="ja-JP" altLang="en-US" smtClean="0"/>
+              <a:pPr/>
+              <a:t>3</a:t>
+            </a:fld>
+            <a:endParaRPr lang="ja-JP" altLang="en-US" dirty="0"/>
+          </a:p>
+        </p:txBody>
+      </p:sp>
+      <p:grpSp>
+        <p:nvGrpSpPr>
+          <p:cNvPr id="6" name="グループ化 5">
+            <a:extLst>
+              <a:ext uri="{FF2B5EF4-FFF2-40B4-BE49-F238E27FC236}">
+                <a16:creationId xmlns:a16="http://schemas.microsoft.com/office/drawing/2014/main" id="{ADE24039-E84B-E98A-DE44-9734FE963111}"/>
+              </a:ext>
+            </a:extLst>
+          </p:cNvPr>
+          <p:cNvGrpSpPr/>
+          <p:nvPr/>
+        </p:nvGrpSpPr>
+        <p:grpSpPr>
+          <a:xfrm>
+            <a:off x="2135560" y="1916831"/>
+            <a:ext cx="1440160" cy="1920213"/>
+            <a:chOff x="2135560" y="1916831"/>
+            <a:chExt cx="1440160" cy="1920213"/>
+          </a:xfrm>
+        </p:grpSpPr>
+        <p:sp>
+          <p:nvSpPr>
+            <p:cNvPr id="4" name="正方形/長方形 3">
+              <a:extLst>
+                <a:ext uri="{FF2B5EF4-FFF2-40B4-BE49-F238E27FC236}">
+                  <a16:creationId xmlns:a16="http://schemas.microsoft.com/office/drawing/2014/main" id="{8F5A80E5-9712-30EE-95E6-409DC3BEDE58}"/>
+                </a:ext>
+              </a:extLst>
+            </p:cNvPr>
+            <p:cNvSpPr/>
+            <p:nvPr/>
+          </p:nvSpPr>
+          <p:spPr>
+            <a:xfrm>
+              <a:off x="2135560" y="1916831"/>
+              <a:ext cx="1440160" cy="1920213"/>
+            </a:xfrm>
+            <a:prstGeom prst="rect">
+              <a:avLst/>
+            </a:prstGeom>
+            <a:noFill/>
+            <a:ln w="38100">
+              <a:solidFill>
+                <a:schemeClr val="bg1">
+                  <a:lumMod val="50000"/>
+                </a:schemeClr>
+              </a:solidFill>
+            </a:ln>
+          </p:spPr>
+          <p:style>
+            <a:lnRef idx="2">
+              <a:schemeClr val="accent1">
+                <a:shade val="15000"/>
+              </a:schemeClr>
+            </a:lnRef>
+            <a:fillRef idx="1">
+              <a:schemeClr val="accent1"/>
+            </a:fillRef>
+            <a:effectRef idx="0">
+              <a:schemeClr val="accent1"/>
+            </a:effectRef>
+            <a:fontRef idx="minor">
+              <a:schemeClr val="lt1"/>
+            </a:fontRef>
+          </p:style>
+          <p:txBody>
+            <a:bodyPr rtlCol="0" anchor="ctr"/>
+            <a:lstStyle/>
+            <a:p>
+              <a:pPr algn="ctr"/>
+              <a:endParaRPr kumimoji="1" lang="ja-JP" altLang="en-US"/>
+            </a:p>
+          </p:txBody>
+        </p:sp>
+        <p:sp>
+          <p:nvSpPr>
+            <p:cNvPr id="5" name="テキスト ボックス 4">
+              <a:extLst>
+                <a:ext uri="{FF2B5EF4-FFF2-40B4-BE49-F238E27FC236}">
+                  <a16:creationId xmlns:a16="http://schemas.microsoft.com/office/drawing/2014/main" id="{312FB39C-2220-A4E4-1449-093DC36EC3D8}"/>
+                </a:ext>
+              </a:extLst>
+            </p:cNvPr>
+            <p:cNvSpPr txBox="1"/>
+            <p:nvPr/>
+          </p:nvSpPr>
+          <p:spPr>
+            <a:xfrm>
+              <a:off x="2398440" y="2507605"/>
+              <a:ext cx="914400" cy="738664"/>
+            </a:xfrm>
+            <a:prstGeom prst="rect">
+              <a:avLst/>
+            </a:prstGeom>
+            <a:noFill/>
+          </p:spPr>
+          <p:txBody>
+            <a:bodyPr wrap="square" lIns="0" tIns="0" rIns="0" bIns="0" rtlCol="0">
+              <a:spAutoFit/>
+            </a:bodyPr>
+            <a:lstStyle/>
+            <a:p>
+              <a:pPr algn="ctr"/>
+              <a:r>
+                <a:rPr kumimoji="1" lang="en-US" altLang="ja-JP" sz="2400" b="1" dirty="0">
+                  <a:solidFill>
+                    <a:schemeClr val="bg1">
+                      <a:lumMod val="50000"/>
+                    </a:schemeClr>
+                  </a:solidFill>
+                  <a:latin typeface="Arial" panose="020B0604020202020204" pitchFamily="34" charset="0"/>
+                  <a:cs typeface="Arial" panose="020B0604020202020204" pitchFamily="34" charset="0"/>
+                </a:rPr>
+                <a:t>No Photo</a:t>
+              </a:r>
+              <a:endParaRPr kumimoji="1" lang="ja-JP" altLang="en-US" sz="2400" b="1" dirty="0">
+                <a:solidFill>
+                  <a:schemeClr val="bg1">
+                    <a:lumMod val="50000"/>
+                  </a:schemeClr>
+                </a:solidFill>
+                <a:latin typeface="Arial" panose="020B0604020202020204" pitchFamily="34" charset="0"/>
+                <a:cs typeface="Arial" panose="020B0604020202020204" pitchFamily="34" charset="0"/>
+              </a:endParaRPr>
+            </a:p>
+          </p:txBody>
+        </p:sp>
+      </p:grpSp>
+    </p:spTree>
+    <p:extLst>
+      <p:ext uri="{BB962C8B-B14F-4D97-AF65-F5344CB8AC3E}">
+        <p14:creationId xmlns:p14="http://schemas.microsoft.com/office/powerpoint/2010/main" val="661559953"/>
+      </p:ext>
+    </p:extLst>
+  </p:cSld>
+  <p:clrMapOvr>
+    <a:masterClrMapping/>
+  </p:clrMapOvr>
+</p:sld>
+</file>
+
 <file path=ppt/theme/theme1.xml><?xml version="1.0" encoding="utf-8"?>
 <a:theme xmlns:a="http://schemas.openxmlformats.org/drawingml/2006/main" name="Office 2013 - 2022 テーマ">
   <a:themeElements>

--- a/images/figures.pptx
+++ b/images/figures.pptx
@@ -5,10 +5,10 @@
     <p:sldMasterId id="2147483702" r:id="rId1"/>
   </p:sldMasterIdLst>
   <p:notesMasterIdLst>
-    <p:notesMasterId r:id="rId7"/>
+    <p:notesMasterId r:id="rId9"/>
   </p:notesMasterIdLst>
   <p:handoutMasterIdLst>
-    <p:handoutMasterId r:id="rId8"/>
+    <p:handoutMasterId r:id="rId10"/>
   </p:handoutMasterIdLst>
   <p:sldIdLst>
     <p:sldId id="2147474490" r:id="rId2"/>
@@ -16,6 +16,8 @@
     <p:sldId id="2147474492" r:id="rId4"/>
     <p:sldId id="2147474493" r:id="rId5"/>
     <p:sldId id="2147474491" r:id="rId6"/>
+    <p:sldId id="2147474494" r:id="rId7"/>
+    <p:sldId id="2147474495" r:id="rId8"/>
   </p:sldIdLst>
   <p:sldSz cx="12192000" cy="6858000"/>
   <p:notesSz cx="9866313" cy="6735763"/>
@@ -124,6 +126,8 @@
             <p14:sldId id="2147474492"/>
             <p14:sldId id="2147474493"/>
             <p14:sldId id="2147474491"/>
+            <p14:sldId id="2147474494"/>
+            <p14:sldId id="2147474495"/>
           </p14:sldIdLst>
         </p14:section>
       </p14:sectionLst>
@@ -259,7 +263,7 @@
           <a:p>
             <a:fld id="{FD2B4BCF-55E2-4653-B607-A4A4F08D7C21}" type="datetimeFigureOut">
               <a:rPr kumimoji="1" lang="ja-JP" altLang="en-US" smtClean="0"/>
-              <a:t>2026/6/2</a:t>
+              <a:t>2026/6/23</a:t>
             </a:fld>
             <a:endParaRPr kumimoji="1" lang="ja-JP" altLang="en-US"/>
           </a:p>
@@ -441,7 +445,7 @@
           <a:p>
             <a:fld id="{FDE72336-AA09-41ED-BEA9-7779C42A9B89}" type="datetimeFigureOut">
               <a:rPr kumimoji="1" lang="ja-JP" altLang="en-US" smtClean="0"/>
-              <a:t>2026/6/2</a:t>
+              <a:t>2026/6/23</a:t>
             </a:fld>
             <a:endParaRPr kumimoji="1" lang="ja-JP" altLang="en-US"/>
           </a:p>
@@ -1019,7 +1023,7 @@
             <a:fld id="{E84295F0-F485-4B4E-B58A-F247BEEDA1D0}" type="datetime1">
               <a:rPr lang="ja-JP" altLang="en-US" smtClean="0"/>
               <a:pPr/>
-              <a:t>2026/6/2</a:t>
+              <a:t>2026/6/23</a:t>
             </a:fld>
             <a:endParaRPr lang="ja-JP" altLang="en-US"/>
           </a:p>
@@ -1789,7 +1793,7 @@
           <a:p>
             <a:fld id="{D8ADE345-DDEA-4E47-B76C-5997699471F1}" type="datetime1">
               <a:rPr lang="ja-JP" altLang="en-US" smtClean="0"/>
-              <a:t>2026/6/2</a:t>
+              <a:t>2026/6/23</a:t>
             </a:fld>
             <a:endParaRPr lang="ja-JP" altLang="en-US"/>
           </a:p>
@@ -21641,6 +21645,7917 @@
 </p:sld>
 </file>
 
+<file path=ppt/slides/slide6.xml><?xml version="1.0" encoding="utf-8"?>
+<p:sld xmlns:a="http://schemas.openxmlformats.org/drawingml/2006/main" xmlns:r="http://schemas.openxmlformats.org/officeDocument/2006/relationships" xmlns:p="http://schemas.openxmlformats.org/presentationml/2006/main">
+  <p:cSld>
+    <p:spTree>
+      <p:nvGrpSpPr>
+        <p:cNvPr id="1" name=""/>
+        <p:cNvGrpSpPr/>
+        <p:nvPr/>
+      </p:nvGrpSpPr>
+      <p:grpSpPr>
+        <a:xfrm>
+          <a:off x="0" y="0"/>
+          <a:ext cx="0" cy="0"/>
+          <a:chOff x="0" y="0"/>
+          <a:chExt cx="0" cy="0"/>
+        </a:xfrm>
+      </p:grpSpPr>
+      <p:sp>
+        <p:nvSpPr>
+          <p:cNvPr id="2" name="タイトル 1">
+            <a:extLst>
+              <a:ext uri="{FF2B5EF4-FFF2-40B4-BE49-F238E27FC236}">
+                <a16:creationId xmlns:a16="http://schemas.microsoft.com/office/drawing/2014/main" id="{D77334F0-572E-858F-45B4-A61A9B4755CE}"/>
+              </a:ext>
+            </a:extLst>
+          </p:cNvPr>
+          <p:cNvSpPr>
+            <a:spLocks noGrp="1"/>
+          </p:cNvSpPr>
+          <p:nvPr>
+            <p:ph type="title"/>
+          </p:nvPr>
+        </p:nvSpPr>
+        <p:spPr/>
+        <p:txBody>
+          <a:bodyPr/>
+          <a:lstStyle/>
+          <a:p>
+            <a:endParaRPr kumimoji="1" lang="ja-JP" altLang="en-US"/>
+          </a:p>
+        </p:txBody>
+      </p:sp>
+      <p:pic>
+        <p:nvPicPr>
+          <p:cNvPr id="5" name="図 4">
+            <a:extLst>
+              <a:ext uri="{FF2B5EF4-FFF2-40B4-BE49-F238E27FC236}">
+                <a16:creationId xmlns:a16="http://schemas.microsoft.com/office/drawing/2014/main" id="{3A9E775A-2469-E13A-5377-5D0D6B43DA08}"/>
+              </a:ext>
+            </a:extLst>
+          </p:cNvPr>
+          <p:cNvPicPr>
+            <a:picLocks noChangeAspect="1"/>
+          </p:cNvPicPr>
+          <p:nvPr/>
+        </p:nvPicPr>
+        <p:blipFill rotWithShape="1">
+          <a:blip r:embed="rId2" cstate="print">
+            <a:extLst>
+              <a:ext uri="{28A0092B-C50C-407E-A947-70E740481C1C}">
+                <a14:useLocalDpi xmlns:a14="http://schemas.microsoft.com/office/drawing/2010/main" val="0"/>
+              </a:ext>
+            </a:extLst>
+          </a:blip>
+          <a:srcRect l="56731"/>
+          <a:stretch/>
+        </p:blipFill>
+        <p:spPr>
+          <a:xfrm>
+            <a:off x="5167304" y="2470730"/>
+            <a:ext cx="1924700" cy="1881928"/>
+          </a:xfrm>
+          <a:prstGeom prst="rect">
+            <a:avLst/>
+          </a:prstGeom>
+        </p:spPr>
+      </p:pic>
+      <p:sp>
+        <p:nvSpPr>
+          <p:cNvPr id="6" name="テキスト ボックス 5">
+            <a:extLst>
+              <a:ext uri="{FF2B5EF4-FFF2-40B4-BE49-F238E27FC236}">
+                <a16:creationId xmlns:a16="http://schemas.microsoft.com/office/drawing/2014/main" id="{17EBEF7F-DFBE-F3B3-AF5B-D94B3FDFBC91}"/>
+              </a:ext>
+            </a:extLst>
+          </p:cNvPr>
+          <p:cNvSpPr txBox="1"/>
+          <p:nvPr/>
+        </p:nvSpPr>
+        <p:spPr>
+          <a:xfrm>
+            <a:off x="4747389" y="1852277"/>
+            <a:ext cx="2827455" cy="492443"/>
+          </a:xfrm>
+          <a:prstGeom prst="rect">
+            <a:avLst/>
+          </a:prstGeom>
+          <a:noFill/>
+        </p:spPr>
+        <p:txBody>
+          <a:bodyPr wrap="square" lIns="0" tIns="0" rIns="0" bIns="0" rtlCol="0">
+            <a:spAutoFit/>
+          </a:bodyPr>
+          <a:lstStyle/>
+          <a:p>
+            <a:pPr algn="ctr"/>
+            <a:r>
+              <a:rPr kumimoji="1" lang="en-US" altLang="ja-JP" sz="3200" b="1" dirty="0">
+                <a:solidFill>
+                  <a:srgbClr val="D51506"/>
+                </a:solidFill>
+                <a:latin typeface="Arial" panose="020B0604020202020204" pitchFamily="34" charset="0"/>
+                <a:cs typeface="Arial" panose="020B0604020202020204" pitchFamily="34" charset="0"/>
+              </a:rPr>
+              <a:t>Data Science</a:t>
+            </a:r>
+            <a:endParaRPr kumimoji="1" lang="ja-JP" altLang="en-US" sz="3200" b="1" dirty="0">
+              <a:solidFill>
+                <a:srgbClr val="D51506"/>
+              </a:solidFill>
+              <a:latin typeface="Arial" panose="020B0604020202020204" pitchFamily="34" charset="0"/>
+              <a:cs typeface="Arial" panose="020B0604020202020204" pitchFamily="34" charset="0"/>
+            </a:endParaRPr>
+          </a:p>
+        </p:txBody>
+      </p:sp>
+      <p:sp>
+        <p:nvSpPr>
+          <p:cNvPr id="7" name="正方形/長方形 6">
+            <a:extLst>
+              <a:ext uri="{FF2B5EF4-FFF2-40B4-BE49-F238E27FC236}">
+                <a16:creationId xmlns:a16="http://schemas.microsoft.com/office/drawing/2014/main" id="{48324467-7B02-DF2C-519F-1D4B1263A7ED}"/>
+              </a:ext>
+            </a:extLst>
+          </p:cNvPr>
+          <p:cNvSpPr/>
+          <p:nvPr/>
+        </p:nvSpPr>
+        <p:spPr>
+          <a:xfrm>
+            <a:off x="4979011" y="2602238"/>
+            <a:ext cx="2364210" cy="1884406"/>
+          </a:xfrm>
+          <a:prstGeom prst="rect">
+            <a:avLst/>
+          </a:prstGeom>
+          <a:noFill/>
+          <a:ln w="76200">
+            <a:solidFill>
+              <a:srgbClr val="D51506"/>
+            </a:solidFill>
+          </a:ln>
+        </p:spPr>
+        <p:style>
+          <a:lnRef idx="2">
+            <a:schemeClr val="accent1">
+              <a:shade val="15000"/>
+            </a:schemeClr>
+          </a:lnRef>
+          <a:fillRef idx="1">
+            <a:schemeClr val="accent1"/>
+          </a:fillRef>
+          <a:effectRef idx="0">
+            <a:schemeClr val="accent1"/>
+          </a:effectRef>
+          <a:fontRef idx="minor">
+            <a:schemeClr val="lt1"/>
+          </a:fontRef>
+        </p:style>
+        <p:txBody>
+          <a:bodyPr rtlCol="0" anchor="ctr"/>
+          <a:lstStyle/>
+          <a:p>
+            <a:pPr algn="ctr"/>
+            <a:endParaRPr kumimoji="1" lang="ja-JP" altLang="en-US">
+              <a:solidFill>
+                <a:srgbClr val="FFFFFF"/>
+              </a:solidFill>
+            </a:endParaRPr>
+          </a:p>
+        </p:txBody>
+      </p:sp>
+      <p:sp>
+        <p:nvSpPr>
+          <p:cNvPr id="8" name="正方形/長方形 7">
+            <a:extLst>
+              <a:ext uri="{FF2B5EF4-FFF2-40B4-BE49-F238E27FC236}">
+                <a16:creationId xmlns:a16="http://schemas.microsoft.com/office/drawing/2014/main" id="{FA3E6D28-AF40-C792-88EC-EE3426CA4C32}"/>
+              </a:ext>
+            </a:extLst>
+          </p:cNvPr>
+          <p:cNvSpPr/>
+          <p:nvPr/>
+        </p:nvSpPr>
+        <p:spPr>
+          <a:xfrm>
+            <a:off x="1727114" y="2602238"/>
+            <a:ext cx="2364210" cy="1884406"/>
+          </a:xfrm>
+          <a:prstGeom prst="rect">
+            <a:avLst/>
+          </a:prstGeom>
+          <a:noFill/>
+          <a:ln w="76200">
+            <a:solidFill>
+              <a:srgbClr val="005B82"/>
+            </a:solidFill>
+          </a:ln>
+        </p:spPr>
+        <p:style>
+          <a:lnRef idx="2">
+            <a:schemeClr val="accent1">
+              <a:shade val="15000"/>
+            </a:schemeClr>
+          </a:lnRef>
+          <a:fillRef idx="1">
+            <a:schemeClr val="accent1"/>
+          </a:fillRef>
+          <a:effectRef idx="0">
+            <a:schemeClr val="accent1"/>
+          </a:effectRef>
+          <a:fontRef idx="minor">
+            <a:schemeClr val="lt1"/>
+          </a:fontRef>
+        </p:style>
+        <p:txBody>
+          <a:bodyPr rtlCol="0" anchor="ctr"/>
+          <a:lstStyle/>
+          <a:p>
+            <a:pPr algn="ctr"/>
+            <a:endParaRPr kumimoji="1" lang="ja-JP" altLang="en-US">
+              <a:solidFill>
+                <a:srgbClr val="005B82"/>
+              </a:solidFill>
+            </a:endParaRPr>
+          </a:p>
+        </p:txBody>
+      </p:sp>
+      <p:grpSp>
+        <p:nvGrpSpPr>
+          <p:cNvPr id="9" name="グループ化 8">
+            <a:extLst>
+              <a:ext uri="{FF2B5EF4-FFF2-40B4-BE49-F238E27FC236}">
+                <a16:creationId xmlns:a16="http://schemas.microsoft.com/office/drawing/2014/main" id="{102D1C10-C8BF-C154-186C-682652491956}"/>
+              </a:ext>
+            </a:extLst>
+          </p:cNvPr>
+          <p:cNvGrpSpPr/>
+          <p:nvPr/>
+        </p:nvGrpSpPr>
+        <p:grpSpPr>
+          <a:xfrm>
+            <a:off x="1344116" y="2016979"/>
+            <a:ext cx="3002504" cy="2873881"/>
+            <a:chOff x="6384032" y="-10768024"/>
+            <a:chExt cx="3507910" cy="3357636"/>
+          </a:xfrm>
+        </p:grpSpPr>
+        <p:sp>
+          <p:nvSpPr>
+            <p:cNvPr id="125" name="テキスト ボックス 124">
+              <a:extLst>
+                <a:ext uri="{FF2B5EF4-FFF2-40B4-BE49-F238E27FC236}">
+                  <a16:creationId xmlns:a16="http://schemas.microsoft.com/office/drawing/2014/main" id="{DC187F3A-3FE4-611E-0FC6-345DC903DCDF}"/>
+                </a:ext>
+              </a:extLst>
+            </p:cNvPr>
+            <p:cNvSpPr txBox="1"/>
+            <p:nvPr/>
+          </p:nvSpPr>
+          <p:spPr>
+            <a:xfrm>
+              <a:off x="8106420" y="-10060773"/>
+              <a:ext cx="1402594" cy="287667"/>
+            </a:xfrm>
+            <a:prstGeom prst="rect">
+              <a:avLst/>
+            </a:prstGeom>
+            <a:noFill/>
+          </p:spPr>
+          <p:txBody>
+            <a:bodyPr wrap="square" lIns="0" tIns="0" rIns="0" bIns="0" rtlCol="0">
+              <a:spAutoFit/>
+            </a:bodyPr>
+            <a:lstStyle/>
+            <a:p>
+              <a:pPr algn="ctr"/>
+              <a:r>
+                <a:rPr lang="en-US" altLang="ja-JP" sz="1600" b="1" dirty="0">
+                  <a:solidFill>
+                    <a:srgbClr val="D51506"/>
+                  </a:solidFill>
+                  <a:latin typeface="Arial" panose="020B0604020202020204" pitchFamily="34" charset="0"/>
+                  <a:cs typeface="Arial" panose="020B0604020202020204" pitchFamily="34" charset="0"/>
+                </a:rPr>
+                <a:t>Dissolution</a:t>
+              </a:r>
+              <a:endParaRPr lang="ja-JP" altLang="en-US" sz="1600" b="1" dirty="0">
+                <a:solidFill>
+                  <a:srgbClr val="D51506"/>
+                </a:solidFill>
+                <a:latin typeface="Arial" panose="020B0604020202020204" pitchFamily="34" charset="0"/>
+                <a:cs typeface="Arial" panose="020B0604020202020204" pitchFamily="34" charset="0"/>
+              </a:endParaRPr>
+            </a:p>
+          </p:txBody>
+        </p:sp>
+        <p:sp>
+          <p:nvSpPr>
+            <p:cNvPr id="126" name="テキスト ボックス 125">
+              <a:extLst>
+                <a:ext uri="{FF2B5EF4-FFF2-40B4-BE49-F238E27FC236}">
+                  <a16:creationId xmlns:a16="http://schemas.microsoft.com/office/drawing/2014/main" id="{CCA69C73-FA01-96CA-FC02-EBC7A2E6A21D}"/>
+                </a:ext>
+              </a:extLst>
+            </p:cNvPr>
+            <p:cNvSpPr txBox="1"/>
+            <p:nvPr/>
+          </p:nvSpPr>
+          <p:spPr>
+            <a:xfrm>
+              <a:off x="7308263" y="-9094788"/>
+              <a:ext cx="1642765" cy="287667"/>
+            </a:xfrm>
+            <a:prstGeom prst="rect">
+              <a:avLst/>
+            </a:prstGeom>
+            <a:noFill/>
+          </p:spPr>
+          <p:txBody>
+            <a:bodyPr wrap="square" lIns="0" tIns="0" rIns="0" bIns="0" rtlCol="0">
+              <a:spAutoFit/>
+            </a:bodyPr>
+            <a:lstStyle/>
+            <a:p>
+              <a:pPr algn="ctr"/>
+              <a:r>
+                <a:rPr lang="en-US" altLang="ja-JP" sz="1600" b="1" dirty="0">
+                  <a:solidFill>
+                    <a:srgbClr val="005B82"/>
+                  </a:solidFill>
+                  <a:latin typeface="Arial" panose="020B0604020202020204" pitchFamily="34" charset="0"/>
+                  <a:cs typeface="Arial" panose="020B0604020202020204" pitchFamily="34" charset="0"/>
+                </a:rPr>
+                <a:t>Catalysis</a:t>
+              </a:r>
+              <a:endParaRPr lang="ja-JP" altLang="en-US" sz="1600" b="1" dirty="0">
+                <a:solidFill>
+                  <a:srgbClr val="005B82"/>
+                </a:solidFill>
+                <a:latin typeface="Arial" panose="020B0604020202020204" pitchFamily="34" charset="0"/>
+                <a:cs typeface="Arial" panose="020B0604020202020204" pitchFamily="34" charset="0"/>
+              </a:endParaRPr>
+            </a:p>
+          </p:txBody>
+        </p:sp>
+        <p:grpSp>
+          <p:nvGrpSpPr>
+            <p:cNvPr id="127" name="グループ化 126">
+              <a:extLst>
+                <a:ext uri="{FF2B5EF4-FFF2-40B4-BE49-F238E27FC236}">
+                  <a16:creationId xmlns:a16="http://schemas.microsoft.com/office/drawing/2014/main" id="{5E759F1B-DFF5-53F9-67B7-447A114098A2}"/>
+                </a:ext>
+              </a:extLst>
+            </p:cNvPr>
+            <p:cNvGrpSpPr/>
+            <p:nvPr/>
+          </p:nvGrpSpPr>
+          <p:grpSpPr>
+            <a:xfrm>
+              <a:off x="6384032" y="-10768024"/>
+              <a:ext cx="3507910" cy="3357636"/>
+              <a:chOff x="-176583" y="445828"/>
+              <a:chExt cx="3979861" cy="3809369"/>
+            </a:xfrm>
+          </p:grpSpPr>
+          <p:grpSp>
+            <p:nvGrpSpPr>
+              <p:cNvPr id="134" name="グループ化 133">
+                <a:extLst>
+                  <a:ext uri="{FF2B5EF4-FFF2-40B4-BE49-F238E27FC236}">
+                    <a16:creationId xmlns:a16="http://schemas.microsoft.com/office/drawing/2014/main" id="{1BBF1DEE-F25F-2E33-7A35-938B9ABCE0E8}"/>
+                  </a:ext>
+                </a:extLst>
+              </p:cNvPr>
+              <p:cNvGrpSpPr/>
+              <p:nvPr/>
+            </p:nvGrpSpPr>
+            <p:grpSpPr>
+              <a:xfrm>
+                <a:off x="-176583" y="445828"/>
+                <a:ext cx="3979861" cy="3809369"/>
+                <a:chOff x="635792" y="3328482"/>
+                <a:chExt cx="3201264" cy="3064126"/>
+              </a:xfrm>
+            </p:grpSpPr>
+            <p:sp>
+              <p:nvSpPr>
+                <p:cNvPr id="141" name="円弧 140">
+                  <a:extLst>
+                    <a:ext uri="{FF2B5EF4-FFF2-40B4-BE49-F238E27FC236}">
+                      <a16:creationId xmlns:a16="http://schemas.microsoft.com/office/drawing/2014/main" id="{513BA8E0-9D30-D05D-51A5-1319AB57F25E}"/>
+                    </a:ext>
+                  </a:extLst>
+                </p:cNvPr>
+                <p:cNvSpPr/>
+                <p:nvPr/>
+              </p:nvSpPr>
+              <p:spPr>
+                <a:xfrm rot="20439484">
+                  <a:off x="635792" y="3996769"/>
+                  <a:ext cx="1102705" cy="1102705"/>
+                </a:xfrm>
+                <a:prstGeom prst="arc">
+                  <a:avLst>
+                    <a:gd name="adj1" fmla="val 19713318"/>
+                    <a:gd name="adj2" fmla="val 1654528"/>
+                  </a:avLst>
+                </a:prstGeom>
+                <a:ln w="38100">
+                  <a:solidFill>
+                    <a:srgbClr val="D51506"/>
+                  </a:solidFill>
+                  <a:prstDash val="solid"/>
+                  <a:headEnd type="triangle" w="med" len="med"/>
+                  <a:tailEnd type="none" w="med" len="med"/>
+                </a:ln>
+              </p:spPr>
+              <p:style>
+                <a:lnRef idx="1">
+                  <a:schemeClr val="accent1"/>
+                </a:lnRef>
+                <a:fillRef idx="0">
+                  <a:schemeClr val="accent1"/>
+                </a:fillRef>
+                <a:effectRef idx="0">
+                  <a:schemeClr val="accent1"/>
+                </a:effectRef>
+                <a:fontRef idx="minor">
+                  <a:schemeClr val="tx1"/>
+                </a:fontRef>
+              </p:style>
+              <p:txBody>
+                <a:bodyPr rtlCol="0" anchor="ctr"/>
+                <a:lstStyle/>
+                <a:p>
+                  <a:pPr algn="ctr"/>
+                  <a:endParaRPr kumimoji="1" lang="ja-JP" altLang="en-US" sz="1400" dirty="0">
+                    <a:ea typeface="游ゴシック" panose="020B0400000000000000" pitchFamily="50" charset="-128"/>
+                  </a:endParaRPr>
+                </a:p>
+              </p:txBody>
+            </p:sp>
+            <p:sp>
+              <p:nvSpPr>
+                <p:cNvPr id="142" name="円弧 141">
+                  <a:extLst>
+                    <a:ext uri="{FF2B5EF4-FFF2-40B4-BE49-F238E27FC236}">
+                      <a16:creationId xmlns:a16="http://schemas.microsoft.com/office/drawing/2014/main" id="{F870F63C-6945-D85A-4008-5C56C0E232DD}"/>
+                    </a:ext>
+                  </a:extLst>
+                </p:cNvPr>
+                <p:cNvSpPr/>
+                <p:nvPr/>
+              </p:nvSpPr>
+              <p:spPr>
+                <a:xfrm>
+                  <a:off x="2734351" y="4242647"/>
+                  <a:ext cx="1102705" cy="1102705"/>
+                </a:xfrm>
+                <a:prstGeom prst="arc">
+                  <a:avLst>
+                    <a:gd name="adj1" fmla="val 6716678"/>
+                    <a:gd name="adj2" fmla="val 10109756"/>
+                  </a:avLst>
+                </a:prstGeom>
+                <a:ln w="38100">
+                  <a:solidFill>
+                    <a:srgbClr val="D51506"/>
+                  </a:solidFill>
+                  <a:headEnd type="triangle" w="med" len="med"/>
+                  <a:tailEnd type="none" w="med" len="med"/>
+                </a:ln>
+              </p:spPr>
+              <p:style>
+                <a:lnRef idx="1">
+                  <a:schemeClr val="accent1"/>
+                </a:lnRef>
+                <a:fillRef idx="0">
+                  <a:schemeClr val="accent1"/>
+                </a:fillRef>
+                <a:effectRef idx="0">
+                  <a:schemeClr val="accent1"/>
+                </a:effectRef>
+                <a:fontRef idx="minor">
+                  <a:schemeClr val="tx1"/>
+                </a:fontRef>
+              </p:style>
+              <p:txBody>
+                <a:bodyPr rtlCol="0" anchor="ctr"/>
+                <a:lstStyle/>
+                <a:p>
+                  <a:pPr algn="ctr"/>
+                  <a:endParaRPr kumimoji="1" lang="ja-JP" altLang="en-US" sz="1400" dirty="0">
+                    <a:ea typeface="游ゴシック" panose="020B0400000000000000" pitchFamily="50" charset="-128"/>
+                  </a:endParaRPr>
+                </a:p>
+              </p:txBody>
+            </p:sp>
+            <p:sp>
+              <p:nvSpPr>
+                <p:cNvPr id="143" name="円弧 142">
+                  <a:extLst>
+                    <a:ext uri="{FF2B5EF4-FFF2-40B4-BE49-F238E27FC236}">
+                      <a16:creationId xmlns:a16="http://schemas.microsoft.com/office/drawing/2014/main" id="{8CD71B27-57F9-56A1-ED5A-3266290D29E8}"/>
+                    </a:ext>
+                  </a:extLst>
+                </p:cNvPr>
+                <p:cNvSpPr/>
+                <p:nvPr/>
+              </p:nvSpPr>
+              <p:spPr>
+                <a:xfrm>
+                  <a:off x="2261636" y="5289903"/>
+                  <a:ext cx="1102705" cy="1102705"/>
+                </a:xfrm>
+                <a:prstGeom prst="arc">
+                  <a:avLst>
+                    <a:gd name="adj1" fmla="val 10384944"/>
+                    <a:gd name="adj2" fmla="val 13882916"/>
+                  </a:avLst>
+                </a:prstGeom>
+                <a:ln w="38100">
+                  <a:solidFill>
+                    <a:srgbClr val="D51506"/>
+                  </a:solidFill>
+                  <a:headEnd type="triangle" w="med" len="med"/>
+                  <a:tailEnd type="none" w="med" len="med"/>
+                </a:ln>
+              </p:spPr>
+              <p:style>
+                <a:lnRef idx="1">
+                  <a:schemeClr val="accent1"/>
+                </a:lnRef>
+                <a:fillRef idx="0">
+                  <a:schemeClr val="accent1"/>
+                </a:fillRef>
+                <a:effectRef idx="0">
+                  <a:schemeClr val="accent1"/>
+                </a:effectRef>
+                <a:fontRef idx="minor">
+                  <a:schemeClr val="tx1"/>
+                </a:fontRef>
+              </p:style>
+              <p:txBody>
+                <a:bodyPr rtlCol="0" anchor="ctr"/>
+                <a:lstStyle/>
+                <a:p>
+                  <a:pPr algn="ctr"/>
+                  <a:endParaRPr kumimoji="1" lang="ja-JP" altLang="en-US" sz="1400" dirty="0">
+                    <a:ea typeface="游ゴシック" panose="020B0400000000000000" pitchFamily="50" charset="-128"/>
+                  </a:endParaRPr>
+                </a:p>
+              </p:txBody>
+            </p:sp>
+            <p:sp>
+              <p:nvSpPr>
+                <p:cNvPr id="144" name="円弧 143">
+                  <a:extLst>
+                    <a:ext uri="{FF2B5EF4-FFF2-40B4-BE49-F238E27FC236}">
+                      <a16:creationId xmlns:a16="http://schemas.microsoft.com/office/drawing/2014/main" id="{227CF969-320F-83C2-E242-B8457C735620}"/>
+                    </a:ext>
+                  </a:extLst>
+                </p:cNvPr>
+                <p:cNvSpPr/>
+                <p:nvPr/>
+              </p:nvSpPr>
+              <p:spPr>
+                <a:xfrm rot="20439484">
+                  <a:off x="903331" y="5189528"/>
+                  <a:ext cx="1102705" cy="1102705"/>
+                </a:xfrm>
+                <a:prstGeom prst="arc">
+                  <a:avLst>
+                    <a:gd name="adj1" fmla="val 15935009"/>
+                    <a:gd name="adj2" fmla="val 19486096"/>
+                  </a:avLst>
+                </a:prstGeom>
+                <a:ln w="38100">
+                  <a:solidFill>
+                    <a:srgbClr val="D51506"/>
+                  </a:solidFill>
+                  <a:prstDash val="sysDot"/>
+                  <a:headEnd type="triangle" w="med" len="med"/>
+                  <a:tailEnd type="none" w="med" len="med"/>
+                </a:ln>
+              </p:spPr>
+              <p:style>
+                <a:lnRef idx="1">
+                  <a:schemeClr val="accent1"/>
+                </a:lnRef>
+                <a:fillRef idx="0">
+                  <a:schemeClr val="accent1"/>
+                </a:fillRef>
+                <a:effectRef idx="0">
+                  <a:schemeClr val="accent1"/>
+                </a:effectRef>
+                <a:fontRef idx="minor">
+                  <a:schemeClr val="tx1"/>
+                </a:fontRef>
+              </p:style>
+              <p:txBody>
+                <a:bodyPr rtlCol="0" anchor="ctr"/>
+                <a:lstStyle/>
+                <a:p>
+                  <a:pPr algn="ctr"/>
+                  <a:endParaRPr kumimoji="1" lang="ja-JP" altLang="en-US" sz="1400" dirty="0">
+                    <a:ea typeface="游ゴシック" panose="020B0400000000000000" pitchFamily="50" charset="-128"/>
+                  </a:endParaRPr>
+                </a:p>
+              </p:txBody>
+            </p:sp>
+            <p:sp>
+              <p:nvSpPr>
+                <p:cNvPr id="145" name="円弧 144">
+                  <a:extLst>
+                    <a:ext uri="{FF2B5EF4-FFF2-40B4-BE49-F238E27FC236}">
+                      <a16:creationId xmlns:a16="http://schemas.microsoft.com/office/drawing/2014/main" id="{604800F0-BF43-428D-1BC2-035915E5AF12}"/>
+                    </a:ext>
+                  </a:extLst>
+                </p:cNvPr>
+                <p:cNvSpPr/>
+                <p:nvPr/>
+              </p:nvSpPr>
+              <p:spPr>
+                <a:xfrm>
+                  <a:off x="1985015" y="3328482"/>
+                  <a:ext cx="998365" cy="1102705"/>
+                </a:xfrm>
+                <a:prstGeom prst="arc">
+                  <a:avLst>
+                    <a:gd name="adj1" fmla="val 2748828"/>
+                    <a:gd name="adj2" fmla="val 6450103"/>
+                  </a:avLst>
+                </a:prstGeom>
+                <a:ln w="38100">
+                  <a:solidFill>
+                    <a:srgbClr val="D51506"/>
+                  </a:solidFill>
+                  <a:headEnd type="triangle" w="med" len="med"/>
+                  <a:tailEnd type="none" w="med" len="med"/>
+                </a:ln>
+              </p:spPr>
+              <p:style>
+                <a:lnRef idx="1">
+                  <a:schemeClr val="accent1"/>
+                </a:lnRef>
+                <a:fillRef idx="0">
+                  <a:schemeClr val="accent1"/>
+                </a:fillRef>
+                <a:effectRef idx="0">
+                  <a:schemeClr val="accent1"/>
+                </a:effectRef>
+                <a:fontRef idx="minor">
+                  <a:schemeClr val="tx1"/>
+                </a:fontRef>
+              </p:style>
+              <p:txBody>
+                <a:bodyPr rtlCol="0" anchor="ctr"/>
+                <a:lstStyle/>
+                <a:p>
+                  <a:pPr algn="ctr"/>
+                  <a:endParaRPr kumimoji="1" lang="ja-JP" altLang="en-US" sz="1400" dirty="0">
+                    <a:ea typeface="游ゴシック" panose="020B0400000000000000" pitchFamily="50" charset="-128"/>
+                  </a:endParaRPr>
+                </a:p>
+              </p:txBody>
+            </p:sp>
+          </p:grpSp>
+          <p:grpSp>
+            <p:nvGrpSpPr>
+              <p:cNvPr id="135" name="グループ化 134">
+                <a:extLst>
+                  <a:ext uri="{FF2B5EF4-FFF2-40B4-BE49-F238E27FC236}">
+                    <a16:creationId xmlns:a16="http://schemas.microsoft.com/office/drawing/2014/main" id="{52AA77A0-EFA4-9296-A955-AD25C913D6C1}"/>
+                  </a:ext>
+                </a:extLst>
+              </p:cNvPr>
+              <p:cNvGrpSpPr/>
+              <p:nvPr/>
+            </p:nvGrpSpPr>
+            <p:grpSpPr>
+              <a:xfrm>
+                <a:off x="1056078" y="1764446"/>
+                <a:ext cx="1370900" cy="1370900"/>
+                <a:chOff x="1644873" y="4389133"/>
+                <a:chExt cx="1102705" cy="1102705"/>
+              </a:xfrm>
+            </p:grpSpPr>
+            <p:sp>
+              <p:nvSpPr>
+                <p:cNvPr id="136" name="円弧 135">
+                  <a:extLst>
+                    <a:ext uri="{FF2B5EF4-FFF2-40B4-BE49-F238E27FC236}">
+                      <a16:creationId xmlns:a16="http://schemas.microsoft.com/office/drawing/2014/main" id="{D267363F-94C8-0856-C753-95D0DCE352FB}"/>
+                    </a:ext>
+                  </a:extLst>
+                </p:cNvPr>
+                <p:cNvSpPr/>
+                <p:nvPr/>
+              </p:nvSpPr>
+              <p:spPr>
+                <a:xfrm rot="3036775">
+                  <a:off x="1644873" y="4389133"/>
+                  <a:ext cx="1102705" cy="1102705"/>
+                </a:xfrm>
+                <a:prstGeom prst="arc">
+                  <a:avLst>
+                    <a:gd name="adj1" fmla="val 18234785"/>
+                    <a:gd name="adj2" fmla="val 20963355"/>
+                  </a:avLst>
+                </a:prstGeom>
+                <a:ln w="38100">
+                  <a:solidFill>
+                    <a:srgbClr val="005B82"/>
+                  </a:solidFill>
+                  <a:headEnd type="none" w="med" len="med"/>
+                  <a:tailEnd type="triangle" w="med" len="med"/>
+                </a:ln>
+              </p:spPr>
+              <p:style>
+                <a:lnRef idx="1">
+                  <a:schemeClr val="accent1"/>
+                </a:lnRef>
+                <a:fillRef idx="0">
+                  <a:schemeClr val="accent1"/>
+                </a:fillRef>
+                <a:effectRef idx="0">
+                  <a:schemeClr val="accent1"/>
+                </a:effectRef>
+                <a:fontRef idx="minor">
+                  <a:schemeClr val="tx1"/>
+                </a:fontRef>
+              </p:style>
+              <p:txBody>
+                <a:bodyPr rtlCol="0" anchor="ctr"/>
+                <a:lstStyle/>
+                <a:p>
+                  <a:pPr algn="ctr"/>
+                  <a:endParaRPr kumimoji="1" lang="ja-JP" altLang="en-US" sz="1400">
+                    <a:ea typeface="游ゴシック" panose="020B0400000000000000" pitchFamily="50" charset="-128"/>
+                  </a:endParaRPr>
+                </a:p>
+              </p:txBody>
+            </p:sp>
+            <p:sp>
+              <p:nvSpPr>
+                <p:cNvPr id="137" name="円弧 136">
+                  <a:extLst>
+                    <a:ext uri="{FF2B5EF4-FFF2-40B4-BE49-F238E27FC236}">
+                      <a16:creationId xmlns:a16="http://schemas.microsoft.com/office/drawing/2014/main" id="{4699DD0E-4481-BB39-4729-71B87CB887CF}"/>
+                    </a:ext>
+                  </a:extLst>
+                </p:cNvPr>
+                <p:cNvSpPr/>
+                <p:nvPr/>
+              </p:nvSpPr>
+              <p:spPr>
+                <a:xfrm rot="3036775">
+                  <a:off x="1644873" y="4389133"/>
+                  <a:ext cx="1102705" cy="1102705"/>
+                </a:xfrm>
+                <a:prstGeom prst="arc">
+                  <a:avLst>
+                    <a:gd name="adj1" fmla="val 13960208"/>
+                    <a:gd name="adj2" fmla="val 16567947"/>
+                  </a:avLst>
+                </a:prstGeom>
+                <a:ln w="38100">
+                  <a:solidFill>
+                    <a:srgbClr val="005B82"/>
+                  </a:solidFill>
+                  <a:headEnd type="none" w="med" len="med"/>
+                  <a:tailEnd type="triangle" w="med" len="med"/>
+                </a:ln>
+              </p:spPr>
+              <p:style>
+                <a:lnRef idx="1">
+                  <a:schemeClr val="accent1"/>
+                </a:lnRef>
+                <a:fillRef idx="0">
+                  <a:schemeClr val="accent1"/>
+                </a:fillRef>
+                <a:effectRef idx="0">
+                  <a:schemeClr val="accent1"/>
+                </a:effectRef>
+                <a:fontRef idx="minor">
+                  <a:schemeClr val="tx1"/>
+                </a:fontRef>
+              </p:style>
+              <p:txBody>
+                <a:bodyPr rtlCol="0" anchor="ctr"/>
+                <a:lstStyle/>
+                <a:p>
+                  <a:pPr algn="ctr"/>
+                  <a:endParaRPr kumimoji="1" lang="ja-JP" altLang="en-US" sz="1400">
+                    <a:ea typeface="游ゴシック" panose="020B0400000000000000" pitchFamily="50" charset="-128"/>
+                  </a:endParaRPr>
+                </a:p>
+              </p:txBody>
+            </p:sp>
+            <p:sp>
+              <p:nvSpPr>
+                <p:cNvPr id="138" name="円弧 137">
+                  <a:extLst>
+                    <a:ext uri="{FF2B5EF4-FFF2-40B4-BE49-F238E27FC236}">
+                      <a16:creationId xmlns:a16="http://schemas.microsoft.com/office/drawing/2014/main" id="{C560F52B-C10B-9456-0BCE-A7E10DD62912}"/>
+                    </a:ext>
+                  </a:extLst>
+                </p:cNvPr>
+                <p:cNvSpPr/>
+                <p:nvPr/>
+              </p:nvSpPr>
+              <p:spPr>
+                <a:xfrm rot="1964917">
+                  <a:off x="1644873" y="4389133"/>
+                  <a:ext cx="1102705" cy="1102705"/>
+                </a:xfrm>
+                <a:prstGeom prst="arc">
+                  <a:avLst>
+                    <a:gd name="adj1" fmla="val 6393080"/>
+                    <a:gd name="adj2" fmla="val 9397424"/>
+                  </a:avLst>
+                </a:prstGeom>
+                <a:ln w="38100">
+                  <a:solidFill>
+                    <a:srgbClr val="005B82"/>
+                  </a:solidFill>
+                  <a:prstDash val="sysDot"/>
+                  <a:headEnd type="none" w="med" len="med"/>
+                  <a:tailEnd type="triangle" w="med" len="med"/>
+                </a:ln>
+              </p:spPr>
+              <p:style>
+                <a:lnRef idx="1">
+                  <a:schemeClr val="accent1"/>
+                </a:lnRef>
+                <a:fillRef idx="0">
+                  <a:schemeClr val="accent1"/>
+                </a:fillRef>
+                <a:effectRef idx="0">
+                  <a:schemeClr val="accent1"/>
+                </a:effectRef>
+                <a:fontRef idx="minor">
+                  <a:schemeClr val="tx1"/>
+                </a:fontRef>
+              </p:style>
+              <p:txBody>
+                <a:bodyPr rtlCol="0" anchor="ctr"/>
+                <a:lstStyle/>
+                <a:p>
+                  <a:pPr algn="ctr"/>
+                  <a:endParaRPr kumimoji="1" lang="ja-JP" altLang="en-US" sz="1400">
+                    <a:ea typeface="游ゴシック" panose="020B0400000000000000" pitchFamily="50" charset="-128"/>
+                  </a:endParaRPr>
+                </a:p>
+              </p:txBody>
+            </p:sp>
+            <p:sp>
+              <p:nvSpPr>
+                <p:cNvPr id="139" name="円弧 138">
+                  <a:extLst>
+                    <a:ext uri="{FF2B5EF4-FFF2-40B4-BE49-F238E27FC236}">
+                      <a16:creationId xmlns:a16="http://schemas.microsoft.com/office/drawing/2014/main" id="{F0535BC4-E2EE-0932-3B22-2D0E4E67416F}"/>
+                    </a:ext>
+                  </a:extLst>
+                </p:cNvPr>
+                <p:cNvSpPr/>
+                <p:nvPr/>
+              </p:nvSpPr>
+              <p:spPr>
+                <a:xfrm rot="2446631">
+                  <a:off x="1644873" y="4389133"/>
+                  <a:ext cx="1102705" cy="1102705"/>
+                </a:xfrm>
+                <a:prstGeom prst="arc">
+                  <a:avLst>
+                    <a:gd name="adj1" fmla="val 1060883"/>
+                    <a:gd name="adj2" fmla="val 4193964"/>
+                  </a:avLst>
+                </a:prstGeom>
+                <a:ln w="38100">
+                  <a:solidFill>
+                    <a:srgbClr val="005B82"/>
+                  </a:solidFill>
+                  <a:headEnd type="none" w="med" len="med"/>
+                  <a:tailEnd type="triangle" w="med" len="med"/>
+                </a:ln>
+              </p:spPr>
+              <p:style>
+                <a:lnRef idx="1">
+                  <a:schemeClr val="accent1"/>
+                </a:lnRef>
+                <a:fillRef idx="0">
+                  <a:schemeClr val="accent1"/>
+                </a:fillRef>
+                <a:effectRef idx="0">
+                  <a:schemeClr val="accent1"/>
+                </a:effectRef>
+                <a:fontRef idx="minor">
+                  <a:schemeClr val="tx1"/>
+                </a:fontRef>
+              </p:style>
+              <p:txBody>
+                <a:bodyPr rtlCol="0" anchor="ctr"/>
+                <a:lstStyle/>
+                <a:p>
+                  <a:pPr algn="ctr"/>
+                  <a:endParaRPr kumimoji="1" lang="ja-JP" altLang="en-US" sz="1400" dirty="0">
+                    <a:ea typeface="游ゴシック" panose="020B0400000000000000" pitchFamily="50" charset="-128"/>
+                  </a:endParaRPr>
+                </a:p>
+              </p:txBody>
+            </p:sp>
+            <p:sp>
+              <p:nvSpPr>
+                <p:cNvPr id="140" name="円弧 139">
+                  <a:extLst>
+                    <a:ext uri="{FF2B5EF4-FFF2-40B4-BE49-F238E27FC236}">
+                      <a16:creationId xmlns:a16="http://schemas.microsoft.com/office/drawing/2014/main" id="{50CE74A1-0714-F519-DA4A-63BD128EC3F4}"/>
+                    </a:ext>
+                  </a:extLst>
+                </p:cNvPr>
+                <p:cNvSpPr/>
+                <p:nvPr/>
+              </p:nvSpPr>
+              <p:spPr>
+                <a:xfrm rot="3036775">
+                  <a:off x="1644873" y="4389133"/>
+                  <a:ext cx="1102705" cy="1102705"/>
+                </a:xfrm>
+                <a:prstGeom prst="arc">
+                  <a:avLst>
+                    <a:gd name="adj1" fmla="val 9774902"/>
+                    <a:gd name="adj2" fmla="val 12541547"/>
+                  </a:avLst>
+                </a:prstGeom>
+                <a:ln w="38100">
+                  <a:solidFill>
+                    <a:srgbClr val="005B82"/>
+                  </a:solidFill>
+                  <a:prstDash val="solid"/>
+                  <a:headEnd type="none" w="med" len="med"/>
+                  <a:tailEnd type="triangle" w="med" len="med"/>
+                </a:ln>
+              </p:spPr>
+              <p:style>
+                <a:lnRef idx="1">
+                  <a:schemeClr val="accent1"/>
+                </a:lnRef>
+                <a:fillRef idx="0">
+                  <a:schemeClr val="accent1"/>
+                </a:fillRef>
+                <a:effectRef idx="0">
+                  <a:schemeClr val="accent1"/>
+                </a:effectRef>
+                <a:fontRef idx="minor">
+                  <a:schemeClr val="tx1"/>
+                </a:fontRef>
+              </p:style>
+              <p:txBody>
+                <a:bodyPr rtlCol="0" anchor="ctr"/>
+                <a:lstStyle/>
+                <a:p>
+                  <a:pPr algn="ctr"/>
+                  <a:endParaRPr kumimoji="1" lang="ja-JP" altLang="en-US" sz="1400">
+                    <a:ea typeface="游ゴシック" panose="020B0400000000000000" pitchFamily="50" charset="-128"/>
+                  </a:endParaRPr>
+                </a:p>
+              </p:txBody>
+            </p:sp>
+          </p:grpSp>
+        </p:grpSp>
+        <p:grpSp>
+          <p:nvGrpSpPr>
+            <p:cNvPr id="128" name="グループ化 127">
+              <a:extLst>
+                <a:ext uri="{FF2B5EF4-FFF2-40B4-BE49-F238E27FC236}">
+                  <a16:creationId xmlns:a16="http://schemas.microsoft.com/office/drawing/2014/main" id="{FBBC13E9-A045-C53A-7057-876BFCBA8207}"/>
+                </a:ext>
+              </a:extLst>
+            </p:cNvPr>
+            <p:cNvGrpSpPr/>
+            <p:nvPr/>
+          </p:nvGrpSpPr>
+          <p:grpSpPr>
+            <a:xfrm>
+              <a:off x="7334889" y="-9792185"/>
+              <a:ext cx="1511013" cy="1438562"/>
+              <a:chOff x="1593968" y="4261561"/>
+              <a:chExt cx="1215407" cy="1157130"/>
+            </a:xfrm>
+          </p:grpSpPr>
+          <p:sp>
+            <p:nvSpPr>
+              <p:cNvPr id="129" name="テキスト ボックス 128">
+                <a:extLst>
+                  <a:ext uri="{FF2B5EF4-FFF2-40B4-BE49-F238E27FC236}">
+                    <a16:creationId xmlns:a16="http://schemas.microsoft.com/office/drawing/2014/main" id="{50810010-ED0E-CC20-29CA-2F0F5BCBF180}"/>
+                  </a:ext>
+                </a:extLst>
+              </p:cNvPr>
+              <p:cNvSpPr txBox="1"/>
+              <p:nvPr/>
+            </p:nvSpPr>
+            <p:spPr>
+              <a:xfrm>
+                <a:off x="2520736" y="4605453"/>
+                <a:ext cx="288639" cy="222809"/>
+              </a:xfrm>
+              <a:prstGeom prst="rect">
+                <a:avLst/>
+              </a:prstGeom>
+              <a:noFill/>
+            </p:spPr>
+            <p:txBody>
+              <a:bodyPr wrap="square" lIns="0" tIns="0" rIns="0" bIns="0" rtlCol="0" anchor="t" anchorCtr="0">
+                <a:spAutoFit/>
+              </a:bodyPr>
+              <a:lstStyle/>
+              <a:p>
+                <a:pPr algn="ctr"/>
+                <a:r>
+                  <a:rPr lang="en-US" altLang="ja-JP" b="1" dirty="0">
+                    <a:solidFill>
+                      <a:srgbClr val="005B82"/>
+                    </a:solidFill>
+                    <a:ea typeface="游ゴシック" panose="020B0400000000000000" pitchFamily="50" charset="-128"/>
+                    <a:cs typeface="Arial" panose="020B0604020202020204" pitchFamily="34" charset="0"/>
+                  </a:rPr>
+                  <a:t>X</a:t>
+                </a:r>
+                <a:r>
+                  <a:rPr lang="en-US" altLang="ja-JP" b="1" baseline="-25000" dirty="0">
+                    <a:solidFill>
+                      <a:srgbClr val="005B82"/>
+                    </a:solidFill>
+                    <a:ea typeface="游ゴシック" panose="020B0400000000000000" pitchFamily="50" charset="-128"/>
+                    <a:cs typeface="Arial" panose="020B0604020202020204" pitchFamily="34" charset="0"/>
+                  </a:rPr>
+                  <a:t>2</a:t>
+                </a:r>
+                <a:endParaRPr lang="ja-JP" altLang="en-US" b="1" baseline="-25000" dirty="0">
+                  <a:solidFill>
+                    <a:srgbClr val="005B82"/>
+                  </a:solidFill>
+                  <a:ea typeface="游ゴシック" panose="020B0400000000000000" pitchFamily="50" charset="-128"/>
+                  <a:cs typeface="Arial" panose="020B0604020202020204" pitchFamily="34" charset="0"/>
+                </a:endParaRPr>
+              </a:p>
+            </p:txBody>
+          </p:sp>
+          <p:sp>
+            <p:nvSpPr>
+              <p:cNvPr id="130" name="テキスト ボックス 129">
+                <a:extLst>
+                  <a:ext uri="{FF2B5EF4-FFF2-40B4-BE49-F238E27FC236}">
+                    <a16:creationId xmlns:a16="http://schemas.microsoft.com/office/drawing/2014/main" id="{8310BCB6-9BBF-6D2A-739F-9876F945247D}"/>
+                  </a:ext>
+                </a:extLst>
+              </p:cNvPr>
+              <p:cNvSpPr txBox="1"/>
+              <p:nvPr/>
+            </p:nvSpPr>
+            <p:spPr>
+              <a:xfrm>
+                <a:off x="2408714" y="5184187"/>
+                <a:ext cx="288639" cy="222809"/>
+              </a:xfrm>
+              <a:prstGeom prst="rect">
+                <a:avLst/>
+              </a:prstGeom>
+              <a:noFill/>
+            </p:spPr>
+            <p:txBody>
+              <a:bodyPr wrap="square" lIns="0" tIns="0" rIns="0" bIns="0" rtlCol="0" anchor="t" anchorCtr="0">
+                <a:spAutoFit/>
+              </a:bodyPr>
+              <a:lstStyle/>
+              <a:p>
+                <a:pPr algn="ctr"/>
+                <a:r>
+                  <a:rPr lang="en-US" altLang="ja-JP" b="1" dirty="0">
+                    <a:solidFill>
+                      <a:srgbClr val="005B82"/>
+                    </a:solidFill>
+                    <a:ea typeface="游ゴシック" panose="020B0400000000000000" pitchFamily="50" charset="-128"/>
+                    <a:cs typeface="Arial" panose="020B0604020202020204" pitchFamily="34" charset="0"/>
+                  </a:rPr>
+                  <a:t>X</a:t>
+                </a:r>
+                <a:r>
+                  <a:rPr lang="en-US" altLang="ja-JP" b="1" baseline="-25000" dirty="0">
+                    <a:solidFill>
+                      <a:srgbClr val="005B82"/>
+                    </a:solidFill>
+                    <a:ea typeface="游ゴシック" panose="020B0400000000000000" pitchFamily="50" charset="-128"/>
+                    <a:cs typeface="Arial" panose="020B0604020202020204" pitchFamily="34" charset="0"/>
+                  </a:rPr>
+                  <a:t>3</a:t>
+                </a:r>
+                <a:endParaRPr lang="ja-JP" altLang="en-US" b="1" baseline="-25000" dirty="0">
+                  <a:solidFill>
+                    <a:srgbClr val="005B82"/>
+                  </a:solidFill>
+                  <a:ea typeface="游ゴシック" panose="020B0400000000000000" pitchFamily="50" charset="-128"/>
+                  <a:cs typeface="Arial" panose="020B0604020202020204" pitchFamily="34" charset="0"/>
+                </a:endParaRPr>
+              </a:p>
+            </p:txBody>
+          </p:sp>
+          <p:sp>
+            <p:nvSpPr>
+              <p:cNvPr id="131" name="テキスト ボックス 130">
+                <a:extLst>
+                  <a:ext uri="{FF2B5EF4-FFF2-40B4-BE49-F238E27FC236}">
+                    <a16:creationId xmlns:a16="http://schemas.microsoft.com/office/drawing/2014/main" id="{FB6CB760-578C-93C0-1A7E-B4B20DF55D9C}"/>
+                  </a:ext>
+                </a:extLst>
+              </p:cNvPr>
+              <p:cNvSpPr txBox="1"/>
+              <p:nvPr/>
+            </p:nvSpPr>
+            <p:spPr>
+              <a:xfrm>
+                <a:off x="1737227" y="5195882"/>
+                <a:ext cx="288639" cy="222809"/>
+              </a:xfrm>
+              <a:prstGeom prst="rect">
+                <a:avLst/>
+              </a:prstGeom>
+              <a:noFill/>
+            </p:spPr>
+            <p:txBody>
+              <a:bodyPr wrap="square" lIns="0" tIns="0" rIns="0" bIns="0" rtlCol="0" anchor="t" anchorCtr="0">
+                <a:spAutoFit/>
+              </a:bodyPr>
+              <a:lstStyle/>
+              <a:p>
+                <a:pPr algn="ctr"/>
+                <a:r>
+                  <a:rPr lang="en-US" altLang="ja-JP" b="1" dirty="0">
+                    <a:solidFill>
+                      <a:srgbClr val="005B82"/>
+                    </a:solidFill>
+                    <a:ea typeface="游ゴシック" panose="020B0400000000000000" pitchFamily="50" charset="-128"/>
+                    <a:cs typeface="Arial" panose="020B0604020202020204" pitchFamily="34" charset="0"/>
+                  </a:rPr>
+                  <a:t>X</a:t>
+                </a:r>
+                <a:r>
+                  <a:rPr lang="en-US" altLang="ja-JP" b="1" baseline="-25000" dirty="0">
+                    <a:solidFill>
+                      <a:srgbClr val="005B82"/>
+                    </a:solidFill>
+                    <a:ea typeface="游ゴシック" panose="020B0400000000000000" pitchFamily="50" charset="-128"/>
+                    <a:cs typeface="Arial" panose="020B0604020202020204" pitchFamily="34" charset="0"/>
+                  </a:rPr>
+                  <a:t>4</a:t>
+                </a:r>
+                <a:endParaRPr lang="ja-JP" altLang="en-US" b="1" baseline="-25000" dirty="0">
+                  <a:solidFill>
+                    <a:srgbClr val="005B82"/>
+                  </a:solidFill>
+                  <a:ea typeface="游ゴシック" panose="020B0400000000000000" pitchFamily="50" charset="-128"/>
+                  <a:cs typeface="Arial" panose="020B0604020202020204" pitchFamily="34" charset="0"/>
+                </a:endParaRPr>
+              </a:p>
+            </p:txBody>
+          </p:sp>
+          <p:sp>
+            <p:nvSpPr>
+              <p:cNvPr id="132" name="テキスト ボックス 131">
+                <a:extLst>
+                  <a:ext uri="{FF2B5EF4-FFF2-40B4-BE49-F238E27FC236}">
+                    <a16:creationId xmlns:a16="http://schemas.microsoft.com/office/drawing/2014/main" id="{06CF2A5C-F79F-0506-1E9D-2AEDAB6F64BA}"/>
+                  </a:ext>
+                </a:extLst>
+              </p:cNvPr>
+              <p:cNvSpPr txBox="1"/>
+              <p:nvPr/>
+            </p:nvSpPr>
+            <p:spPr>
+              <a:xfrm>
+                <a:off x="1593968" y="4605453"/>
+                <a:ext cx="288639" cy="222809"/>
+              </a:xfrm>
+              <a:prstGeom prst="rect">
+                <a:avLst/>
+              </a:prstGeom>
+              <a:noFill/>
+            </p:spPr>
+            <p:txBody>
+              <a:bodyPr wrap="square" lIns="0" tIns="0" rIns="0" bIns="0" rtlCol="0" anchor="t" anchorCtr="0">
+                <a:spAutoFit/>
+              </a:bodyPr>
+              <a:lstStyle/>
+              <a:p>
+                <a:pPr algn="ctr"/>
+                <a:r>
+                  <a:rPr lang="en-US" altLang="ja-JP" b="1" dirty="0" err="1">
+                    <a:solidFill>
+                      <a:srgbClr val="005B82"/>
+                    </a:solidFill>
+                    <a:ea typeface="游ゴシック" panose="020B0400000000000000" pitchFamily="50" charset="-128"/>
+                    <a:cs typeface="Arial" panose="020B0604020202020204" pitchFamily="34" charset="0"/>
+                  </a:rPr>
+                  <a:t>X</a:t>
+                </a:r>
+                <a:r>
+                  <a:rPr lang="en-US" altLang="ja-JP" b="1" baseline="-25000" dirty="0" err="1">
+                    <a:solidFill>
+                      <a:srgbClr val="005B82"/>
+                    </a:solidFill>
+                    <a:ea typeface="游ゴシック" panose="020B0400000000000000" pitchFamily="50" charset="-128"/>
+                    <a:cs typeface="Arial" panose="020B0604020202020204" pitchFamily="34" charset="0"/>
+                  </a:rPr>
+                  <a:t>n</a:t>
+                </a:r>
+                <a:endParaRPr lang="ja-JP" altLang="en-US" b="1" baseline="-25000" dirty="0">
+                  <a:solidFill>
+                    <a:srgbClr val="005B82"/>
+                  </a:solidFill>
+                  <a:ea typeface="游ゴシック" panose="020B0400000000000000" pitchFamily="50" charset="-128"/>
+                  <a:cs typeface="Arial" panose="020B0604020202020204" pitchFamily="34" charset="0"/>
+                </a:endParaRPr>
+              </a:p>
+            </p:txBody>
+          </p:sp>
+          <p:sp>
+            <p:nvSpPr>
+              <p:cNvPr id="133" name="テキスト ボックス 132">
+                <a:extLst>
+                  <a:ext uri="{FF2B5EF4-FFF2-40B4-BE49-F238E27FC236}">
+                    <a16:creationId xmlns:a16="http://schemas.microsoft.com/office/drawing/2014/main" id="{C96E6338-E997-4B11-E45E-72730BA59D0E}"/>
+                  </a:ext>
+                </a:extLst>
+              </p:cNvPr>
+              <p:cNvSpPr txBox="1"/>
+              <p:nvPr/>
+            </p:nvSpPr>
+            <p:spPr>
+              <a:xfrm>
+                <a:off x="2058678" y="4261561"/>
+                <a:ext cx="288639" cy="222809"/>
+              </a:xfrm>
+              <a:prstGeom prst="rect">
+                <a:avLst/>
+              </a:prstGeom>
+              <a:noFill/>
+            </p:spPr>
+            <p:txBody>
+              <a:bodyPr wrap="square" lIns="0" tIns="0" rIns="0" bIns="0" rtlCol="0" anchor="t" anchorCtr="0">
+                <a:spAutoFit/>
+              </a:bodyPr>
+              <a:lstStyle/>
+              <a:p>
+                <a:pPr algn="ctr"/>
+                <a:r>
+                  <a:rPr lang="en-US" altLang="ja-JP" b="1" dirty="0">
+                    <a:solidFill>
+                      <a:srgbClr val="005B82"/>
+                    </a:solidFill>
+                    <a:ea typeface="游ゴシック" panose="020B0400000000000000" pitchFamily="50" charset="-128"/>
+                    <a:cs typeface="Arial" panose="020B0604020202020204" pitchFamily="34" charset="0"/>
+                  </a:rPr>
+                  <a:t>X</a:t>
+                </a:r>
+                <a:r>
+                  <a:rPr lang="en-US" altLang="ja-JP" b="1" baseline="-25000" dirty="0">
+                    <a:solidFill>
+                      <a:srgbClr val="005B82"/>
+                    </a:solidFill>
+                    <a:ea typeface="游ゴシック" panose="020B0400000000000000" pitchFamily="50" charset="-128"/>
+                    <a:cs typeface="Arial" panose="020B0604020202020204" pitchFamily="34" charset="0"/>
+                  </a:rPr>
+                  <a:t>1</a:t>
+                </a:r>
+                <a:endParaRPr lang="ja-JP" altLang="en-US" b="1" baseline="-25000" dirty="0">
+                  <a:solidFill>
+                    <a:srgbClr val="005B82"/>
+                  </a:solidFill>
+                  <a:ea typeface="游ゴシック" panose="020B0400000000000000" pitchFamily="50" charset="-128"/>
+                  <a:cs typeface="Arial" panose="020B0604020202020204" pitchFamily="34" charset="0"/>
+                </a:endParaRPr>
+              </a:p>
+            </p:txBody>
+          </p:sp>
+        </p:grpSp>
+      </p:grpSp>
+      <p:sp>
+        <p:nvSpPr>
+          <p:cNvPr id="10" name="テキスト ボックス 9">
+            <a:extLst>
+              <a:ext uri="{FF2B5EF4-FFF2-40B4-BE49-F238E27FC236}">
+                <a16:creationId xmlns:a16="http://schemas.microsoft.com/office/drawing/2014/main" id="{33C972BF-0FA7-C150-1167-D46A7751C89D}"/>
+              </a:ext>
+            </a:extLst>
+          </p:cNvPr>
+          <p:cNvSpPr txBox="1"/>
+          <p:nvPr/>
+        </p:nvSpPr>
+        <p:spPr>
+          <a:xfrm>
+            <a:off x="1495492" y="1829391"/>
+            <a:ext cx="2827455" cy="492443"/>
+          </a:xfrm>
+          <a:prstGeom prst="rect">
+            <a:avLst/>
+          </a:prstGeom>
+          <a:noFill/>
+        </p:spPr>
+        <p:txBody>
+          <a:bodyPr wrap="square" lIns="0" tIns="0" rIns="0" bIns="0" rtlCol="0">
+            <a:spAutoFit/>
+          </a:bodyPr>
+          <a:lstStyle/>
+          <a:p>
+            <a:pPr algn="ctr"/>
+            <a:r>
+              <a:rPr kumimoji="1" lang="en-US" altLang="ja-JP" sz="3200" b="1" dirty="0">
+                <a:solidFill>
+                  <a:srgbClr val="005B82"/>
+                </a:solidFill>
+                <a:latin typeface="Arial" panose="020B0604020202020204" pitchFamily="34" charset="0"/>
+                <a:cs typeface="Arial" panose="020B0604020202020204" pitchFamily="34" charset="0"/>
+              </a:rPr>
+              <a:t>Mathematics</a:t>
+            </a:r>
+            <a:endParaRPr kumimoji="1" lang="ja-JP" altLang="en-US" sz="3200" b="1" dirty="0">
+              <a:solidFill>
+                <a:srgbClr val="005B82"/>
+              </a:solidFill>
+              <a:latin typeface="Arial" panose="020B0604020202020204" pitchFamily="34" charset="0"/>
+              <a:cs typeface="Arial" panose="020B0604020202020204" pitchFamily="34" charset="0"/>
+            </a:endParaRPr>
+          </a:p>
+        </p:txBody>
+      </p:sp>
+      <p:sp>
+        <p:nvSpPr>
+          <p:cNvPr id="11" name="テキスト ボックス 10">
+            <a:extLst>
+              <a:ext uri="{FF2B5EF4-FFF2-40B4-BE49-F238E27FC236}">
+                <a16:creationId xmlns:a16="http://schemas.microsoft.com/office/drawing/2014/main" id="{DD4231C1-1165-9264-D99D-B138C2EA7849}"/>
+              </a:ext>
+            </a:extLst>
+          </p:cNvPr>
+          <p:cNvSpPr txBox="1"/>
+          <p:nvPr/>
+        </p:nvSpPr>
+        <p:spPr>
+          <a:xfrm>
+            <a:off x="1495492" y="2287990"/>
+            <a:ext cx="2827455" cy="276999"/>
+          </a:xfrm>
+          <a:prstGeom prst="rect">
+            <a:avLst/>
+          </a:prstGeom>
+          <a:noFill/>
+        </p:spPr>
+        <p:txBody>
+          <a:bodyPr wrap="square" lIns="0" tIns="0" rIns="0" bIns="0" rtlCol="0">
+            <a:spAutoFit/>
+          </a:bodyPr>
+          <a:lstStyle/>
+          <a:p>
+            <a:pPr algn="ctr"/>
+            <a:r>
+              <a:rPr kumimoji="1" lang="en-US" altLang="ja-JP" b="1" dirty="0">
+                <a:solidFill>
+                  <a:srgbClr val="005B82"/>
+                </a:solidFill>
+                <a:latin typeface="Arial" panose="020B0604020202020204" pitchFamily="34" charset="0"/>
+                <a:cs typeface="Arial" panose="020B0604020202020204" pitchFamily="34" charset="0"/>
+              </a:rPr>
+              <a:t>(Predictive Models)</a:t>
+            </a:r>
+            <a:endParaRPr kumimoji="1" lang="ja-JP" altLang="en-US" b="1" dirty="0">
+              <a:solidFill>
+                <a:srgbClr val="005B82"/>
+              </a:solidFill>
+              <a:latin typeface="Arial" panose="020B0604020202020204" pitchFamily="34" charset="0"/>
+              <a:cs typeface="Arial" panose="020B0604020202020204" pitchFamily="34" charset="0"/>
+            </a:endParaRPr>
+          </a:p>
+        </p:txBody>
+      </p:sp>
+      <p:sp>
+        <p:nvSpPr>
+          <p:cNvPr id="12" name="テキスト ボックス 11">
+            <a:extLst>
+              <a:ext uri="{FF2B5EF4-FFF2-40B4-BE49-F238E27FC236}">
+                <a16:creationId xmlns:a16="http://schemas.microsoft.com/office/drawing/2014/main" id="{54843D7E-9F19-5D14-DA3A-0BDB5D783372}"/>
+              </a:ext>
+            </a:extLst>
+          </p:cNvPr>
+          <p:cNvSpPr txBox="1"/>
+          <p:nvPr/>
+        </p:nvSpPr>
+        <p:spPr>
+          <a:xfrm>
+            <a:off x="4105619" y="2287990"/>
+            <a:ext cx="4110995" cy="276999"/>
+          </a:xfrm>
+          <a:prstGeom prst="rect">
+            <a:avLst/>
+          </a:prstGeom>
+          <a:noFill/>
+        </p:spPr>
+        <p:txBody>
+          <a:bodyPr wrap="square" lIns="0" tIns="0" rIns="0" bIns="0" rtlCol="0">
+            <a:spAutoFit/>
+          </a:bodyPr>
+          <a:lstStyle/>
+          <a:p>
+            <a:pPr algn="ctr"/>
+            <a:r>
+              <a:rPr kumimoji="1" lang="en-US" altLang="ja-JP" b="1" dirty="0">
+                <a:solidFill>
+                  <a:srgbClr val="D51506"/>
+                </a:solidFill>
+                <a:latin typeface="Arial" panose="020B0604020202020204" pitchFamily="34" charset="0"/>
+                <a:cs typeface="Arial" panose="020B0604020202020204" pitchFamily="34" charset="0"/>
+              </a:rPr>
+              <a:t>(Parameter Extraction)</a:t>
+            </a:r>
+            <a:endParaRPr kumimoji="1" lang="ja-JP" altLang="en-US" b="1" dirty="0">
+              <a:solidFill>
+                <a:srgbClr val="D51506"/>
+              </a:solidFill>
+              <a:latin typeface="Arial" panose="020B0604020202020204" pitchFamily="34" charset="0"/>
+              <a:cs typeface="Arial" panose="020B0604020202020204" pitchFamily="34" charset="0"/>
+            </a:endParaRPr>
+          </a:p>
+        </p:txBody>
+      </p:sp>
+      <p:grpSp>
+        <p:nvGrpSpPr>
+          <p:cNvPr id="24" name="グループ化 23">
+            <a:extLst>
+              <a:ext uri="{FF2B5EF4-FFF2-40B4-BE49-F238E27FC236}">
+                <a16:creationId xmlns:a16="http://schemas.microsoft.com/office/drawing/2014/main" id="{F84A22B8-0F7A-C7BB-0DED-97FC1F078D83}"/>
+              </a:ext>
+            </a:extLst>
+          </p:cNvPr>
+          <p:cNvGrpSpPr/>
+          <p:nvPr/>
+        </p:nvGrpSpPr>
+        <p:grpSpPr>
+          <a:xfrm>
+            <a:off x="8362070" y="2852223"/>
+            <a:ext cx="2395589" cy="1293546"/>
+            <a:chOff x="-2" y="792309"/>
+            <a:chExt cx="4142576" cy="2236867"/>
+          </a:xfrm>
+        </p:grpSpPr>
+        <p:pic>
+          <p:nvPicPr>
+            <p:cNvPr id="68" name="Picture 44" descr="OWG_side2">
+              <a:extLst>
+                <a:ext uri="{FF2B5EF4-FFF2-40B4-BE49-F238E27FC236}">
+                  <a16:creationId xmlns:a16="http://schemas.microsoft.com/office/drawing/2014/main" id="{CFF8BCF4-08F3-9FC6-B5FD-C250CA243D40}"/>
+                </a:ext>
+              </a:extLst>
+            </p:cNvPr>
+            <p:cNvPicPr>
+              <a:picLocks noChangeAspect="1" noChangeArrowheads="1"/>
+            </p:cNvPicPr>
+            <p:nvPr/>
+          </p:nvPicPr>
+          <p:blipFill rotWithShape="1">
+            <a:blip r:embed="rId3" cstate="print">
+              <a:extLst>
+                <a:ext uri="{28A0092B-C50C-407E-A947-70E740481C1C}">
+                  <a14:useLocalDpi xmlns:a14="http://schemas.microsoft.com/office/drawing/2010/main" val="0"/>
+                </a:ext>
+              </a:extLst>
+            </a:blip>
+            <a:srcRect r="2523"/>
+            <a:stretch>
+              <a:fillRect/>
+            </a:stretch>
+          </p:blipFill>
+          <p:spPr bwMode="auto">
+            <a:xfrm>
+              <a:off x="18590" y="792309"/>
+              <a:ext cx="3849029" cy="2236867"/>
+            </a:xfrm>
+            <a:prstGeom prst="rect">
+              <a:avLst/>
+            </a:prstGeom>
+            <a:noFill/>
+            <a:extLst>
+              <a:ext uri="{909E8E84-426E-40DD-AFC4-6F175D3DCCD1}">
+                <a14:hiddenFill xmlns:a14="http://schemas.microsoft.com/office/drawing/2010/main">
+                  <a:solidFill>
+                    <a:srgbClr val="FFFFFF"/>
+                  </a:solidFill>
+                </a14:hiddenFill>
+              </a:ext>
+            </a:extLst>
+          </p:spPr>
+        </p:pic>
+        <p:sp>
+          <p:nvSpPr>
+            <p:cNvPr id="69" name="テキスト ボックス 68">
+              <a:extLst>
+                <a:ext uri="{FF2B5EF4-FFF2-40B4-BE49-F238E27FC236}">
+                  <a16:creationId xmlns:a16="http://schemas.microsoft.com/office/drawing/2014/main" id="{7806F2C4-A600-67C4-8550-3FC5B4090DB5}"/>
+                </a:ext>
+              </a:extLst>
+            </p:cNvPr>
+            <p:cNvSpPr txBox="1"/>
+            <p:nvPr/>
+          </p:nvSpPr>
+          <p:spPr>
+            <a:xfrm>
+              <a:off x="1963639" y="1134929"/>
+              <a:ext cx="1930846" cy="372557"/>
+            </a:xfrm>
+            <a:prstGeom prst="rect">
+              <a:avLst/>
+            </a:prstGeom>
+            <a:noFill/>
+          </p:spPr>
+          <p:txBody>
+            <a:bodyPr wrap="square" rtlCol="0">
+              <a:spAutoFit/>
+            </a:bodyPr>
+            <a:lstStyle/>
+            <a:p>
+              <a:pPr algn="r"/>
+              <a:r>
+                <a:rPr lang="en-US" altLang="ja-JP" sz="800" b="1" dirty="0">
+                  <a:latin typeface="Arial" panose="020B0604020202020204" pitchFamily="34" charset="0"/>
+                  <a:cs typeface="Arial" panose="020B0604020202020204" pitchFamily="34" charset="0"/>
+                </a:rPr>
+                <a:t>Counter</a:t>
+              </a:r>
+              <a:r>
+                <a:rPr lang="ja-JP" altLang="en-US" sz="800" b="1" dirty="0">
+                  <a:latin typeface="Arial" panose="020B0604020202020204" pitchFamily="34" charset="0"/>
+                  <a:cs typeface="Arial" panose="020B0604020202020204" pitchFamily="34" charset="0"/>
+                </a:rPr>
+                <a:t> </a:t>
+              </a:r>
+              <a:r>
+                <a:rPr lang="en-US" altLang="ja-JP" sz="800" b="1" dirty="0">
+                  <a:latin typeface="Arial" panose="020B0604020202020204" pitchFamily="34" charset="0"/>
+                  <a:cs typeface="Arial" panose="020B0604020202020204" pitchFamily="34" charset="0"/>
+                </a:rPr>
+                <a:t>Electrode</a:t>
+              </a:r>
+              <a:endParaRPr kumimoji="1" lang="ja-JP" altLang="en-US" sz="800" b="1" dirty="0">
+                <a:latin typeface="Arial" panose="020B0604020202020204" pitchFamily="34" charset="0"/>
+                <a:cs typeface="Arial" panose="020B0604020202020204" pitchFamily="34" charset="0"/>
+              </a:endParaRPr>
+            </a:p>
+          </p:txBody>
+        </p:sp>
+        <p:sp>
+          <p:nvSpPr>
+            <p:cNvPr id="70" name="テキスト ボックス 69">
+              <a:extLst>
+                <a:ext uri="{FF2B5EF4-FFF2-40B4-BE49-F238E27FC236}">
+                  <a16:creationId xmlns:a16="http://schemas.microsoft.com/office/drawing/2014/main" id="{E4868C6C-4ACB-1D26-6597-BD113A48F3CC}"/>
+                </a:ext>
+              </a:extLst>
+            </p:cNvPr>
+            <p:cNvSpPr txBox="1"/>
+            <p:nvPr/>
+          </p:nvSpPr>
+          <p:spPr>
+            <a:xfrm>
+              <a:off x="0" y="1318225"/>
+              <a:ext cx="2456103" cy="372557"/>
+            </a:xfrm>
+            <a:prstGeom prst="rect">
+              <a:avLst/>
+            </a:prstGeom>
+            <a:noFill/>
+          </p:spPr>
+          <p:txBody>
+            <a:bodyPr wrap="square" rtlCol="0">
+              <a:spAutoFit/>
+            </a:bodyPr>
+            <a:lstStyle/>
+            <a:p>
+              <a:r>
+                <a:rPr lang="en-US" altLang="ja-JP" sz="800" b="1" dirty="0">
+                  <a:latin typeface="Arial" panose="020B0604020202020204" pitchFamily="34" charset="0"/>
+                  <a:cs typeface="Arial" panose="020B0604020202020204" pitchFamily="34" charset="0"/>
+                </a:rPr>
+                <a:t>Ref. Electrode</a:t>
+              </a:r>
+              <a:endParaRPr kumimoji="1" lang="ja-JP" altLang="en-US" sz="800" b="1" dirty="0">
+                <a:latin typeface="Arial" panose="020B0604020202020204" pitchFamily="34" charset="0"/>
+                <a:cs typeface="Arial" panose="020B0604020202020204" pitchFamily="34" charset="0"/>
+              </a:endParaRPr>
+            </a:p>
+          </p:txBody>
+        </p:sp>
+        <p:sp>
+          <p:nvSpPr>
+            <p:cNvPr id="71" name="テキスト ボックス 70">
+              <a:extLst>
+                <a:ext uri="{FF2B5EF4-FFF2-40B4-BE49-F238E27FC236}">
+                  <a16:creationId xmlns:a16="http://schemas.microsoft.com/office/drawing/2014/main" id="{6891FD4A-C665-D5A6-1E8C-FE0D256E4F4B}"/>
+                </a:ext>
+              </a:extLst>
+            </p:cNvPr>
+            <p:cNvSpPr txBox="1"/>
+            <p:nvPr/>
+          </p:nvSpPr>
+          <p:spPr>
+            <a:xfrm>
+              <a:off x="2019511" y="1467108"/>
+              <a:ext cx="1874974" cy="585445"/>
+            </a:xfrm>
+            <a:prstGeom prst="rect">
+              <a:avLst/>
+            </a:prstGeom>
+            <a:noFill/>
+          </p:spPr>
+          <p:txBody>
+            <a:bodyPr wrap="square" rtlCol="0">
+              <a:spAutoFit/>
+            </a:bodyPr>
+            <a:lstStyle/>
+            <a:p>
+              <a:pPr algn="r"/>
+              <a:r>
+                <a:rPr lang="en-US" altLang="ja-JP" sz="800" b="1" dirty="0">
+                  <a:latin typeface="Arial" panose="020B0604020202020204" pitchFamily="34" charset="0"/>
+                  <a:cs typeface="Arial" panose="020B0604020202020204" pitchFamily="34" charset="0"/>
+                </a:rPr>
+                <a:t>Working </a:t>
+              </a:r>
+            </a:p>
+            <a:p>
+              <a:pPr algn="r"/>
+              <a:r>
+                <a:rPr lang="en-US" altLang="ja-JP" sz="800" b="1" dirty="0">
+                  <a:latin typeface="Arial" panose="020B0604020202020204" pitchFamily="34" charset="0"/>
+                  <a:cs typeface="Arial" panose="020B0604020202020204" pitchFamily="34" charset="0"/>
+                </a:rPr>
+                <a:t>Electrode</a:t>
+              </a:r>
+              <a:r>
+                <a:rPr lang="ja-JP" altLang="en-US" sz="800" b="1" dirty="0">
+                  <a:latin typeface="Arial" panose="020B0604020202020204" pitchFamily="34" charset="0"/>
+                  <a:cs typeface="Arial" panose="020B0604020202020204" pitchFamily="34" charset="0"/>
+                </a:rPr>
+                <a:t> </a:t>
+              </a:r>
+              <a:r>
+                <a:rPr lang="en-US" altLang="ja-JP" sz="800" b="1" dirty="0">
+                  <a:latin typeface="Arial" panose="020B0604020202020204" pitchFamily="34" charset="0"/>
+                  <a:cs typeface="Arial" panose="020B0604020202020204" pitchFamily="34" charset="0"/>
+                </a:rPr>
+                <a:t>(IrO</a:t>
+              </a:r>
+              <a:r>
+                <a:rPr lang="en-US" altLang="ja-JP" sz="800" b="1" baseline="-25000" dirty="0">
+                  <a:latin typeface="Arial" panose="020B0604020202020204" pitchFamily="34" charset="0"/>
+                  <a:cs typeface="Arial" panose="020B0604020202020204" pitchFamily="34" charset="0"/>
+                </a:rPr>
+                <a:t>2</a:t>
+              </a:r>
+              <a:r>
+                <a:rPr lang="en-US" altLang="ja-JP" sz="800" b="1" dirty="0">
+                  <a:latin typeface="Arial" panose="020B0604020202020204" pitchFamily="34" charset="0"/>
+                  <a:cs typeface="Arial" panose="020B0604020202020204" pitchFamily="34" charset="0"/>
+                </a:rPr>
+                <a:t>)</a:t>
+              </a:r>
+              <a:endParaRPr kumimoji="1" lang="ja-JP" altLang="en-US" sz="800" b="1" dirty="0">
+                <a:latin typeface="Arial" panose="020B0604020202020204" pitchFamily="34" charset="0"/>
+                <a:cs typeface="Arial" panose="020B0604020202020204" pitchFamily="34" charset="0"/>
+              </a:endParaRPr>
+            </a:p>
+          </p:txBody>
+        </p:sp>
+        <p:sp>
+          <p:nvSpPr>
+            <p:cNvPr id="72" name="テキスト ボックス 71">
+              <a:extLst>
+                <a:ext uri="{FF2B5EF4-FFF2-40B4-BE49-F238E27FC236}">
+                  <a16:creationId xmlns:a16="http://schemas.microsoft.com/office/drawing/2014/main" id="{44314630-DBD5-B738-E6BF-FF85DACAABDF}"/>
+                </a:ext>
+              </a:extLst>
+            </p:cNvPr>
+            <p:cNvSpPr txBox="1"/>
+            <p:nvPr/>
+          </p:nvSpPr>
+          <p:spPr>
+            <a:xfrm>
+              <a:off x="-2" y="1615606"/>
+              <a:ext cx="1777652" cy="372557"/>
+            </a:xfrm>
+            <a:prstGeom prst="rect">
+              <a:avLst/>
+            </a:prstGeom>
+            <a:noFill/>
+          </p:spPr>
+          <p:txBody>
+            <a:bodyPr wrap="square" rtlCol="0">
+              <a:spAutoFit/>
+            </a:bodyPr>
+            <a:lstStyle/>
+            <a:p>
+              <a:r>
+                <a:rPr kumimoji="1" lang="en-US" altLang="ja-JP" sz="800" b="1" dirty="0">
+                  <a:latin typeface="Arial" panose="020B0604020202020204" pitchFamily="34" charset="0"/>
+                  <a:cs typeface="Arial" panose="020B0604020202020204" pitchFamily="34" charset="0"/>
+                </a:rPr>
+                <a:t>Quartz Prism</a:t>
+              </a:r>
+              <a:endParaRPr kumimoji="1" lang="ja-JP" altLang="en-US" sz="800" b="1" dirty="0">
+                <a:latin typeface="Arial" panose="020B0604020202020204" pitchFamily="34" charset="0"/>
+                <a:cs typeface="Arial" panose="020B0604020202020204" pitchFamily="34" charset="0"/>
+              </a:endParaRPr>
+            </a:p>
+          </p:txBody>
+        </p:sp>
+        <p:cxnSp>
+          <p:nvCxnSpPr>
+            <p:cNvPr id="73" name="直線矢印コネクタ 72">
+              <a:extLst>
+                <a:ext uri="{FF2B5EF4-FFF2-40B4-BE49-F238E27FC236}">
+                  <a16:creationId xmlns:a16="http://schemas.microsoft.com/office/drawing/2014/main" id="{C7AB9876-376B-7703-2596-B7245B7A02AF}"/>
+                </a:ext>
+              </a:extLst>
+            </p:cNvPr>
+            <p:cNvCxnSpPr/>
+            <p:nvPr/>
+          </p:nvCxnSpPr>
+          <p:spPr>
+            <a:xfrm>
+              <a:off x="1334151" y="1602502"/>
+              <a:ext cx="412434" cy="436915"/>
+            </a:xfrm>
+            <a:prstGeom prst="straightConnector1">
+              <a:avLst/>
+            </a:prstGeom>
+            <a:ln w="19050">
+              <a:solidFill>
+                <a:schemeClr val="tx1">
+                  <a:lumMod val="95000"/>
+                  <a:lumOff val="5000"/>
+                </a:schemeClr>
+              </a:solidFill>
+              <a:tailEnd type="arrow"/>
+            </a:ln>
+          </p:spPr>
+          <p:style>
+            <a:lnRef idx="1">
+              <a:schemeClr val="accent1"/>
+            </a:lnRef>
+            <a:fillRef idx="0">
+              <a:schemeClr val="accent1"/>
+            </a:fillRef>
+            <a:effectRef idx="0">
+              <a:schemeClr val="accent1"/>
+            </a:effectRef>
+            <a:fontRef idx="minor">
+              <a:schemeClr val="tx1"/>
+            </a:fontRef>
+          </p:style>
+        </p:cxnSp>
+        <p:cxnSp>
+          <p:nvCxnSpPr>
+            <p:cNvPr id="74" name="直線矢印コネクタ 73">
+              <a:extLst>
+                <a:ext uri="{FF2B5EF4-FFF2-40B4-BE49-F238E27FC236}">
+                  <a16:creationId xmlns:a16="http://schemas.microsoft.com/office/drawing/2014/main" id="{6A8B8F06-C18A-FA3F-EB48-76F7243558A0}"/>
+                </a:ext>
+              </a:extLst>
+            </p:cNvPr>
+            <p:cNvCxnSpPr>
+              <a:cxnSpLocks/>
+            </p:cNvCxnSpPr>
+            <p:nvPr/>
+          </p:nvCxnSpPr>
+          <p:spPr>
+            <a:xfrm flipH="1">
+              <a:off x="2097282" y="1462446"/>
+              <a:ext cx="678452" cy="650798"/>
+            </a:xfrm>
+            <a:prstGeom prst="straightConnector1">
+              <a:avLst/>
+            </a:prstGeom>
+            <a:ln w="19050">
+              <a:solidFill>
+                <a:schemeClr val="tx1">
+                  <a:lumMod val="95000"/>
+                  <a:lumOff val="5000"/>
+                </a:schemeClr>
+              </a:solidFill>
+              <a:tailEnd type="arrow"/>
+            </a:ln>
+          </p:spPr>
+          <p:style>
+            <a:lnRef idx="1">
+              <a:schemeClr val="accent1"/>
+            </a:lnRef>
+            <a:fillRef idx="0">
+              <a:schemeClr val="accent1"/>
+            </a:fillRef>
+            <a:effectRef idx="0">
+              <a:schemeClr val="accent1"/>
+            </a:effectRef>
+            <a:fontRef idx="minor">
+              <a:schemeClr val="tx1"/>
+            </a:fontRef>
+          </p:style>
+        </p:cxnSp>
+        <p:cxnSp>
+          <p:nvCxnSpPr>
+            <p:cNvPr id="75" name="直線矢印コネクタ 74">
+              <a:extLst>
+                <a:ext uri="{FF2B5EF4-FFF2-40B4-BE49-F238E27FC236}">
+                  <a16:creationId xmlns:a16="http://schemas.microsoft.com/office/drawing/2014/main" id="{7848DB69-CBB5-0389-BA87-F6E3E58D206C}"/>
+                </a:ext>
+              </a:extLst>
+            </p:cNvPr>
+            <p:cNvCxnSpPr>
+              <a:cxnSpLocks/>
+            </p:cNvCxnSpPr>
+            <p:nvPr/>
+          </p:nvCxnSpPr>
+          <p:spPr>
+            <a:xfrm flipH="1">
+              <a:off x="2322502" y="1963236"/>
+              <a:ext cx="366162" cy="354580"/>
+            </a:xfrm>
+            <a:prstGeom prst="straightConnector1">
+              <a:avLst/>
+            </a:prstGeom>
+            <a:ln w="19050">
+              <a:solidFill>
+                <a:schemeClr val="tx1">
+                  <a:lumMod val="95000"/>
+                  <a:lumOff val="5000"/>
+                </a:schemeClr>
+              </a:solidFill>
+              <a:tailEnd type="arrow"/>
+            </a:ln>
+          </p:spPr>
+          <p:style>
+            <a:lnRef idx="1">
+              <a:schemeClr val="accent1"/>
+            </a:lnRef>
+            <a:fillRef idx="0">
+              <a:schemeClr val="accent1"/>
+            </a:fillRef>
+            <a:effectRef idx="0">
+              <a:schemeClr val="accent1"/>
+            </a:effectRef>
+            <a:fontRef idx="minor">
+              <a:schemeClr val="tx1"/>
+            </a:fontRef>
+          </p:style>
+        </p:cxnSp>
+        <p:cxnSp>
+          <p:nvCxnSpPr>
+            <p:cNvPr id="76" name="直線矢印コネクタ 75">
+              <a:extLst>
+                <a:ext uri="{FF2B5EF4-FFF2-40B4-BE49-F238E27FC236}">
+                  <a16:creationId xmlns:a16="http://schemas.microsoft.com/office/drawing/2014/main" id="{C5E7C24C-6A4F-12B1-916A-9E48D9041FA9}"/>
+                </a:ext>
+              </a:extLst>
+            </p:cNvPr>
+            <p:cNvCxnSpPr>
+              <a:cxnSpLocks/>
+            </p:cNvCxnSpPr>
+            <p:nvPr/>
+          </p:nvCxnSpPr>
+          <p:spPr>
+            <a:xfrm>
+              <a:off x="819977" y="1878293"/>
+              <a:ext cx="0" cy="444584"/>
+            </a:xfrm>
+            <a:prstGeom prst="straightConnector1">
+              <a:avLst/>
+            </a:prstGeom>
+            <a:ln w="19050">
+              <a:solidFill>
+                <a:schemeClr val="tx1">
+                  <a:lumMod val="95000"/>
+                  <a:lumOff val="5000"/>
+                </a:schemeClr>
+              </a:solidFill>
+              <a:tailEnd type="arrow"/>
+            </a:ln>
+          </p:spPr>
+          <p:style>
+            <a:lnRef idx="1">
+              <a:schemeClr val="accent1"/>
+            </a:lnRef>
+            <a:fillRef idx="0">
+              <a:schemeClr val="accent1"/>
+            </a:fillRef>
+            <a:effectRef idx="0">
+              <a:schemeClr val="accent1"/>
+            </a:effectRef>
+            <a:fontRef idx="minor">
+              <a:schemeClr val="tx1"/>
+            </a:fontRef>
+          </p:style>
+        </p:cxnSp>
+        <p:grpSp>
+          <p:nvGrpSpPr>
+            <p:cNvPr id="77" name="グループ化 76">
+              <a:extLst>
+                <a:ext uri="{FF2B5EF4-FFF2-40B4-BE49-F238E27FC236}">
+                  <a16:creationId xmlns:a16="http://schemas.microsoft.com/office/drawing/2014/main" id="{D73D2143-948F-8A6A-A71F-44F71557DAA6}"/>
+                </a:ext>
+              </a:extLst>
+            </p:cNvPr>
+            <p:cNvGrpSpPr/>
+            <p:nvPr/>
+          </p:nvGrpSpPr>
+          <p:grpSpPr>
+            <a:xfrm>
+              <a:off x="612369" y="2187583"/>
+              <a:ext cx="2645313" cy="212778"/>
+              <a:chOff x="7051089" y="3214633"/>
+              <a:chExt cx="2645313" cy="212778"/>
+            </a:xfrm>
+            <a:solidFill>
+              <a:srgbClr val="FFFF00"/>
+            </a:solidFill>
+            <a:effectLst>
+              <a:glow rad="63500">
+                <a:schemeClr val="accent4">
+                  <a:satMod val="175000"/>
+                  <a:alpha val="40000"/>
+                </a:schemeClr>
+              </a:glow>
+            </a:effectLst>
+          </p:grpSpPr>
+          <p:grpSp>
+            <p:nvGrpSpPr>
+              <p:cNvPr id="80" name="グループ化 79">
+                <a:extLst>
+                  <a:ext uri="{FF2B5EF4-FFF2-40B4-BE49-F238E27FC236}">
+                    <a16:creationId xmlns:a16="http://schemas.microsoft.com/office/drawing/2014/main" id="{120F4DCE-9B96-C540-0E56-F590CDA46E9F}"/>
+                  </a:ext>
+                </a:extLst>
+              </p:cNvPr>
+              <p:cNvGrpSpPr/>
+              <p:nvPr/>
+            </p:nvGrpSpPr>
+            <p:grpSpPr>
+              <a:xfrm>
+                <a:off x="7051089" y="3247593"/>
+                <a:ext cx="409380" cy="179818"/>
+                <a:chOff x="-1862643" y="645818"/>
+                <a:chExt cx="1336209" cy="1045698"/>
+              </a:xfrm>
+              <a:grpFill/>
+            </p:grpSpPr>
+            <p:cxnSp>
+              <p:nvCxnSpPr>
+                <p:cNvPr id="116" name="直線コネクタ 115">
+                  <a:extLst>
+                    <a:ext uri="{FF2B5EF4-FFF2-40B4-BE49-F238E27FC236}">
+                      <a16:creationId xmlns:a16="http://schemas.microsoft.com/office/drawing/2014/main" id="{9521D048-22D2-BEFD-A7BA-C209F72A4FF2}"/>
+                    </a:ext>
+                  </a:extLst>
+                </p:cNvPr>
+                <p:cNvCxnSpPr>
+                  <a:cxnSpLocks/>
+                </p:cNvCxnSpPr>
+                <p:nvPr/>
+              </p:nvCxnSpPr>
+              <p:spPr>
+                <a:xfrm>
+                  <a:off x="-1862643" y="645818"/>
+                  <a:ext cx="1045701" cy="1045698"/>
+                </a:xfrm>
+                <a:prstGeom prst="line">
+                  <a:avLst/>
+                </a:prstGeom>
+                <a:grpFill/>
+                <a:ln w="19050">
+                  <a:solidFill>
+                    <a:srgbClr val="FFFF00"/>
+                  </a:solidFill>
+                </a:ln>
+              </p:spPr>
+              <p:style>
+                <a:lnRef idx="1">
+                  <a:schemeClr val="accent1"/>
+                </a:lnRef>
+                <a:fillRef idx="0">
+                  <a:schemeClr val="accent1"/>
+                </a:fillRef>
+                <a:effectRef idx="0">
+                  <a:schemeClr val="accent1"/>
+                </a:effectRef>
+                <a:fontRef idx="minor">
+                  <a:schemeClr val="tx1"/>
+                </a:fontRef>
+              </p:style>
+            </p:cxnSp>
+            <p:cxnSp>
+              <p:nvCxnSpPr>
+                <p:cNvPr id="117" name="直線コネクタ 116">
+                  <a:extLst>
+                    <a:ext uri="{FF2B5EF4-FFF2-40B4-BE49-F238E27FC236}">
+                      <a16:creationId xmlns:a16="http://schemas.microsoft.com/office/drawing/2014/main" id="{2F1D7EE2-D04B-16B3-10F7-1698D44E1CD1}"/>
+                    </a:ext>
+                  </a:extLst>
+                </p:cNvPr>
+                <p:cNvCxnSpPr>
+                  <a:cxnSpLocks/>
+                </p:cNvCxnSpPr>
+                <p:nvPr/>
+              </p:nvCxnSpPr>
+              <p:spPr>
+                <a:xfrm flipH="1">
+                  <a:off x="-814434" y="1403516"/>
+                  <a:ext cx="288000" cy="288000"/>
+                </a:xfrm>
+                <a:prstGeom prst="line">
+                  <a:avLst/>
+                </a:prstGeom>
+                <a:grpFill/>
+                <a:ln w="19050">
+                  <a:solidFill>
+                    <a:srgbClr val="FFFF00"/>
+                  </a:solidFill>
+                </a:ln>
+              </p:spPr>
+              <p:style>
+                <a:lnRef idx="1">
+                  <a:schemeClr val="accent1"/>
+                </a:lnRef>
+                <a:fillRef idx="0">
+                  <a:schemeClr val="accent1"/>
+                </a:fillRef>
+                <a:effectRef idx="0">
+                  <a:schemeClr val="accent1"/>
+                </a:effectRef>
+                <a:fontRef idx="minor">
+                  <a:schemeClr val="tx1"/>
+                </a:fontRef>
+              </p:style>
+            </p:cxnSp>
+          </p:grpSp>
+          <p:grpSp>
+            <p:nvGrpSpPr>
+              <p:cNvPr id="81" name="グループ化 80">
+                <a:extLst>
+                  <a:ext uri="{FF2B5EF4-FFF2-40B4-BE49-F238E27FC236}">
+                    <a16:creationId xmlns:a16="http://schemas.microsoft.com/office/drawing/2014/main" id="{CC26B4AA-D24C-BBB4-2F87-D6A70EDC817F}"/>
+                  </a:ext>
+                </a:extLst>
+              </p:cNvPr>
+              <p:cNvGrpSpPr/>
+              <p:nvPr/>
+            </p:nvGrpSpPr>
+            <p:grpSpPr>
+              <a:xfrm>
+                <a:off x="7460044" y="3377881"/>
+                <a:ext cx="177250" cy="49530"/>
+                <a:chOff x="-1104976" y="1403484"/>
+                <a:chExt cx="578542" cy="288032"/>
+              </a:xfrm>
+              <a:grpFill/>
+            </p:grpSpPr>
+            <p:cxnSp>
+              <p:nvCxnSpPr>
+                <p:cNvPr id="114" name="直線コネクタ 113">
+                  <a:extLst>
+                    <a:ext uri="{FF2B5EF4-FFF2-40B4-BE49-F238E27FC236}">
+                      <a16:creationId xmlns:a16="http://schemas.microsoft.com/office/drawing/2014/main" id="{6206ABF2-47EC-376D-9734-DB838BE5EF73}"/>
+                    </a:ext>
+                  </a:extLst>
+                </p:cNvPr>
+                <p:cNvCxnSpPr>
+                  <a:cxnSpLocks/>
+                </p:cNvCxnSpPr>
+                <p:nvPr/>
+              </p:nvCxnSpPr>
+              <p:spPr>
+                <a:xfrm>
+                  <a:off x="-1104976" y="1403484"/>
+                  <a:ext cx="288032" cy="288032"/>
+                </a:xfrm>
+                <a:prstGeom prst="line">
+                  <a:avLst/>
+                </a:prstGeom>
+                <a:grpFill/>
+                <a:ln w="19050">
+                  <a:solidFill>
+                    <a:srgbClr val="FFFF00"/>
+                  </a:solidFill>
+                </a:ln>
+              </p:spPr>
+              <p:style>
+                <a:lnRef idx="1">
+                  <a:schemeClr val="accent1"/>
+                </a:lnRef>
+                <a:fillRef idx="0">
+                  <a:schemeClr val="accent1"/>
+                </a:fillRef>
+                <a:effectRef idx="0">
+                  <a:schemeClr val="accent1"/>
+                </a:effectRef>
+                <a:fontRef idx="minor">
+                  <a:schemeClr val="tx1"/>
+                </a:fontRef>
+              </p:style>
+            </p:cxnSp>
+            <p:cxnSp>
+              <p:nvCxnSpPr>
+                <p:cNvPr id="115" name="直線コネクタ 114">
+                  <a:extLst>
+                    <a:ext uri="{FF2B5EF4-FFF2-40B4-BE49-F238E27FC236}">
+                      <a16:creationId xmlns:a16="http://schemas.microsoft.com/office/drawing/2014/main" id="{5202714B-4641-903D-D0C3-32BDE4E766E3}"/>
+                    </a:ext>
+                  </a:extLst>
+                </p:cNvPr>
+                <p:cNvCxnSpPr>
+                  <a:cxnSpLocks/>
+                </p:cNvCxnSpPr>
+                <p:nvPr/>
+              </p:nvCxnSpPr>
+              <p:spPr>
+                <a:xfrm flipH="1">
+                  <a:off x="-814434" y="1403516"/>
+                  <a:ext cx="288000" cy="288000"/>
+                </a:xfrm>
+                <a:prstGeom prst="line">
+                  <a:avLst/>
+                </a:prstGeom>
+                <a:grpFill/>
+                <a:ln w="19050">
+                  <a:solidFill>
+                    <a:srgbClr val="FFFF00"/>
+                  </a:solidFill>
+                </a:ln>
+              </p:spPr>
+              <p:style>
+                <a:lnRef idx="1">
+                  <a:schemeClr val="accent1"/>
+                </a:lnRef>
+                <a:fillRef idx="0">
+                  <a:schemeClr val="accent1"/>
+                </a:fillRef>
+                <a:effectRef idx="0">
+                  <a:schemeClr val="accent1"/>
+                </a:effectRef>
+                <a:fontRef idx="minor">
+                  <a:schemeClr val="tx1"/>
+                </a:fontRef>
+              </p:style>
+            </p:cxnSp>
+          </p:grpSp>
+          <p:grpSp>
+            <p:nvGrpSpPr>
+              <p:cNvPr id="82" name="グループ化 81">
+                <a:extLst>
+                  <a:ext uri="{FF2B5EF4-FFF2-40B4-BE49-F238E27FC236}">
+                    <a16:creationId xmlns:a16="http://schemas.microsoft.com/office/drawing/2014/main" id="{2A1ED437-4026-3F50-9F69-2B0BE6963B55}"/>
+                  </a:ext>
+                </a:extLst>
+              </p:cNvPr>
+              <p:cNvGrpSpPr/>
+              <p:nvPr/>
+            </p:nvGrpSpPr>
+            <p:grpSpPr>
+              <a:xfrm>
+                <a:off x="7636868" y="3377881"/>
+                <a:ext cx="177250" cy="49530"/>
+                <a:chOff x="-1104976" y="1403484"/>
+                <a:chExt cx="578542" cy="288032"/>
+              </a:xfrm>
+              <a:grpFill/>
+            </p:grpSpPr>
+            <p:cxnSp>
+              <p:nvCxnSpPr>
+                <p:cNvPr id="112" name="直線コネクタ 111">
+                  <a:extLst>
+                    <a:ext uri="{FF2B5EF4-FFF2-40B4-BE49-F238E27FC236}">
+                      <a16:creationId xmlns:a16="http://schemas.microsoft.com/office/drawing/2014/main" id="{98C8D3FD-0672-90C3-9C74-75420C96B4EE}"/>
+                    </a:ext>
+                  </a:extLst>
+                </p:cNvPr>
+                <p:cNvCxnSpPr>
+                  <a:cxnSpLocks/>
+                </p:cNvCxnSpPr>
+                <p:nvPr/>
+              </p:nvCxnSpPr>
+              <p:spPr>
+                <a:xfrm>
+                  <a:off x="-1104976" y="1403484"/>
+                  <a:ext cx="288032" cy="288032"/>
+                </a:xfrm>
+                <a:prstGeom prst="line">
+                  <a:avLst/>
+                </a:prstGeom>
+                <a:grpFill/>
+                <a:ln w="19050">
+                  <a:solidFill>
+                    <a:srgbClr val="FFFF00"/>
+                  </a:solidFill>
+                </a:ln>
+              </p:spPr>
+              <p:style>
+                <a:lnRef idx="1">
+                  <a:schemeClr val="accent1"/>
+                </a:lnRef>
+                <a:fillRef idx="0">
+                  <a:schemeClr val="accent1"/>
+                </a:fillRef>
+                <a:effectRef idx="0">
+                  <a:schemeClr val="accent1"/>
+                </a:effectRef>
+                <a:fontRef idx="minor">
+                  <a:schemeClr val="tx1"/>
+                </a:fontRef>
+              </p:style>
+            </p:cxnSp>
+            <p:cxnSp>
+              <p:nvCxnSpPr>
+                <p:cNvPr id="113" name="直線コネクタ 112">
+                  <a:extLst>
+                    <a:ext uri="{FF2B5EF4-FFF2-40B4-BE49-F238E27FC236}">
+                      <a16:creationId xmlns:a16="http://schemas.microsoft.com/office/drawing/2014/main" id="{2C6CBA1B-356F-C1B8-FF1B-F2036ECBCA9C}"/>
+                    </a:ext>
+                  </a:extLst>
+                </p:cNvPr>
+                <p:cNvCxnSpPr>
+                  <a:cxnSpLocks/>
+                </p:cNvCxnSpPr>
+                <p:nvPr/>
+              </p:nvCxnSpPr>
+              <p:spPr>
+                <a:xfrm flipH="1">
+                  <a:off x="-814434" y="1403516"/>
+                  <a:ext cx="288000" cy="288000"/>
+                </a:xfrm>
+                <a:prstGeom prst="line">
+                  <a:avLst/>
+                </a:prstGeom>
+                <a:grpFill/>
+                <a:ln w="19050">
+                  <a:solidFill>
+                    <a:srgbClr val="FFFF00"/>
+                  </a:solidFill>
+                </a:ln>
+              </p:spPr>
+              <p:style>
+                <a:lnRef idx="1">
+                  <a:schemeClr val="accent1"/>
+                </a:lnRef>
+                <a:fillRef idx="0">
+                  <a:schemeClr val="accent1"/>
+                </a:fillRef>
+                <a:effectRef idx="0">
+                  <a:schemeClr val="accent1"/>
+                </a:effectRef>
+                <a:fontRef idx="minor">
+                  <a:schemeClr val="tx1"/>
+                </a:fontRef>
+              </p:style>
+            </p:cxnSp>
+          </p:grpSp>
+          <p:grpSp>
+            <p:nvGrpSpPr>
+              <p:cNvPr id="83" name="グループ化 82">
+                <a:extLst>
+                  <a:ext uri="{FF2B5EF4-FFF2-40B4-BE49-F238E27FC236}">
+                    <a16:creationId xmlns:a16="http://schemas.microsoft.com/office/drawing/2014/main" id="{94ECBD3E-A16F-0F61-089D-36DBAD284B62}"/>
+                  </a:ext>
+                </a:extLst>
+              </p:cNvPr>
+              <p:cNvGrpSpPr/>
+              <p:nvPr/>
+            </p:nvGrpSpPr>
+            <p:grpSpPr>
+              <a:xfrm>
+                <a:off x="7813693" y="3377881"/>
+                <a:ext cx="177250" cy="49530"/>
+                <a:chOff x="-1104976" y="1403484"/>
+                <a:chExt cx="578542" cy="288032"/>
+              </a:xfrm>
+              <a:grpFill/>
+            </p:grpSpPr>
+            <p:cxnSp>
+              <p:nvCxnSpPr>
+                <p:cNvPr id="110" name="直線コネクタ 109">
+                  <a:extLst>
+                    <a:ext uri="{FF2B5EF4-FFF2-40B4-BE49-F238E27FC236}">
+                      <a16:creationId xmlns:a16="http://schemas.microsoft.com/office/drawing/2014/main" id="{068EE85F-BE00-9AA6-C20F-1F4520510587}"/>
+                    </a:ext>
+                  </a:extLst>
+                </p:cNvPr>
+                <p:cNvCxnSpPr>
+                  <a:cxnSpLocks/>
+                </p:cNvCxnSpPr>
+                <p:nvPr/>
+              </p:nvCxnSpPr>
+              <p:spPr>
+                <a:xfrm>
+                  <a:off x="-1104976" y="1403484"/>
+                  <a:ext cx="288032" cy="288032"/>
+                </a:xfrm>
+                <a:prstGeom prst="line">
+                  <a:avLst/>
+                </a:prstGeom>
+                <a:grpFill/>
+                <a:ln w="19050">
+                  <a:solidFill>
+                    <a:srgbClr val="FFFF00"/>
+                  </a:solidFill>
+                </a:ln>
+              </p:spPr>
+              <p:style>
+                <a:lnRef idx="1">
+                  <a:schemeClr val="accent1"/>
+                </a:lnRef>
+                <a:fillRef idx="0">
+                  <a:schemeClr val="accent1"/>
+                </a:fillRef>
+                <a:effectRef idx="0">
+                  <a:schemeClr val="accent1"/>
+                </a:effectRef>
+                <a:fontRef idx="minor">
+                  <a:schemeClr val="tx1"/>
+                </a:fontRef>
+              </p:style>
+            </p:cxnSp>
+            <p:cxnSp>
+              <p:nvCxnSpPr>
+                <p:cNvPr id="111" name="直線コネクタ 110">
+                  <a:extLst>
+                    <a:ext uri="{FF2B5EF4-FFF2-40B4-BE49-F238E27FC236}">
+                      <a16:creationId xmlns:a16="http://schemas.microsoft.com/office/drawing/2014/main" id="{EC058841-92FB-A1E6-79BA-5206B9F4C86B}"/>
+                    </a:ext>
+                  </a:extLst>
+                </p:cNvPr>
+                <p:cNvCxnSpPr>
+                  <a:cxnSpLocks/>
+                </p:cNvCxnSpPr>
+                <p:nvPr/>
+              </p:nvCxnSpPr>
+              <p:spPr>
+                <a:xfrm flipH="1">
+                  <a:off x="-814434" y="1403516"/>
+                  <a:ext cx="288000" cy="288000"/>
+                </a:xfrm>
+                <a:prstGeom prst="line">
+                  <a:avLst/>
+                </a:prstGeom>
+                <a:grpFill/>
+                <a:ln w="19050">
+                  <a:solidFill>
+                    <a:srgbClr val="FFFF00"/>
+                  </a:solidFill>
+                </a:ln>
+              </p:spPr>
+              <p:style>
+                <a:lnRef idx="1">
+                  <a:schemeClr val="accent1"/>
+                </a:lnRef>
+                <a:fillRef idx="0">
+                  <a:schemeClr val="accent1"/>
+                </a:fillRef>
+                <a:effectRef idx="0">
+                  <a:schemeClr val="accent1"/>
+                </a:effectRef>
+                <a:fontRef idx="minor">
+                  <a:schemeClr val="tx1"/>
+                </a:fontRef>
+              </p:style>
+            </p:cxnSp>
+          </p:grpSp>
+          <p:grpSp>
+            <p:nvGrpSpPr>
+              <p:cNvPr id="84" name="グループ化 83">
+                <a:extLst>
+                  <a:ext uri="{FF2B5EF4-FFF2-40B4-BE49-F238E27FC236}">
+                    <a16:creationId xmlns:a16="http://schemas.microsoft.com/office/drawing/2014/main" id="{D27349E3-BE42-CE73-6DF0-2F5CBE67D194}"/>
+                  </a:ext>
+                </a:extLst>
+              </p:cNvPr>
+              <p:cNvGrpSpPr/>
+              <p:nvPr/>
+            </p:nvGrpSpPr>
+            <p:grpSpPr>
+              <a:xfrm>
+                <a:off x="7990517" y="3377881"/>
+                <a:ext cx="177250" cy="49530"/>
+                <a:chOff x="-1104976" y="1403484"/>
+                <a:chExt cx="578542" cy="288032"/>
+              </a:xfrm>
+              <a:grpFill/>
+            </p:grpSpPr>
+            <p:cxnSp>
+              <p:nvCxnSpPr>
+                <p:cNvPr id="108" name="直線コネクタ 107">
+                  <a:extLst>
+                    <a:ext uri="{FF2B5EF4-FFF2-40B4-BE49-F238E27FC236}">
+                      <a16:creationId xmlns:a16="http://schemas.microsoft.com/office/drawing/2014/main" id="{2E94B4A5-CEFC-DA63-C116-CB2E51025D18}"/>
+                    </a:ext>
+                  </a:extLst>
+                </p:cNvPr>
+                <p:cNvCxnSpPr>
+                  <a:cxnSpLocks/>
+                </p:cNvCxnSpPr>
+                <p:nvPr/>
+              </p:nvCxnSpPr>
+              <p:spPr>
+                <a:xfrm>
+                  <a:off x="-1104976" y="1403484"/>
+                  <a:ext cx="288032" cy="288032"/>
+                </a:xfrm>
+                <a:prstGeom prst="line">
+                  <a:avLst/>
+                </a:prstGeom>
+                <a:grpFill/>
+                <a:ln w="19050">
+                  <a:solidFill>
+                    <a:srgbClr val="FFFF00"/>
+                  </a:solidFill>
+                </a:ln>
+              </p:spPr>
+              <p:style>
+                <a:lnRef idx="1">
+                  <a:schemeClr val="accent1"/>
+                </a:lnRef>
+                <a:fillRef idx="0">
+                  <a:schemeClr val="accent1"/>
+                </a:fillRef>
+                <a:effectRef idx="0">
+                  <a:schemeClr val="accent1"/>
+                </a:effectRef>
+                <a:fontRef idx="minor">
+                  <a:schemeClr val="tx1"/>
+                </a:fontRef>
+              </p:style>
+            </p:cxnSp>
+            <p:cxnSp>
+              <p:nvCxnSpPr>
+                <p:cNvPr id="109" name="直線コネクタ 108">
+                  <a:extLst>
+                    <a:ext uri="{FF2B5EF4-FFF2-40B4-BE49-F238E27FC236}">
+                      <a16:creationId xmlns:a16="http://schemas.microsoft.com/office/drawing/2014/main" id="{C1A8D89D-23F2-1F61-1BC9-B85B043B2305}"/>
+                    </a:ext>
+                  </a:extLst>
+                </p:cNvPr>
+                <p:cNvCxnSpPr>
+                  <a:cxnSpLocks/>
+                </p:cNvCxnSpPr>
+                <p:nvPr/>
+              </p:nvCxnSpPr>
+              <p:spPr>
+                <a:xfrm flipH="1">
+                  <a:off x="-814434" y="1403516"/>
+                  <a:ext cx="288000" cy="288000"/>
+                </a:xfrm>
+                <a:prstGeom prst="line">
+                  <a:avLst/>
+                </a:prstGeom>
+                <a:grpFill/>
+                <a:ln w="19050">
+                  <a:solidFill>
+                    <a:srgbClr val="FFFF00"/>
+                  </a:solidFill>
+                </a:ln>
+              </p:spPr>
+              <p:style>
+                <a:lnRef idx="1">
+                  <a:schemeClr val="accent1"/>
+                </a:lnRef>
+                <a:fillRef idx="0">
+                  <a:schemeClr val="accent1"/>
+                </a:fillRef>
+                <a:effectRef idx="0">
+                  <a:schemeClr val="accent1"/>
+                </a:effectRef>
+                <a:fontRef idx="minor">
+                  <a:schemeClr val="tx1"/>
+                </a:fontRef>
+              </p:style>
+            </p:cxnSp>
+          </p:grpSp>
+          <p:grpSp>
+            <p:nvGrpSpPr>
+              <p:cNvPr id="85" name="グループ化 84">
+                <a:extLst>
+                  <a:ext uri="{FF2B5EF4-FFF2-40B4-BE49-F238E27FC236}">
+                    <a16:creationId xmlns:a16="http://schemas.microsoft.com/office/drawing/2014/main" id="{6B5B8CB1-F565-75FA-C7F2-6AA2C7C20680}"/>
+                  </a:ext>
+                </a:extLst>
+              </p:cNvPr>
+              <p:cNvGrpSpPr/>
+              <p:nvPr/>
+            </p:nvGrpSpPr>
+            <p:grpSpPr>
+              <a:xfrm>
+                <a:off x="8167342" y="3377881"/>
+                <a:ext cx="177250" cy="49530"/>
+                <a:chOff x="-1104976" y="1403484"/>
+                <a:chExt cx="578542" cy="288032"/>
+              </a:xfrm>
+              <a:grpFill/>
+            </p:grpSpPr>
+            <p:cxnSp>
+              <p:nvCxnSpPr>
+                <p:cNvPr id="106" name="直線コネクタ 105">
+                  <a:extLst>
+                    <a:ext uri="{FF2B5EF4-FFF2-40B4-BE49-F238E27FC236}">
+                      <a16:creationId xmlns:a16="http://schemas.microsoft.com/office/drawing/2014/main" id="{FC006047-39A8-2018-1058-FD178D3357E2}"/>
+                    </a:ext>
+                  </a:extLst>
+                </p:cNvPr>
+                <p:cNvCxnSpPr>
+                  <a:cxnSpLocks/>
+                </p:cNvCxnSpPr>
+                <p:nvPr/>
+              </p:nvCxnSpPr>
+              <p:spPr>
+                <a:xfrm>
+                  <a:off x="-1104976" y="1403484"/>
+                  <a:ext cx="288032" cy="288032"/>
+                </a:xfrm>
+                <a:prstGeom prst="line">
+                  <a:avLst/>
+                </a:prstGeom>
+                <a:grpFill/>
+                <a:ln w="19050">
+                  <a:solidFill>
+                    <a:srgbClr val="FFFF00"/>
+                  </a:solidFill>
+                </a:ln>
+              </p:spPr>
+              <p:style>
+                <a:lnRef idx="1">
+                  <a:schemeClr val="accent1"/>
+                </a:lnRef>
+                <a:fillRef idx="0">
+                  <a:schemeClr val="accent1"/>
+                </a:fillRef>
+                <a:effectRef idx="0">
+                  <a:schemeClr val="accent1"/>
+                </a:effectRef>
+                <a:fontRef idx="minor">
+                  <a:schemeClr val="tx1"/>
+                </a:fontRef>
+              </p:style>
+            </p:cxnSp>
+            <p:cxnSp>
+              <p:nvCxnSpPr>
+                <p:cNvPr id="107" name="直線コネクタ 106">
+                  <a:extLst>
+                    <a:ext uri="{FF2B5EF4-FFF2-40B4-BE49-F238E27FC236}">
+                      <a16:creationId xmlns:a16="http://schemas.microsoft.com/office/drawing/2014/main" id="{2CECBFEE-F38C-5182-D1B6-30F6629E4A88}"/>
+                    </a:ext>
+                  </a:extLst>
+                </p:cNvPr>
+                <p:cNvCxnSpPr>
+                  <a:cxnSpLocks/>
+                </p:cNvCxnSpPr>
+                <p:nvPr/>
+              </p:nvCxnSpPr>
+              <p:spPr>
+                <a:xfrm flipH="1">
+                  <a:off x="-814434" y="1403516"/>
+                  <a:ext cx="288000" cy="288000"/>
+                </a:xfrm>
+                <a:prstGeom prst="line">
+                  <a:avLst/>
+                </a:prstGeom>
+                <a:grpFill/>
+                <a:ln w="19050">
+                  <a:solidFill>
+                    <a:srgbClr val="FFFF00"/>
+                  </a:solidFill>
+                </a:ln>
+              </p:spPr>
+              <p:style>
+                <a:lnRef idx="1">
+                  <a:schemeClr val="accent1"/>
+                </a:lnRef>
+                <a:fillRef idx="0">
+                  <a:schemeClr val="accent1"/>
+                </a:fillRef>
+                <a:effectRef idx="0">
+                  <a:schemeClr val="accent1"/>
+                </a:effectRef>
+                <a:fontRef idx="minor">
+                  <a:schemeClr val="tx1"/>
+                </a:fontRef>
+              </p:style>
+            </p:cxnSp>
+          </p:grpSp>
+          <p:grpSp>
+            <p:nvGrpSpPr>
+              <p:cNvPr id="86" name="グループ化 85">
+                <a:extLst>
+                  <a:ext uri="{FF2B5EF4-FFF2-40B4-BE49-F238E27FC236}">
+                    <a16:creationId xmlns:a16="http://schemas.microsoft.com/office/drawing/2014/main" id="{469478EF-BDED-0C9C-93CF-8BDB18CA2699}"/>
+                  </a:ext>
+                </a:extLst>
+              </p:cNvPr>
+              <p:cNvGrpSpPr/>
+              <p:nvPr/>
+            </p:nvGrpSpPr>
+            <p:grpSpPr>
+              <a:xfrm>
+                <a:off x="8344167" y="3377881"/>
+                <a:ext cx="177250" cy="49530"/>
+                <a:chOff x="-1104976" y="1403484"/>
+                <a:chExt cx="578542" cy="288032"/>
+              </a:xfrm>
+              <a:grpFill/>
+            </p:grpSpPr>
+            <p:cxnSp>
+              <p:nvCxnSpPr>
+                <p:cNvPr id="104" name="直線コネクタ 103">
+                  <a:extLst>
+                    <a:ext uri="{FF2B5EF4-FFF2-40B4-BE49-F238E27FC236}">
+                      <a16:creationId xmlns:a16="http://schemas.microsoft.com/office/drawing/2014/main" id="{EDA8AECE-47E2-2402-EC95-6CC4DBA0DCA5}"/>
+                    </a:ext>
+                  </a:extLst>
+                </p:cNvPr>
+                <p:cNvCxnSpPr>
+                  <a:cxnSpLocks/>
+                </p:cNvCxnSpPr>
+                <p:nvPr/>
+              </p:nvCxnSpPr>
+              <p:spPr>
+                <a:xfrm>
+                  <a:off x="-1104976" y="1403484"/>
+                  <a:ext cx="288032" cy="288032"/>
+                </a:xfrm>
+                <a:prstGeom prst="line">
+                  <a:avLst/>
+                </a:prstGeom>
+                <a:grpFill/>
+                <a:ln w="19050">
+                  <a:solidFill>
+                    <a:srgbClr val="FFFF00"/>
+                  </a:solidFill>
+                </a:ln>
+              </p:spPr>
+              <p:style>
+                <a:lnRef idx="1">
+                  <a:schemeClr val="accent1"/>
+                </a:lnRef>
+                <a:fillRef idx="0">
+                  <a:schemeClr val="accent1"/>
+                </a:fillRef>
+                <a:effectRef idx="0">
+                  <a:schemeClr val="accent1"/>
+                </a:effectRef>
+                <a:fontRef idx="minor">
+                  <a:schemeClr val="tx1"/>
+                </a:fontRef>
+              </p:style>
+            </p:cxnSp>
+            <p:cxnSp>
+              <p:nvCxnSpPr>
+                <p:cNvPr id="105" name="直線コネクタ 104">
+                  <a:extLst>
+                    <a:ext uri="{FF2B5EF4-FFF2-40B4-BE49-F238E27FC236}">
+                      <a16:creationId xmlns:a16="http://schemas.microsoft.com/office/drawing/2014/main" id="{D9D5EC3D-AA3A-3936-228F-67F6F85316B2}"/>
+                    </a:ext>
+                  </a:extLst>
+                </p:cNvPr>
+                <p:cNvCxnSpPr>
+                  <a:cxnSpLocks/>
+                </p:cNvCxnSpPr>
+                <p:nvPr/>
+              </p:nvCxnSpPr>
+              <p:spPr>
+                <a:xfrm flipH="1">
+                  <a:off x="-814434" y="1403516"/>
+                  <a:ext cx="288000" cy="288000"/>
+                </a:xfrm>
+                <a:prstGeom prst="line">
+                  <a:avLst/>
+                </a:prstGeom>
+                <a:grpFill/>
+                <a:ln w="19050">
+                  <a:solidFill>
+                    <a:srgbClr val="FFFF00"/>
+                  </a:solidFill>
+                </a:ln>
+              </p:spPr>
+              <p:style>
+                <a:lnRef idx="1">
+                  <a:schemeClr val="accent1"/>
+                </a:lnRef>
+                <a:fillRef idx="0">
+                  <a:schemeClr val="accent1"/>
+                </a:fillRef>
+                <a:effectRef idx="0">
+                  <a:schemeClr val="accent1"/>
+                </a:effectRef>
+                <a:fontRef idx="minor">
+                  <a:schemeClr val="tx1"/>
+                </a:fontRef>
+              </p:style>
+            </p:cxnSp>
+          </p:grpSp>
+          <p:grpSp>
+            <p:nvGrpSpPr>
+              <p:cNvPr id="87" name="グループ化 86">
+                <a:extLst>
+                  <a:ext uri="{FF2B5EF4-FFF2-40B4-BE49-F238E27FC236}">
+                    <a16:creationId xmlns:a16="http://schemas.microsoft.com/office/drawing/2014/main" id="{0471944A-6604-C1C5-E6F1-F2EAC9FECFD4}"/>
+                  </a:ext>
+                </a:extLst>
+              </p:cNvPr>
+              <p:cNvGrpSpPr/>
+              <p:nvPr/>
+            </p:nvGrpSpPr>
+            <p:grpSpPr>
+              <a:xfrm>
+                <a:off x="8520991" y="3377881"/>
+                <a:ext cx="177250" cy="49530"/>
+                <a:chOff x="-1104976" y="1403484"/>
+                <a:chExt cx="578542" cy="288032"/>
+              </a:xfrm>
+              <a:grpFill/>
+            </p:grpSpPr>
+            <p:cxnSp>
+              <p:nvCxnSpPr>
+                <p:cNvPr id="102" name="直線コネクタ 101">
+                  <a:extLst>
+                    <a:ext uri="{FF2B5EF4-FFF2-40B4-BE49-F238E27FC236}">
+                      <a16:creationId xmlns:a16="http://schemas.microsoft.com/office/drawing/2014/main" id="{80585FE9-190A-7D7C-F1CF-D65547E6EE62}"/>
+                    </a:ext>
+                  </a:extLst>
+                </p:cNvPr>
+                <p:cNvCxnSpPr>
+                  <a:cxnSpLocks/>
+                </p:cNvCxnSpPr>
+                <p:nvPr/>
+              </p:nvCxnSpPr>
+              <p:spPr>
+                <a:xfrm>
+                  <a:off x="-1104976" y="1403484"/>
+                  <a:ext cx="288032" cy="288032"/>
+                </a:xfrm>
+                <a:prstGeom prst="line">
+                  <a:avLst/>
+                </a:prstGeom>
+                <a:grpFill/>
+                <a:ln w="19050">
+                  <a:solidFill>
+                    <a:srgbClr val="FFFF00"/>
+                  </a:solidFill>
+                </a:ln>
+              </p:spPr>
+              <p:style>
+                <a:lnRef idx="1">
+                  <a:schemeClr val="accent1"/>
+                </a:lnRef>
+                <a:fillRef idx="0">
+                  <a:schemeClr val="accent1"/>
+                </a:fillRef>
+                <a:effectRef idx="0">
+                  <a:schemeClr val="accent1"/>
+                </a:effectRef>
+                <a:fontRef idx="minor">
+                  <a:schemeClr val="tx1"/>
+                </a:fontRef>
+              </p:style>
+            </p:cxnSp>
+            <p:cxnSp>
+              <p:nvCxnSpPr>
+                <p:cNvPr id="103" name="直線コネクタ 102">
+                  <a:extLst>
+                    <a:ext uri="{FF2B5EF4-FFF2-40B4-BE49-F238E27FC236}">
+                      <a16:creationId xmlns:a16="http://schemas.microsoft.com/office/drawing/2014/main" id="{4099A662-81C2-B6BF-01E4-56884721ABDE}"/>
+                    </a:ext>
+                  </a:extLst>
+                </p:cNvPr>
+                <p:cNvCxnSpPr>
+                  <a:cxnSpLocks/>
+                </p:cNvCxnSpPr>
+                <p:nvPr/>
+              </p:nvCxnSpPr>
+              <p:spPr>
+                <a:xfrm flipH="1">
+                  <a:off x="-814434" y="1403516"/>
+                  <a:ext cx="288000" cy="288000"/>
+                </a:xfrm>
+                <a:prstGeom prst="line">
+                  <a:avLst/>
+                </a:prstGeom>
+                <a:grpFill/>
+                <a:ln w="19050">
+                  <a:solidFill>
+                    <a:srgbClr val="FFFF00"/>
+                  </a:solidFill>
+                </a:ln>
+              </p:spPr>
+              <p:style>
+                <a:lnRef idx="1">
+                  <a:schemeClr val="accent1"/>
+                </a:lnRef>
+                <a:fillRef idx="0">
+                  <a:schemeClr val="accent1"/>
+                </a:fillRef>
+                <a:effectRef idx="0">
+                  <a:schemeClr val="accent1"/>
+                </a:effectRef>
+                <a:fontRef idx="minor">
+                  <a:schemeClr val="tx1"/>
+                </a:fontRef>
+              </p:style>
+            </p:cxnSp>
+          </p:grpSp>
+          <p:grpSp>
+            <p:nvGrpSpPr>
+              <p:cNvPr id="88" name="グループ化 87">
+                <a:extLst>
+                  <a:ext uri="{FF2B5EF4-FFF2-40B4-BE49-F238E27FC236}">
+                    <a16:creationId xmlns:a16="http://schemas.microsoft.com/office/drawing/2014/main" id="{5284F50F-1991-58D1-175A-768E8812BEB4}"/>
+                  </a:ext>
+                </a:extLst>
+              </p:cNvPr>
+              <p:cNvGrpSpPr/>
+              <p:nvPr/>
+            </p:nvGrpSpPr>
+            <p:grpSpPr>
+              <a:xfrm>
+                <a:off x="8697816" y="3377881"/>
+                <a:ext cx="177250" cy="49530"/>
+                <a:chOff x="-1104976" y="1403484"/>
+                <a:chExt cx="578542" cy="288032"/>
+              </a:xfrm>
+              <a:grpFill/>
+            </p:grpSpPr>
+            <p:cxnSp>
+              <p:nvCxnSpPr>
+                <p:cNvPr id="100" name="直線コネクタ 99">
+                  <a:extLst>
+                    <a:ext uri="{FF2B5EF4-FFF2-40B4-BE49-F238E27FC236}">
+                      <a16:creationId xmlns:a16="http://schemas.microsoft.com/office/drawing/2014/main" id="{B5E13028-A06C-9707-057C-22B47DFEC036}"/>
+                    </a:ext>
+                  </a:extLst>
+                </p:cNvPr>
+                <p:cNvCxnSpPr>
+                  <a:cxnSpLocks/>
+                </p:cNvCxnSpPr>
+                <p:nvPr/>
+              </p:nvCxnSpPr>
+              <p:spPr>
+                <a:xfrm>
+                  <a:off x="-1104976" y="1403484"/>
+                  <a:ext cx="288032" cy="288032"/>
+                </a:xfrm>
+                <a:prstGeom prst="line">
+                  <a:avLst/>
+                </a:prstGeom>
+                <a:grpFill/>
+                <a:ln w="19050">
+                  <a:solidFill>
+                    <a:srgbClr val="FFFF00"/>
+                  </a:solidFill>
+                </a:ln>
+              </p:spPr>
+              <p:style>
+                <a:lnRef idx="1">
+                  <a:schemeClr val="accent1"/>
+                </a:lnRef>
+                <a:fillRef idx="0">
+                  <a:schemeClr val="accent1"/>
+                </a:fillRef>
+                <a:effectRef idx="0">
+                  <a:schemeClr val="accent1"/>
+                </a:effectRef>
+                <a:fontRef idx="minor">
+                  <a:schemeClr val="tx1"/>
+                </a:fontRef>
+              </p:style>
+            </p:cxnSp>
+            <p:cxnSp>
+              <p:nvCxnSpPr>
+                <p:cNvPr id="101" name="直線コネクタ 100">
+                  <a:extLst>
+                    <a:ext uri="{FF2B5EF4-FFF2-40B4-BE49-F238E27FC236}">
+                      <a16:creationId xmlns:a16="http://schemas.microsoft.com/office/drawing/2014/main" id="{4D786734-29B7-0EAE-1428-9517B9080543}"/>
+                    </a:ext>
+                  </a:extLst>
+                </p:cNvPr>
+                <p:cNvCxnSpPr>
+                  <a:cxnSpLocks/>
+                </p:cNvCxnSpPr>
+                <p:nvPr/>
+              </p:nvCxnSpPr>
+              <p:spPr>
+                <a:xfrm flipH="1">
+                  <a:off x="-814434" y="1403516"/>
+                  <a:ext cx="288000" cy="288000"/>
+                </a:xfrm>
+                <a:prstGeom prst="line">
+                  <a:avLst/>
+                </a:prstGeom>
+                <a:grpFill/>
+                <a:ln w="19050">
+                  <a:solidFill>
+                    <a:srgbClr val="FFFF00"/>
+                  </a:solidFill>
+                </a:ln>
+              </p:spPr>
+              <p:style>
+                <a:lnRef idx="1">
+                  <a:schemeClr val="accent1"/>
+                </a:lnRef>
+                <a:fillRef idx="0">
+                  <a:schemeClr val="accent1"/>
+                </a:fillRef>
+                <a:effectRef idx="0">
+                  <a:schemeClr val="accent1"/>
+                </a:effectRef>
+                <a:fontRef idx="minor">
+                  <a:schemeClr val="tx1"/>
+                </a:fontRef>
+              </p:style>
+            </p:cxnSp>
+          </p:grpSp>
+          <p:grpSp>
+            <p:nvGrpSpPr>
+              <p:cNvPr id="89" name="グループ化 88">
+                <a:extLst>
+                  <a:ext uri="{FF2B5EF4-FFF2-40B4-BE49-F238E27FC236}">
+                    <a16:creationId xmlns:a16="http://schemas.microsoft.com/office/drawing/2014/main" id="{83F5FC1D-CDF5-5179-68EE-1DEF4FB6E786}"/>
+                  </a:ext>
+                </a:extLst>
+              </p:cNvPr>
+              <p:cNvGrpSpPr/>
+              <p:nvPr/>
+            </p:nvGrpSpPr>
+            <p:grpSpPr>
+              <a:xfrm>
+                <a:off x="8874641" y="3377881"/>
+                <a:ext cx="177250" cy="49530"/>
+                <a:chOff x="-1104976" y="1403484"/>
+                <a:chExt cx="578542" cy="288032"/>
+              </a:xfrm>
+              <a:grpFill/>
+            </p:grpSpPr>
+            <p:cxnSp>
+              <p:nvCxnSpPr>
+                <p:cNvPr id="98" name="直線コネクタ 97">
+                  <a:extLst>
+                    <a:ext uri="{FF2B5EF4-FFF2-40B4-BE49-F238E27FC236}">
+                      <a16:creationId xmlns:a16="http://schemas.microsoft.com/office/drawing/2014/main" id="{C5244AD2-797F-9A10-672D-71B51AB4F915}"/>
+                    </a:ext>
+                  </a:extLst>
+                </p:cNvPr>
+                <p:cNvCxnSpPr>
+                  <a:cxnSpLocks/>
+                </p:cNvCxnSpPr>
+                <p:nvPr/>
+              </p:nvCxnSpPr>
+              <p:spPr>
+                <a:xfrm>
+                  <a:off x="-1104976" y="1403484"/>
+                  <a:ext cx="288032" cy="288032"/>
+                </a:xfrm>
+                <a:prstGeom prst="line">
+                  <a:avLst/>
+                </a:prstGeom>
+                <a:grpFill/>
+                <a:ln w="19050">
+                  <a:solidFill>
+                    <a:srgbClr val="FFFF00"/>
+                  </a:solidFill>
+                </a:ln>
+              </p:spPr>
+              <p:style>
+                <a:lnRef idx="1">
+                  <a:schemeClr val="accent1"/>
+                </a:lnRef>
+                <a:fillRef idx="0">
+                  <a:schemeClr val="accent1"/>
+                </a:fillRef>
+                <a:effectRef idx="0">
+                  <a:schemeClr val="accent1"/>
+                </a:effectRef>
+                <a:fontRef idx="minor">
+                  <a:schemeClr val="tx1"/>
+                </a:fontRef>
+              </p:style>
+            </p:cxnSp>
+            <p:cxnSp>
+              <p:nvCxnSpPr>
+                <p:cNvPr id="99" name="直線コネクタ 98">
+                  <a:extLst>
+                    <a:ext uri="{FF2B5EF4-FFF2-40B4-BE49-F238E27FC236}">
+                      <a16:creationId xmlns:a16="http://schemas.microsoft.com/office/drawing/2014/main" id="{4BECB237-56BF-77B7-CB6D-FAD0D0C8D91F}"/>
+                    </a:ext>
+                  </a:extLst>
+                </p:cNvPr>
+                <p:cNvCxnSpPr>
+                  <a:cxnSpLocks/>
+                </p:cNvCxnSpPr>
+                <p:nvPr/>
+              </p:nvCxnSpPr>
+              <p:spPr>
+                <a:xfrm flipH="1">
+                  <a:off x="-814434" y="1403516"/>
+                  <a:ext cx="288000" cy="288000"/>
+                </a:xfrm>
+                <a:prstGeom prst="line">
+                  <a:avLst/>
+                </a:prstGeom>
+                <a:grpFill/>
+                <a:ln w="19050">
+                  <a:solidFill>
+                    <a:srgbClr val="FFFF00"/>
+                  </a:solidFill>
+                </a:ln>
+              </p:spPr>
+              <p:style>
+                <a:lnRef idx="1">
+                  <a:schemeClr val="accent1"/>
+                </a:lnRef>
+                <a:fillRef idx="0">
+                  <a:schemeClr val="accent1"/>
+                </a:fillRef>
+                <a:effectRef idx="0">
+                  <a:schemeClr val="accent1"/>
+                </a:effectRef>
+                <a:fontRef idx="minor">
+                  <a:schemeClr val="tx1"/>
+                </a:fontRef>
+              </p:style>
+            </p:cxnSp>
+          </p:grpSp>
+          <p:grpSp>
+            <p:nvGrpSpPr>
+              <p:cNvPr id="90" name="グループ化 89">
+                <a:extLst>
+                  <a:ext uri="{FF2B5EF4-FFF2-40B4-BE49-F238E27FC236}">
+                    <a16:creationId xmlns:a16="http://schemas.microsoft.com/office/drawing/2014/main" id="{29151D1D-6B89-17C6-05F3-324C9EFB9533}"/>
+                  </a:ext>
+                </a:extLst>
+              </p:cNvPr>
+              <p:cNvGrpSpPr/>
+              <p:nvPr/>
+            </p:nvGrpSpPr>
+            <p:grpSpPr>
+              <a:xfrm>
+                <a:off x="9051465" y="3377881"/>
+                <a:ext cx="177250" cy="49530"/>
+                <a:chOff x="-1104976" y="1403484"/>
+                <a:chExt cx="578542" cy="288032"/>
+              </a:xfrm>
+              <a:grpFill/>
+            </p:grpSpPr>
+            <p:cxnSp>
+              <p:nvCxnSpPr>
+                <p:cNvPr id="96" name="直線コネクタ 95">
+                  <a:extLst>
+                    <a:ext uri="{FF2B5EF4-FFF2-40B4-BE49-F238E27FC236}">
+                      <a16:creationId xmlns:a16="http://schemas.microsoft.com/office/drawing/2014/main" id="{837E28E2-2DB4-8F3F-B8F4-4DB5B9C52690}"/>
+                    </a:ext>
+                  </a:extLst>
+                </p:cNvPr>
+                <p:cNvCxnSpPr>
+                  <a:cxnSpLocks/>
+                </p:cNvCxnSpPr>
+                <p:nvPr/>
+              </p:nvCxnSpPr>
+              <p:spPr>
+                <a:xfrm>
+                  <a:off x="-1104976" y="1403484"/>
+                  <a:ext cx="288032" cy="288032"/>
+                </a:xfrm>
+                <a:prstGeom prst="line">
+                  <a:avLst/>
+                </a:prstGeom>
+                <a:grpFill/>
+                <a:ln w="19050">
+                  <a:solidFill>
+                    <a:srgbClr val="FFFF00"/>
+                  </a:solidFill>
+                </a:ln>
+              </p:spPr>
+              <p:style>
+                <a:lnRef idx="1">
+                  <a:schemeClr val="accent1"/>
+                </a:lnRef>
+                <a:fillRef idx="0">
+                  <a:schemeClr val="accent1"/>
+                </a:fillRef>
+                <a:effectRef idx="0">
+                  <a:schemeClr val="accent1"/>
+                </a:effectRef>
+                <a:fontRef idx="minor">
+                  <a:schemeClr val="tx1"/>
+                </a:fontRef>
+              </p:style>
+            </p:cxnSp>
+            <p:cxnSp>
+              <p:nvCxnSpPr>
+                <p:cNvPr id="97" name="直線コネクタ 96">
+                  <a:extLst>
+                    <a:ext uri="{FF2B5EF4-FFF2-40B4-BE49-F238E27FC236}">
+                      <a16:creationId xmlns:a16="http://schemas.microsoft.com/office/drawing/2014/main" id="{B60EC308-8949-0927-A34D-40A1802A59B8}"/>
+                    </a:ext>
+                  </a:extLst>
+                </p:cNvPr>
+                <p:cNvCxnSpPr>
+                  <a:cxnSpLocks/>
+                </p:cNvCxnSpPr>
+                <p:nvPr/>
+              </p:nvCxnSpPr>
+              <p:spPr>
+                <a:xfrm flipH="1">
+                  <a:off x="-814434" y="1403516"/>
+                  <a:ext cx="288000" cy="288000"/>
+                </a:xfrm>
+                <a:prstGeom prst="line">
+                  <a:avLst/>
+                </a:prstGeom>
+                <a:grpFill/>
+                <a:ln w="19050">
+                  <a:solidFill>
+                    <a:srgbClr val="FFFF00"/>
+                  </a:solidFill>
+                </a:ln>
+              </p:spPr>
+              <p:style>
+                <a:lnRef idx="1">
+                  <a:schemeClr val="accent1"/>
+                </a:lnRef>
+                <a:fillRef idx="0">
+                  <a:schemeClr val="accent1"/>
+                </a:fillRef>
+                <a:effectRef idx="0">
+                  <a:schemeClr val="accent1"/>
+                </a:effectRef>
+                <a:fontRef idx="minor">
+                  <a:schemeClr val="tx1"/>
+                </a:fontRef>
+              </p:style>
+            </p:cxnSp>
+          </p:grpSp>
+          <p:grpSp>
+            <p:nvGrpSpPr>
+              <p:cNvPr id="91" name="グループ化 90">
+                <a:extLst>
+                  <a:ext uri="{FF2B5EF4-FFF2-40B4-BE49-F238E27FC236}">
+                    <a16:creationId xmlns:a16="http://schemas.microsoft.com/office/drawing/2014/main" id="{13368A96-C6F4-1E31-C573-40F824C47D3A}"/>
+                  </a:ext>
+                </a:extLst>
+              </p:cNvPr>
+              <p:cNvGrpSpPr/>
+              <p:nvPr/>
+            </p:nvGrpSpPr>
+            <p:grpSpPr>
+              <a:xfrm>
+                <a:off x="9228290" y="3214633"/>
+                <a:ext cx="468112" cy="212778"/>
+                <a:chOff x="-1104976" y="454146"/>
+                <a:chExt cx="1527910" cy="1237370"/>
+              </a:xfrm>
+              <a:grpFill/>
+            </p:grpSpPr>
+            <p:cxnSp>
+              <p:nvCxnSpPr>
+                <p:cNvPr id="94" name="直線コネクタ 93">
+                  <a:extLst>
+                    <a:ext uri="{FF2B5EF4-FFF2-40B4-BE49-F238E27FC236}">
+                      <a16:creationId xmlns:a16="http://schemas.microsoft.com/office/drawing/2014/main" id="{F5695C77-702E-AA24-7B4E-0DBE8197CF9F}"/>
+                    </a:ext>
+                  </a:extLst>
+                </p:cNvPr>
+                <p:cNvCxnSpPr>
+                  <a:cxnSpLocks/>
+                </p:cNvCxnSpPr>
+                <p:nvPr/>
+              </p:nvCxnSpPr>
+              <p:spPr>
+                <a:xfrm>
+                  <a:off x="-1104976" y="1403484"/>
+                  <a:ext cx="288032" cy="288032"/>
+                </a:xfrm>
+                <a:prstGeom prst="line">
+                  <a:avLst/>
+                </a:prstGeom>
+                <a:grpFill/>
+                <a:ln w="19050">
+                  <a:solidFill>
+                    <a:srgbClr val="FFFF00"/>
+                  </a:solidFill>
+                </a:ln>
+              </p:spPr>
+              <p:style>
+                <a:lnRef idx="1">
+                  <a:schemeClr val="accent1"/>
+                </a:lnRef>
+                <a:fillRef idx="0">
+                  <a:schemeClr val="accent1"/>
+                </a:fillRef>
+                <a:effectRef idx="0">
+                  <a:schemeClr val="accent1"/>
+                </a:effectRef>
+                <a:fontRef idx="minor">
+                  <a:schemeClr val="tx1"/>
+                </a:fontRef>
+              </p:style>
+            </p:cxnSp>
+            <p:cxnSp>
+              <p:nvCxnSpPr>
+                <p:cNvPr id="95" name="直線コネクタ 94">
+                  <a:extLst>
+                    <a:ext uri="{FF2B5EF4-FFF2-40B4-BE49-F238E27FC236}">
+                      <a16:creationId xmlns:a16="http://schemas.microsoft.com/office/drawing/2014/main" id="{D2235075-2ED8-431E-8268-25B05277010D}"/>
+                    </a:ext>
+                  </a:extLst>
+                </p:cNvPr>
+                <p:cNvCxnSpPr>
+                  <a:cxnSpLocks/>
+                </p:cNvCxnSpPr>
+                <p:nvPr/>
+              </p:nvCxnSpPr>
+              <p:spPr>
+                <a:xfrm flipH="1">
+                  <a:off x="-814435" y="454146"/>
+                  <a:ext cx="1237369" cy="1237370"/>
+                </a:xfrm>
+                <a:prstGeom prst="line">
+                  <a:avLst/>
+                </a:prstGeom>
+                <a:grpFill/>
+                <a:ln w="19050">
+                  <a:solidFill>
+                    <a:srgbClr val="FFFF00"/>
+                  </a:solidFill>
+                </a:ln>
+              </p:spPr>
+              <p:style>
+                <a:lnRef idx="1">
+                  <a:schemeClr val="accent1"/>
+                </a:lnRef>
+                <a:fillRef idx="0">
+                  <a:schemeClr val="accent1"/>
+                </a:fillRef>
+                <a:effectRef idx="0">
+                  <a:schemeClr val="accent1"/>
+                </a:effectRef>
+                <a:fontRef idx="minor">
+                  <a:schemeClr val="tx1"/>
+                </a:fontRef>
+              </p:style>
+            </p:cxnSp>
+          </p:grpSp>
+          <p:sp>
+            <p:nvSpPr>
+              <p:cNvPr id="92" name="二等辺三角形 91">
+                <a:extLst>
+                  <a:ext uri="{FF2B5EF4-FFF2-40B4-BE49-F238E27FC236}">
+                    <a16:creationId xmlns:a16="http://schemas.microsoft.com/office/drawing/2014/main" id="{CAB612FC-6524-4B9C-3F4C-91801DED475E}"/>
+                  </a:ext>
+                </a:extLst>
+              </p:cNvPr>
+              <p:cNvSpPr/>
+              <p:nvPr/>
+            </p:nvSpPr>
+            <p:spPr>
+              <a:xfrm rot="7744247">
+                <a:off x="7119077" y="3270395"/>
+                <a:ext cx="66285" cy="65936"/>
+              </a:xfrm>
+              <a:prstGeom prst="triangle">
+                <a:avLst/>
+              </a:prstGeom>
+              <a:grpFill/>
+              <a:ln>
+                <a:solidFill>
+                  <a:srgbClr val="FFFF00"/>
+                </a:solidFill>
+              </a:ln>
+              <a:effectLst/>
+            </p:spPr>
+            <p:style>
+              <a:lnRef idx="2">
+                <a:schemeClr val="accent1">
+                  <a:shade val="15000"/>
+                </a:schemeClr>
+              </a:lnRef>
+              <a:fillRef idx="1">
+                <a:schemeClr val="accent1"/>
+              </a:fillRef>
+              <a:effectRef idx="0">
+                <a:schemeClr val="accent1"/>
+              </a:effectRef>
+              <a:fontRef idx="minor">
+                <a:schemeClr val="lt1"/>
+              </a:fontRef>
+            </p:style>
+            <p:txBody>
+              <a:bodyPr rtlCol="0" anchor="ctr"/>
+              <a:lstStyle/>
+              <a:p>
+                <a:pPr algn="ctr"/>
+                <a:endParaRPr kumimoji="1" lang="ja-JP" altLang="en-US" sz="800" dirty="0"/>
+              </a:p>
+            </p:txBody>
+          </p:sp>
+          <p:sp>
+            <p:nvSpPr>
+              <p:cNvPr id="93" name="二等辺三角形 92">
+                <a:extLst>
+                  <a:ext uri="{FF2B5EF4-FFF2-40B4-BE49-F238E27FC236}">
+                    <a16:creationId xmlns:a16="http://schemas.microsoft.com/office/drawing/2014/main" id="{0EB9BA82-2B66-BA51-AD34-C183DB2A7F38}"/>
+                  </a:ext>
+                </a:extLst>
+              </p:cNvPr>
+              <p:cNvSpPr/>
+              <p:nvPr/>
+            </p:nvSpPr>
+            <p:spPr>
+              <a:xfrm rot="2972123">
+                <a:off x="9551772" y="3246365"/>
+                <a:ext cx="66285" cy="65936"/>
+              </a:xfrm>
+              <a:prstGeom prst="triangle">
+                <a:avLst/>
+              </a:prstGeom>
+              <a:grpFill/>
+              <a:ln>
+                <a:solidFill>
+                  <a:srgbClr val="FFFF00"/>
+                </a:solidFill>
+              </a:ln>
+              <a:effectLst/>
+            </p:spPr>
+            <p:style>
+              <a:lnRef idx="2">
+                <a:schemeClr val="accent1">
+                  <a:shade val="15000"/>
+                </a:schemeClr>
+              </a:lnRef>
+              <a:fillRef idx="1">
+                <a:schemeClr val="accent1"/>
+              </a:fillRef>
+              <a:effectRef idx="0">
+                <a:schemeClr val="accent1"/>
+              </a:effectRef>
+              <a:fontRef idx="minor">
+                <a:schemeClr val="lt1"/>
+              </a:fontRef>
+            </p:style>
+            <p:txBody>
+              <a:bodyPr rtlCol="0" anchor="ctr"/>
+              <a:lstStyle/>
+              <a:p>
+                <a:pPr algn="ctr"/>
+                <a:endParaRPr kumimoji="1" lang="ja-JP" altLang="en-US" sz="800"/>
+              </a:p>
+            </p:txBody>
+          </p:sp>
+        </p:grpSp>
+        <p:sp>
+          <p:nvSpPr>
+            <p:cNvPr id="78" name="テキスト ボックス 77">
+              <a:extLst>
+                <a:ext uri="{FF2B5EF4-FFF2-40B4-BE49-F238E27FC236}">
+                  <a16:creationId xmlns:a16="http://schemas.microsoft.com/office/drawing/2014/main" id="{83B147B1-590A-BDC0-B415-BA62DF44B419}"/>
+                </a:ext>
+              </a:extLst>
+            </p:cNvPr>
+            <p:cNvSpPr txBox="1"/>
+            <p:nvPr/>
+          </p:nvSpPr>
+          <p:spPr>
+            <a:xfrm>
+              <a:off x="0" y="1910742"/>
+              <a:ext cx="885524" cy="372557"/>
+            </a:xfrm>
+            <a:prstGeom prst="rect">
+              <a:avLst/>
+            </a:prstGeom>
+            <a:noFill/>
+          </p:spPr>
+          <p:txBody>
+            <a:bodyPr wrap="square" rtlCol="0">
+              <a:spAutoFit/>
+            </a:bodyPr>
+            <a:lstStyle/>
+            <a:p>
+              <a:r>
+                <a:rPr kumimoji="1" lang="en-US" altLang="ja-JP" sz="800" b="1" dirty="0">
+                  <a:solidFill>
+                    <a:srgbClr val="FFFF00"/>
+                  </a:solidFill>
+                  <a:latin typeface="Arial" panose="020B0604020202020204" pitchFamily="34" charset="0"/>
+                  <a:cs typeface="Arial" panose="020B0604020202020204" pitchFamily="34" charset="0"/>
+                </a:rPr>
+                <a:t>Light</a:t>
+              </a:r>
+              <a:endParaRPr kumimoji="1" lang="ja-JP" altLang="en-US" sz="800" b="1" dirty="0">
+                <a:solidFill>
+                  <a:srgbClr val="FFFF00"/>
+                </a:solidFill>
+                <a:latin typeface="Arial" panose="020B0604020202020204" pitchFamily="34" charset="0"/>
+                <a:cs typeface="Arial" panose="020B0604020202020204" pitchFamily="34" charset="0"/>
+              </a:endParaRPr>
+            </a:p>
+          </p:txBody>
+        </p:sp>
+        <p:sp>
+          <p:nvSpPr>
+            <p:cNvPr id="79" name="テキスト ボックス 78">
+              <a:extLst>
+                <a:ext uri="{FF2B5EF4-FFF2-40B4-BE49-F238E27FC236}">
+                  <a16:creationId xmlns:a16="http://schemas.microsoft.com/office/drawing/2014/main" id="{0B72C8B8-FD6D-0AA7-0722-0EC95E186872}"/>
+                </a:ext>
+              </a:extLst>
+            </p:cNvPr>
+            <p:cNvSpPr txBox="1"/>
+            <p:nvPr/>
+          </p:nvSpPr>
+          <p:spPr>
+            <a:xfrm>
+              <a:off x="2712459" y="1910742"/>
+              <a:ext cx="1430115" cy="372557"/>
+            </a:xfrm>
+            <a:prstGeom prst="rect">
+              <a:avLst/>
+            </a:prstGeom>
+            <a:noFill/>
+          </p:spPr>
+          <p:txBody>
+            <a:bodyPr wrap="square" rtlCol="0">
+              <a:spAutoFit/>
+            </a:bodyPr>
+            <a:lstStyle/>
+            <a:p>
+              <a:r>
+                <a:rPr kumimoji="1" lang="en-US" altLang="ja-JP" sz="800" b="1" dirty="0">
+                  <a:solidFill>
+                    <a:srgbClr val="FFFF00"/>
+                  </a:solidFill>
+                  <a:latin typeface="Arial" panose="020B0604020202020204" pitchFamily="34" charset="0"/>
+                  <a:cs typeface="Arial" panose="020B0604020202020204" pitchFamily="34" charset="0"/>
+                </a:rPr>
+                <a:t>To CCD</a:t>
+              </a:r>
+              <a:endParaRPr kumimoji="1" lang="ja-JP" altLang="en-US" sz="800" b="1" dirty="0">
+                <a:solidFill>
+                  <a:srgbClr val="FFFF00"/>
+                </a:solidFill>
+                <a:latin typeface="Arial" panose="020B0604020202020204" pitchFamily="34" charset="0"/>
+                <a:cs typeface="Arial" panose="020B0604020202020204" pitchFamily="34" charset="0"/>
+              </a:endParaRPr>
+            </a:p>
+          </p:txBody>
+        </p:sp>
+      </p:grpSp>
+      <p:sp>
+        <p:nvSpPr>
+          <p:cNvPr id="20" name="正方形/長方形 19">
+            <a:extLst>
+              <a:ext uri="{FF2B5EF4-FFF2-40B4-BE49-F238E27FC236}">
+                <a16:creationId xmlns:a16="http://schemas.microsoft.com/office/drawing/2014/main" id="{6C4E5AFF-582E-7C29-8E56-38F284661FAD}"/>
+              </a:ext>
+            </a:extLst>
+          </p:cNvPr>
+          <p:cNvSpPr/>
+          <p:nvPr/>
+        </p:nvSpPr>
+        <p:spPr>
+          <a:xfrm>
+            <a:off x="8290844" y="2603041"/>
+            <a:ext cx="2365200" cy="1882800"/>
+          </a:xfrm>
+          <a:prstGeom prst="rect">
+            <a:avLst/>
+          </a:prstGeom>
+          <a:noFill/>
+          <a:ln w="76200">
+            <a:solidFill>
+              <a:srgbClr val="F79E02"/>
+            </a:solidFill>
+          </a:ln>
+        </p:spPr>
+        <p:style>
+          <a:lnRef idx="2">
+            <a:schemeClr val="accent1">
+              <a:shade val="15000"/>
+            </a:schemeClr>
+          </a:lnRef>
+          <a:fillRef idx="1">
+            <a:schemeClr val="accent1"/>
+          </a:fillRef>
+          <a:effectRef idx="0">
+            <a:schemeClr val="accent1"/>
+          </a:effectRef>
+          <a:fontRef idx="minor">
+            <a:schemeClr val="lt1"/>
+          </a:fontRef>
+        </p:style>
+        <p:txBody>
+          <a:bodyPr rtlCol="0" anchor="ctr"/>
+          <a:lstStyle/>
+          <a:p>
+            <a:pPr algn="ctr"/>
+            <a:endParaRPr kumimoji="1" lang="ja-JP" altLang="en-US">
+              <a:solidFill>
+                <a:srgbClr val="F79E02"/>
+              </a:solidFill>
+            </a:endParaRPr>
+          </a:p>
+        </p:txBody>
+      </p:sp>
+      <p:sp>
+        <p:nvSpPr>
+          <p:cNvPr id="21" name="テキスト ボックス 20">
+            <a:extLst>
+              <a:ext uri="{FF2B5EF4-FFF2-40B4-BE49-F238E27FC236}">
+                <a16:creationId xmlns:a16="http://schemas.microsoft.com/office/drawing/2014/main" id="{E907FA67-99E1-C555-8ADE-BABC1B213FEA}"/>
+              </a:ext>
+            </a:extLst>
+          </p:cNvPr>
+          <p:cNvSpPr txBox="1"/>
+          <p:nvPr/>
+        </p:nvSpPr>
+        <p:spPr>
+          <a:xfrm>
+            <a:off x="8059717" y="1866862"/>
+            <a:ext cx="2827455" cy="492443"/>
+          </a:xfrm>
+          <a:prstGeom prst="rect">
+            <a:avLst/>
+          </a:prstGeom>
+          <a:noFill/>
+        </p:spPr>
+        <p:txBody>
+          <a:bodyPr wrap="square" lIns="0" tIns="0" rIns="0" bIns="0" rtlCol="0">
+            <a:spAutoFit/>
+          </a:bodyPr>
+          <a:lstStyle/>
+          <a:p>
+            <a:pPr algn="ctr"/>
+            <a:r>
+              <a:rPr kumimoji="1" lang="en-US" altLang="ja-JP" sz="3200" b="1" dirty="0">
+                <a:solidFill>
+                  <a:srgbClr val="F79E02"/>
+                </a:solidFill>
+                <a:latin typeface="Arial" panose="020B0604020202020204" pitchFamily="34" charset="0"/>
+                <a:cs typeface="Arial" panose="020B0604020202020204" pitchFamily="34" charset="0"/>
+              </a:rPr>
+              <a:t>Spectroscopy</a:t>
+            </a:r>
+            <a:endParaRPr kumimoji="1" lang="ja-JP" altLang="en-US" sz="3200" b="1" dirty="0">
+              <a:solidFill>
+                <a:srgbClr val="F79E02"/>
+              </a:solidFill>
+              <a:latin typeface="Arial" panose="020B0604020202020204" pitchFamily="34" charset="0"/>
+              <a:cs typeface="Arial" panose="020B0604020202020204" pitchFamily="34" charset="0"/>
+            </a:endParaRPr>
+          </a:p>
+        </p:txBody>
+      </p:sp>
+      <p:sp>
+        <p:nvSpPr>
+          <p:cNvPr id="22" name="テキスト ボックス 21">
+            <a:extLst>
+              <a:ext uri="{FF2B5EF4-FFF2-40B4-BE49-F238E27FC236}">
+                <a16:creationId xmlns:a16="http://schemas.microsoft.com/office/drawing/2014/main" id="{569DF84E-2C1E-8955-CE1A-9A183840F9BC}"/>
+              </a:ext>
+            </a:extLst>
+          </p:cNvPr>
+          <p:cNvSpPr txBox="1"/>
+          <p:nvPr/>
+        </p:nvSpPr>
+        <p:spPr>
+          <a:xfrm>
+            <a:off x="7905453" y="2287990"/>
+            <a:ext cx="3135983" cy="276999"/>
+          </a:xfrm>
+          <a:prstGeom prst="rect">
+            <a:avLst/>
+          </a:prstGeom>
+          <a:noFill/>
+        </p:spPr>
+        <p:txBody>
+          <a:bodyPr wrap="square" lIns="0" tIns="0" rIns="0" bIns="0" rtlCol="0">
+            <a:spAutoFit/>
+          </a:bodyPr>
+          <a:lstStyle/>
+          <a:p>
+            <a:pPr algn="ctr"/>
+            <a:r>
+              <a:rPr kumimoji="1" lang="en-US" altLang="ja-JP" b="1" dirty="0">
+                <a:solidFill>
+                  <a:srgbClr val="F79E02"/>
+                </a:solidFill>
+                <a:latin typeface="Arial" panose="020B0604020202020204" pitchFamily="34" charset="0"/>
+                <a:cs typeface="Arial" panose="020B0604020202020204" pitchFamily="34" charset="0"/>
+              </a:rPr>
+              <a:t>(In-situ</a:t>
+            </a:r>
+            <a:r>
+              <a:rPr kumimoji="1" lang="ja-JP" altLang="en-US" b="1" dirty="0">
+                <a:solidFill>
+                  <a:srgbClr val="F79E02"/>
+                </a:solidFill>
+                <a:latin typeface="Arial" panose="020B0604020202020204" pitchFamily="34" charset="0"/>
+                <a:cs typeface="Arial" panose="020B0604020202020204" pitchFamily="34" charset="0"/>
+              </a:rPr>
+              <a:t>・</a:t>
+            </a:r>
+            <a:r>
+              <a:rPr kumimoji="1" lang="en-US" altLang="ja-JP" b="1" dirty="0">
+                <a:solidFill>
+                  <a:srgbClr val="F79E02"/>
+                </a:solidFill>
+                <a:latin typeface="Arial" panose="020B0604020202020204" pitchFamily="34" charset="0"/>
+                <a:cs typeface="Arial" panose="020B0604020202020204" pitchFamily="34" charset="0"/>
+              </a:rPr>
+              <a:t>Complex Interface)</a:t>
+            </a:r>
+          </a:p>
+        </p:txBody>
+      </p:sp>
+      <p:cxnSp>
+        <p:nvCxnSpPr>
+          <p:cNvPr id="14" name="直線矢印コネクタ 13">
+            <a:extLst>
+              <a:ext uri="{FF2B5EF4-FFF2-40B4-BE49-F238E27FC236}">
+                <a16:creationId xmlns:a16="http://schemas.microsoft.com/office/drawing/2014/main" id="{407A51FC-7322-2228-8338-677B161EE30C}"/>
+              </a:ext>
+            </a:extLst>
+          </p:cNvPr>
+          <p:cNvCxnSpPr>
+            <a:cxnSpLocks/>
+          </p:cNvCxnSpPr>
+          <p:nvPr/>
+        </p:nvCxnSpPr>
+        <p:spPr>
+          <a:xfrm flipV="1">
+            <a:off x="5838779" y="2943069"/>
+            <a:ext cx="83543" cy="304805"/>
+          </a:xfrm>
+          <a:prstGeom prst="straightConnector1">
+            <a:avLst/>
+          </a:prstGeom>
+          <a:ln w="28575">
+            <a:solidFill>
+              <a:schemeClr val="tx1">
+                <a:lumMod val="85000"/>
+                <a:lumOff val="15000"/>
+              </a:schemeClr>
+            </a:solidFill>
+            <a:tailEnd type="triangle"/>
+          </a:ln>
+        </p:spPr>
+        <p:style>
+          <a:lnRef idx="1">
+            <a:schemeClr val="accent1"/>
+          </a:lnRef>
+          <a:fillRef idx="0">
+            <a:schemeClr val="accent1"/>
+          </a:fillRef>
+          <a:effectRef idx="0">
+            <a:schemeClr val="accent1"/>
+          </a:effectRef>
+          <a:fontRef idx="minor">
+            <a:schemeClr val="tx1"/>
+          </a:fontRef>
+        </p:style>
+      </p:cxnSp>
+      <p:cxnSp>
+        <p:nvCxnSpPr>
+          <p:cNvPr id="15" name="直線矢印コネクタ 14">
+            <a:extLst>
+              <a:ext uri="{FF2B5EF4-FFF2-40B4-BE49-F238E27FC236}">
+                <a16:creationId xmlns:a16="http://schemas.microsoft.com/office/drawing/2014/main" id="{DA478AB7-DC58-0FC6-A4A4-8B03EFA3E5F6}"/>
+              </a:ext>
+            </a:extLst>
+          </p:cNvPr>
+          <p:cNvCxnSpPr>
+            <a:cxnSpLocks/>
+          </p:cNvCxnSpPr>
+          <p:nvPr/>
+        </p:nvCxnSpPr>
+        <p:spPr>
+          <a:xfrm flipV="1">
+            <a:off x="6605351" y="3521098"/>
+            <a:ext cx="126503" cy="304874"/>
+          </a:xfrm>
+          <a:prstGeom prst="straightConnector1">
+            <a:avLst/>
+          </a:prstGeom>
+          <a:ln w="28575">
+            <a:solidFill>
+              <a:schemeClr val="tx1">
+                <a:lumMod val="85000"/>
+                <a:lumOff val="15000"/>
+              </a:schemeClr>
+            </a:solidFill>
+            <a:tailEnd type="triangle"/>
+          </a:ln>
+        </p:spPr>
+        <p:style>
+          <a:lnRef idx="1">
+            <a:schemeClr val="accent1"/>
+          </a:lnRef>
+          <a:fillRef idx="0">
+            <a:schemeClr val="accent1"/>
+          </a:fillRef>
+          <a:effectRef idx="0">
+            <a:schemeClr val="accent1"/>
+          </a:effectRef>
+          <a:fontRef idx="minor">
+            <a:schemeClr val="tx1"/>
+          </a:fontRef>
+        </p:style>
+      </p:cxnSp>
+      <p:sp>
+        <p:nvSpPr>
+          <p:cNvPr id="16" name="テキスト ボックス 15">
+            <a:extLst>
+              <a:ext uri="{FF2B5EF4-FFF2-40B4-BE49-F238E27FC236}">
+                <a16:creationId xmlns:a16="http://schemas.microsoft.com/office/drawing/2014/main" id="{FB942665-13AE-BAE5-511D-FB0C6106B8A1}"/>
+              </a:ext>
+            </a:extLst>
+          </p:cNvPr>
+          <p:cNvSpPr txBox="1"/>
+          <p:nvPr/>
+        </p:nvSpPr>
+        <p:spPr>
+          <a:xfrm>
+            <a:off x="5693858" y="3270525"/>
+            <a:ext cx="761737" cy="410369"/>
+          </a:xfrm>
+          <a:prstGeom prst="rect">
+            <a:avLst/>
+          </a:prstGeom>
+          <a:noFill/>
+        </p:spPr>
+        <p:txBody>
+          <a:bodyPr wrap="square" lIns="0" tIns="0" rIns="0" bIns="0" rtlCol="0">
+            <a:spAutoFit/>
+          </a:bodyPr>
+          <a:lstStyle/>
+          <a:p>
+            <a:pPr algn="l">
+              <a:lnSpc>
+                <a:spcPts val="1600"/>
+              </a:lnSpc>
+            </a:pPr>
+            <a:r>
+              <a:rPr kumimoji="1" lang="en-US" altLang="ja-JP" sz="1600" b="1" dirty="0">
+                <a:solidFill>
+                  <a:srgbClr val="D51506"/>
+                </a:solidFill>
+                <a:latin typeface="Arial" panose="020B0604020202020204" pitchFamily="34" charset="0"/>
+                <a:cs typeface="Arial" panose="020B0604020202020204" pitchFamily="34" charset="0"/>
+              </a:rPr>
+              <a:t>Correct Theory</a:t>
+            </a:r>
+            <a:endParaRPr kumimoji="1" lang="ja-JP" altLang="en-US" sz="1600" b="1" dirty="0">
+              <a:solidFill>
+                <a:srgbClr val="D51506"/>
+              </a:solidFill>
+              <a:latin typeface="Arial" panose="020B0604020202020204" pitchFamily="34" charset="0"/>
+              <a:cs typeface="Arial" panose="020B0604020202020204" pitchFamily="34" charset="0"/>
+            </a:endParaRPr>
+          </a:p>
+        </p:txBody>
+      </p:sp>
+      <p:sp>
+        <p:nvSpPr>
+          <p:cNvPr id="17" name="テキスト ボックス 16">
+            <a:extLst>
+              <a:ext uri="{FF2B5EF4-FFF2-40B4-BE49-F238E27FC236}">
+                <a16:creationId xmlns:a16="http://schemas.microsoft.com/office/drawing/2014/main" id="{346E0988-F92C-3AE9-6A5D-D771DEAB8A27}"/>
+              </a:ext>
+            </a:extLst>
+          </p:cNvPr>
+          <p:cNvSpPr txBox="1"/>
+          <p:nvPr/>
+        </p:nvSpPr>
+        <p:spPr>
+          <a:xfrm>
+            <a:off x="5646972" y="3843488"/>
+            <a:ext cx="1243677" cy="205184"/>
+          </a:xfrm>
+          <a:prstGeom prst="rect">
+            <a:avLst/>
+          </a:prstGeom>
+          <a:noFill/>
+        </p:spPr>
+        <p:txBody>
+          <a:bodyPr wrap="square" lIns="0" tIns="0" rIns="0" bIns="0" rtlCol="0">
+            <a:spAutoFit/>
+          </a:bodyPr>
+          <a:lstStyle/>
+          <a:p>
+            <a:pPr algn="l">
+              <a:lnSpc>
+                <a:spcPts val="1600"/>
+              </a:lnSpc>
+            </a:pPr>
+            <a:r>
+              <a:rPr kumimoji="1" lang="en-US" altLang="ja-JP" sz="1600" b="1" dirty="0">
+                <a:solidFill>
+                  <a:schemeClr val="tx1">
+                    <a:lumMod val="85000"/>
+                    <a:lumOff val="15000"/>
+                  </a:schemeClr>
+                </a:solidFill>
+                <a:latin typeface="Arial" panose="020B0604020202020204" pitchFamily="34" charset="0"/>
+                <a:cs typeface="Arial" panose="020B0604020202020204" pitchFamily="34" charset="0"/>
+              </a:rPr>
+              <a:t>Experiments</a:t>
+            </a:r>
+            <a:endParaRPr kumimoji="1" lang="ja-JP" altLang="en-US" sz="1600" b="1" dirty="0">
+              <a:solidFill>
+                <a:schemeClr val="tx1">
+                  <a:lumMod val="85000"/>
+                  <a:lumOff val="15000"/>
+                </a:schemeClr>
+              </a:solidFill>
+              <a:latin typeface="Arial" panose="020B0604020202020204" pitchFamily="34" charset="0"/>
+              <a:cs typeface="Arial" panose="020B0604020202020204" pitchFamily="34" charset="0"/>
+            </a:endParaRPr>
+          </a:p>
+        </p:txBody>
+      </p:sp>
+      <p:sp>
+        <p:nvSpPr>
+          <p:cNvPr id="146" name="十字形 145">
+            <a:extLst>
+              <a:ext uri="{FF2B5EF4-FFF2-40B4-BE49-F238E27FC236}">
+                <a16:creationId xmlns:a16="http://schemas.microsoft.com/office/drawing/2014/main" id="{3ED47DB7-0DFA-3B2D-CA8D-D1F1E5B19ADB}"/>
+              </a:ext>
+            </a:extLst>
+          </p:cNvPr>
+          <p:cNvSpPr/>
+          <p:nvPr/>
+        </p:nvSpPr>
+        <p:spPr>
+          <a:xfrm rot="2754931">
+            <a:off x="4266657" y="3305061"/>
+            <a:ext cx="514558" cy="514558"/>
+          </a:xfrm>
+          <a:prstGeom prst="plus">
+            <a:avLst>
+              <a:gd name="adj" fmla="val 42994"/>
+            </a:avLst>
+          </a:prstGeom>
+          <a:solidFill>
+            <a:schemeClr val="tx1">
+              <a:lumMod val="85000"/>
+              <a:lumOff val="15000"/>
+            </a:schemeClr>
+          </a:solidFill>
+          <a:ln>
+            <a:solidFill>
+              <a:schemeClr val="tx1">
+                <a:lumMod val="85000"/>
+                <a:lumOff val="15000"/>
+              </a:schemeClr>
+            </a:solidFill>
+          </a:ln>
+        </p:spPr>
+        <p:style>
+          <a:lnRef idx="2">
+            <a:schemeClr val="accent1">
+              <a:shade val="15000"/>
+            </a:schemeClr>
+          </a:lnRef>
+          <a:fillRef idx="1">
+            <a:schemeClr val="accent1"/>
+          </a:fillRef>
+          <a:effectRef idx="0">
+            <a:schemeClr val="accent1"/>
+          </a:effectRef>
+          <a:fontRef idx="minor">
+            <a:schemeClr val="lt1"/>
+          </a:fontRef>
+        </p:style>
+        <p:txBody>
+          <a:bodyPr rtlCol="0" anchor="ctr"/>
+          <a:lstStyle/>
+          <a:p>
+            <a:pPr algn="ctr"/>
+            <a:endParaRPr kumimoji="1" lang="ja-JP" altLang="en-US"/>
+          </a:p>
+        </p:txBody>
+      </p:sp>
+      <p:sp>
+        <p:nvSpPr>
+          <p:cNvPr id="147" name="十字形 146">
+            <a:extLst>
+              <a:ext uri="{FF2B5EF4-FFF2-40B4-BE49-F238E27FC236}">
+                <a16:creationId xmlns:a16="http://schemas.microsoft.com/office/drawing/2014/main" id="{A766989F-20A8-424A-F5A4-DDCF565092C6}"/>
+              </a:ext>
+            </a:extLst>
+          </p:cNvPr>
+          <p:cNvSpPr/>
+          <p:nvPr/>
+        </p:nvSpPr>
+        <p:spPr>
+          <a:xfrm rot="2754931">
+            <a:off x="7542986" y="3305061"/>
+            <a:ext cx="514558" cy="514558"/>
+          </a:xfrm>
+          <a:prstGeom prst="plus">
+            <a:avLst>
+              <a:gd name="adj" fmla="val 42994"/>
+            </a:avLst>
+          </a:prstGeom>
+          <a:solidFill>
+            <a:schemeClr val="tx1">
+              <a:lumMod val="85000"/>
+              <a:lumOff val="15000"/>
+            </a:schemeClr>
+          </a:solidFill>
+          <a:ln>
+            <a:solidFill>
+              <a:schemeClr val="tx1">
+                <a:lumMod val="85000"/>
+                <a:lumOff val="15000"/>
+              </a:schemeClr>
+            </a:solidFill>
+          </a:ln>
+        </p:spPr>
+        <p:style>
+          <a:lnRef idx="2">
+            <a:schemeClr val="accent1">
+              <a:shade val="15000"/>
+            </a:schemeClr>
+          </a:lnRef>
+          <a:fillRef idx="1">
+            <a:schemeClr val="accent1"/>
+          </a:fillRef>
+          <a:effectRef idx="0">
+            <a:schemeClr val="accent1"/>
+          </a:effectRef>
+          <a:fontRef idx="minor">
+            <a:schemeClr val="lt1"/>
+          </a:fontRef>
+        </p:style>
+        <p:txBody>
+          <a:bodyPr rtlCol="0" anchor="ctr"/>
+          <a:lstStyle/>
+          <a:p>
+            <a:pPr algn="ctr"/>
+            <a:endParaRPr kumimoji="1" lang="ja-JP" altLang="en-US"/>
+          </a:p>
+        </p:txBody>
+      </p:sp>
+    </p:spTree>
+    <p:extLst>
+      <p:ext uri="{BB962C8B-B14F-4D97-AF65-F5344CB8AC3E}">
+        <p14:creationId xmlns:p14="http://schemas.microsoft.com/office/powerpoint/2010/main" val="2220322185"/>
+      </p:ext>
+    </p:extLst>
+  </p:cSld>
+  <p:clrMapOvr>
+    <a:masterClrMapping/>
+  </p:clrMapOvr>
+</p:sld>
+</file>
+
+<file path=ppt/slides/slide7.xml><?xml version="1.0" encoding="utf-8"?>
+<p:sld xmlns:a="http://schemas.openxmlformats.org/drawingml/2006/main" xmlns:r="http://schemas.openxmlformats.org/officeDocument/2006/relationships" xmlns:p="http://schemas.openxmlformats.org/presentationml/2006/main">
+  <p:cSld>
+    <p:spTree>
+      <p:nvGrpSpPr>
+        <p:cNvPr id="1" name=""/>
+        <p:cNvGrpSpPr/>
+        <p:nvPr/>
+      </p:nvGrpSpPr>
+      <p:grpSpPr>
+        <a:xfrm>
+          <a:off x="0" y="0"/>
+          <a:ext cx="0" cy="0"/>
+          <a:chOff x="0" y="0"/>
+          <a:chExt cx="0" cy="0"/>
+        </a:xfrm>
+      </p:grpSpPr>
+      <p:sp>
+        <p:nvSpPr>
+          <p:cNvPr id="2" name="タイトル 1">
+            <a:extLst>
+              <a:ext uri="{FF2B5EF4-FFF2-40B4-BE49-F238E27FC236}">
+                <a16:creationId xmlns:a16="http://schemas.microsoft.com/office/drawing/2014/main" id="{192BA32B-6252-3A04-EB17-8DF0C7C5FB05}"/>
+              </a:ext>
+            </a:extLst>
+          </p:cNvPr>
+          <p:cNvSpPr>
+            <a:spLocks noGrp="1"/>
+          </p:cNvSpPr>
+          <p:nvPr>
+            <p:ph type="title"/>
+          </p:nvPr>
+        </p:nvSpPr>
+        <p:spPr/>
+        <p:txBody>
+          <a:bodyPr/>
+          <a:lstStyle/>
+          <a:p>
+            <a:endParaRPr kumimoji="1" lang="ja-JP" altLang="en-US"/>
+          </a:p>
+        </p:txBody>
+      </p:sp>
+      <p:sp>
+        <p:nvSpPr>
+          <p:cNvPr id="121" name="テキスト ボックス 120">
+            <a:extLst>
+              <a:ext uri="{FF2B5EF4-FFF2-40B4-BE49-F238E27FC236}">
+                <a16:creationId xmlns:a16="http://schemas.microsoft.com/office/drawing/2014/main" id="{CA44A688-DE92-6A83-4F94-D85CC2D0B396}"/>
+              </a:ext>
+            </a:extLst>
+          </p:cNvPr>
+          <p:cNvSpPr txBox="1"/>
+          <p:nvPr/>
+        </p:nvSpPr>
+        <p:spPr>
+          <a:xfrm>
+            <a:off x="11304138" y="-2752094"/>
+            <a:ext cx="2827455" cy="276999"/>
+          </a:xfrm>
+          <a:prstGeom prst="rect">
+            <a:avLst/>
+          </a:prstGeom>
+          <a:noFill/>
+        </p:spPr>
+        <p:txBody>
+          <a:bodyPr wrap="square" lIns="0" tIns="0" rIns="0" bIns="0" rtlCol="0">
+            <a:spAutoFit/>
+          </a:bodyPr>
+          <a:lstStyle/>
+          <a:p>
+            <a:r>
+              <a:rPr kumimoji="1" lang="en-US" altLang="ja-JP" b="1" dirty="0">
+                <a:solidFill>
+                  <a:srgbClr val="005B82"/>
+                </a:solidFill>
+                <a:latin typeface="Arial" panose="020B0604020202020204" pitchFamily="34" charset="0"/>
+                <a:cs typeface="Arial" panose="020B0604020202020204" pitchFamily="34" charset="0"/>
+              </a:rPr>
+              <a:t>(</a:t>
+            </a:r>
+            <a:r>
+              <a:rPr kumimoji="1" lang="ja-JP" altLang="en-US" b="1" dirty="0">
+                <a:solidFill>
+                  <a:srgbClr val="005B82"/>
+                </a:solidFill>
+                <a:latin typeface="Arial" panose="020B0604020202020204" pitchFamily="34" charset="0"/>
+                <a:cs typeface="Arial" panose="020B0604020202020204" pitchFamily="34" charset="0"/>
+              </a:rPr>
+              <a:t>モデル構築・予測</a:t>
+            </a:r>
+            <a:r>
+              <a:rPr kumimoji="1" lang="en-US" altLang="ja-JP" b="1" dirty="0">
+                <a:solidFill>
+                  <a:srgbClr val="005B82"/>
+                </a:solidFill>
+                <a:latin typeface="Arial" panose="020B0604020202020204" pitchFamily="34" charset="0"/>
+                <a:cs typeface="Arial" panose="020B0604020202020204" pitchFamily="34" charset="0"/>
+              </a:rPr>
+              <a:t>)</a:t>
+            </a:r>
+            <a:endParaRPr kumimoji="1" lang="ja-JP" altLang="en-US" b="1" dirty="0">
+              <a:solidFill>
+                <a:srgbClr val="005B82"/>
+              </a:solidFill>
+              <a:latin typeface="Arial" panose="020B0604020202020204" pitchFamily="34" charset="0"/>
+              <a:cs typeface="Arial" panose="020B0604020202020204" pitchFamily="34" charset="0"/>
+            </a:endParaRPr>
+          </a:p>
+        </p:txBody>
+      </p:sp>
+      <p:grpSp>
+        <p:nvGrpSpPr>
+          <p:cNvPr id="115" name="グループ化 114">
+            <a:extLst>
+              <a:ext uri="{FF2B5EF4-FFF2-40B4-BE49-F238E27FC236}">
+                <a16:creationId xmlns:a16="http://schemas.microsoft.com/office/drawing/2014/main" id="{168217C6-551C-2756-E5DE-2F2F705075FD}"/>
+              </a:ext>
+            </a:extLst>
+          </p:cNvPr>
+          <p:cNvGrpSpPr/>
+          <p:nvPr/>
+        </p:nvGrpSpPr>
+        <p:grpSpPr>
+          <a:xfrm>
+            <a:off x="5168346" y="2414984"/>
+            <a:ext cx="2084466" cy="2092846"/>
+            <a:chOff x="2662930" y="4550863"/>
+            <a:chExt cx="2084466" cy="2092846"/>
+          </a:xfrm>
+        </p:grpSpPr>
+        <p:pic>
+          <p:nvPicPr>
+            <p:cNvPr id="144" name="図 143">
+              <a:extLst>
+                <a:ext uri="{FF2B5EF4-FFF2-40B4-BE49-F238E27FC236}">
+                  <a16:creationId xmlns:a16="http://schemas.microsoft.com/office/drawing/2014/main" id="{599FC6CF-AB92-D6D7-BC04-6E058B7360CE}"/>
+                </a:ext>
+              </a:extLst>
+            </p:cNvPr>
+            <p:cNvPicPr>
+              <a:picLocks noChangeAspect="1"/>
+            </p:cNvPicPr>
+            <p:nvPr/>
+          </p:nvPicPr>
+          <p:blipFill>
+            <a:blip r:embed="rId2" cstate="print">
+              <a:extLst>
+                <a:ext uri="{28A0092B-C50C-407E-A947-70E740481C1C}">
+                  <a14:useLocalDpi xmlns:a14="http://schemas.microsoft.com/office/drawing/2010/main" val="0"/>
+                </a:ext>
+              </a:extLst>
+            </a:blip>
+            <a:srcRect l="54080"/>
+            <a:stretch>
+              <a:fillRect/>
+            </a:stretch>
+          </p:blipFill>
+          <p:spPr bwMode="auto">
+            <a:xfrm>
+              <a:off x="2662930" y="4550863"/>
+              <a:ext cx="2084466" cy="2092846"/>
+            </a:xfrm>
+            <a:prstGeom prst="rect">
+              <a:avLst/>
+            </a:prstGeom>
+            <a:noFill/>
+            <a:ln>
+              <a:noFill/>
+            </a:ln>
+          </p:spPr>
+        </p:pic>
+        <p:sp>
+          <p:nvSpPr>
+            <p:cNvPr id="145" name="正方形/長方形 144">
+              <a:extLst>
+                <a:ext uri="{FF2B5EF4-FFF2-40B4-BE49-F238E27FC236}">
+                  <a16:creationId xmlns:a16="http://schemas.microsoft.com/office/drawing/2014/main" id="{D0CCF0EE-7399-223F-094F-9BDB420BEAB8}"/>
+                </a:ext>
+              </a:extLst>
+            </p:cNvPr>
+            <p:cNvSpPr/>
+            <p:nvPr/>
+          </p:nvSpPr>
+          <p:spPr>
+            <a:xfrm>
+              <a:off x="3451366" y="4584251"/>
+              <a:ext cx="936104" cy="246221"/>
+            </a:xfrm>
+            <a:prstGeom prst="rect">
+              <a:avLst/>
+            </a:prstGeom>
+            <a:solidFill>
+              <a:schemeClr val="bg1"/>
+            </a:solidFill>
+            <a:ln>
+              <a:solidFill>
+                <a:schemeClr val="bg1"/>
+              </a:solidFill>
+            </a:ln>
+          </p:spPr>
+          <p:style>
+            <a:lnRef idx="2">
+              <a:schemeClr val="accent1">
+                <a:shade val="15000"/>
+              </a:schemeClr>
+            </a:lnRef>
+            <a:fillRef idx="1">
+              <a:schemeClr val="accent1"/>
+            </a:fillRef>
+            <a:effectRef idx="0">
+              <a:schemeClr val="accent1"/>
+            </a:effectRef>
+            <a:fontRef idx="minor">
+              <a:schemeClr val="lt1"/>
+            </a:fontRef>
+          </p:style>
+          <p:txBody>
+            <a:bodyPr rtlCol="0" anchor="ctr"/>
+            <a:lstStyle/>
+            <a:p>
+              <a:pPr algn="ctr"/>
+              <a:endParaRPr kumimoji="1" lang="ja-JP" altLang="en-US"/>
+            </a:p>
+          </p:txBody>
+        </p:sp>
+      </p:grpSp>
+      <p:grpSp>
+        <p:nvGrpSpPr>
+          <p:cNvPr id="236" name="グループ化 235">
+            <a:extLst>
+              <a:ext uri="{FF2B5EF4-FFF2-40B4-BE49-F238E27FC236}">
+                <a16:creationId xmlns:a16="http://schemas.microsoft.com/office/drawing/2014/main" id="{F88F3BBA-D32E-08CE-2E76-520EF438BD55}"/>
+              </a:ext>
+            </a:extLst>
+          </p:cNvPr>
+          <p:cNvGrpSpPr/>
+          <p:nvPr/>
+        </p:nvGrpSpPr>
+        <p:grpSpPr>
+          <a:xfrm>
+            <a:off x="1257767" y="2069294"/>
+            <a:ext cx="3002504" cy="2873881"/>
+            <a:chOff x="1257767" y="2069294"/>
+            <a:chExt cx="3002504" cy="2873881"/>
+          </a:xfrm>
+        </p:grpSpPr>
+        <p:sp>
+          <p:nvSpPr>
+            <p:cNvPr id="123" name="テキスト ボックス 122">
+              <a:extLst>
+                <a:ext uri="{FF2B5EF4-FFF2-40B4-BE49-F238E27FC236}">
+                  <a16:creationId xmlns:a16="http://schemas.microsoft.com/office/drawing/2014/main" id="{BC5325DB-2DEC-E637-0045-8DB891FE9D1D}"/>
+                </a:ext>
+              </a:extLst>
+            </p:cNvPr>
+            <p:cNvSpPr txBox="1"/>
+            <p:nvPr/>
+          </p:nvSpPr>
+          <p:spPr>
+            <a:xfrm>
+              <a:off x="3235323" y="2885964"/>
+              <a:ext cx="718406" cy="237090"/>
+            </a:xfrm>
+            <a:prstGeom prst="rect">
+              <a:avLst/>
+            </a:prstGeom>
+            <a:noFill/>
+          </p:spPr>
+          <p:txBody>
+            <a:bodyPr wrap="square" lIns="0" tIns="0" rIns="0" bIns="0" rtlCol="0">
+              <a:spAutoFit/>
+            </a:bodyPr>
+            <a:lstStyle/>
+            <a:p>
+              <a:pPr algn="ctr"/>
+              <a:r>
+                <a:rPr lang="ja-JP" altLang="en-US" b="1" dirty="0">
+                  <a:solidFill>
+                    <a:srgbClr val="D51506"/>
+                  </a:solidFill>
+                  <a:latin typeface="Arial" panose="020B0604020202020204" pitchFamily="34" charset="0"/>
+                  <a:cs typeface="Arial" panose="020B0604020202020204" pitchFamily="34" charset="0"/>
+                </a:rPr>
+                <a:t>溶出</a:t>
+              </a:r>
+            </a:p>
+          </p:txBody>
+        </p:sp>
+        <p:sp>
+          <p:nvSpPr>
+            <p:cNvPr id="124" name="テキスト ボックス 123">
+              <a:extLst>
+                <a:ext uri="{FF2B5EF4-FFF2-40B4-BE49-F238E27FC236}">
+                  <a16:creationId xmlns:a16="http://schemas.microsoft.com/office/drawing/2014/main" id="{33889AAB-DF64-39C1-0281-CC6ABAB26B06}"/>
+                </a:ext>
+              </a:extLst>
+            </p:cNvPr>
+            <p:cNvSpPr txBox="1"/>
+            <p:nvPr/>
+          </p:nvSpPr>
+          <p:spPr>
+            <a:xfrm>
+              <a:off x="2048838" y="3501457"/>
+              <a:ext cx="1406082" cy="237090"/>
+            </a:xfrm>
+            <a:prstGeom prst="rect">
+              <a:avLst/>
+            </a:prstGeom>
+            <a:noFill/>
+          </p:spPr>
+          <p:txBody>
+            <a:bodyPr wrap="square" lIns="0" tIns="0" rIns="0" bIns="0" rtlCol="0">
+              <a:spAutoFit/>
+            </a:bodyPr>
+            <a:lstStyle/>
+            <a:p>
+              <a:pPr algn="ctr"/>
+              <a:r>
+                <a:rPr lang="ja-JP" altLang="en-US" b="1" dirty="0">
+                  <a:solidFill>
+                    <a:srgbClr val="005B82"/>
+                  </a:solidFill>
+                  <a:latin typeface="Arial" panose="020B0604020202020204" pitchFamily="34" charset="0"/>
+                  <a:cs typeface="Arial" panose="020B0604020202020204" pitchFamily="34" charset="0"/>
+                </a:rPr>
+                <a:t>触媒反応</a:t>
+              </a:r>
+            </a:p>
+          </p:txBody>
+        </p:sp>
+        <p:grpSp>
+          <p:nvGrpSpPr>
+            <p:cNvPr id="125" name="グループ化 124">
+              <a:extLst>
+                <a:ext uri="{FF2B5EF4-FFF2-40B4-BE49-F238E27FC236}">
+                  <a16:creationId xmlns:a16="http://schemas.microsoft.com/office/drawing/2014/main" id="{10A32C95-5F43-9C8A-537B-00D3B80D32D2}"/>
+                </a:ext>
+              </a:extLst>
+            </p:cNvPr>
+            <p:cNvGrpSpPr/>
+            <p:nvPr/>
+          </p:nvGrpSpPr>
+          <p:grpSpPr>
+            <a:xfrm>
+              <a:off x="1257767" y="2069294"/>
+              <a:ext cx="3002504" cy="2873881"/>
+              <a:chOff x="-176583" y="445828"/>
+              <a:chExt cx="3979861" cy="3809369"/>
+            </a:xfrm>
+          </p:grpSpPr>
+          <p:grpSp>
+            <p:nvGrpSpPr>
+              <p:cNvPr id="132" name="グループ化 131">
+                <a:extLst>
+                  <a:ext uri="{FF2B5EF4-FFF2-40B4-BE49-F238E27FC236}">
+                    <a16:creationId xmlns:a16="http://schemas.microsoft.com/office/drawing/2014/main" id="{652464BF-E732-8EE2-C791-DF341B15192E}"/>
+                  </a:ext>
+                </a:extLst>
+              </p:cNvPr>
+              <p:cNvGrpSpPr/>
+              <p:nvPr/>
+            </p:nvGrpSpPr>
+            <p:grpSpPr>
+              <a:xfrm>
+                <a:off x="-176583" y="445828"/>
+                <a:ext cx="3979861" cy="3809369"/>
+                <a:chOff x="635792" y="3328482"/>
+                <a:chExt cx="3201264" cy="3064126"/>
+              </a:xfrm>
+            </p:grpSpPr>
+            <p:sp>
+              <p:nvSpPr>
+                <p:cNvPr id="139" name="円弧 138">
+                  <a:extLst>
+                    <a:ext uri="{FF2B5EF4-FFF2-40B4-BE49-F238E27FC236}">
+                      <a16:creationId xmlns:a16="http://schemas.microsoft.com/office/drawing/2014/main" id="{19FEB3E5-FF40-09C2-216D-D720CD0A7575}"/>
+                    </a:ext>
+                  </a:extLst>
+                </p:cNvPr>
+                <p:cNvSpPr/>
+                <p:nvPr/>
+              </p:nvSpPr>
+              <p:spPr>
+                <a:xfrm rot="20439484">
+                  <a:off x="635792" y="3996769"/>
+                  <a:ext cx="1102705" cy="1102705"/>
+                </a:xfrm>
+                <a:prstGeom prst="arc">
+                  <a:avLst>
+                    <a:gd name="adj1" fmla="val 19713318"/>
+                    <a:gd name="adj2" fmla="val 1654528"/>
+                  </a:avLst>
+                </a:prstGeom>
+                <a:ln w="38100">
+                  <a:solidFill>
+                    <a:srgbClr val="D51506"/>
+                  </a:solidFill>
+                  <a:prstDash val="solid"/>
+                  <a:headEnd type="triangle" w="med" len="med"/>
+                  <a:tailEnd type="none" w="med" len="med"/>
+                </a:ln>
+              </p:spPr>
+              <p:style>
+                <a:lnRef idx="1">
+                  <a:schemeClr val="accent1"/>
+                </a:lnRef>
+                <a:fillRef idx="0">
+                  <a:schemeClr val="accent1"/>
+                </a:fillRef>
+                <a:effectRef idx="0">
+                  <a:schemeClr val="accent1"/>
+                </a:effectRef>
+                <a:fontRef idx="minor">
+                  <a:schemeClr val="tx1"/>
+                </a:fontRef>
+              </p:style>
+              <p:txBody>
+                <a:bodyPr rtlCol="0" anchor="ctr"/>
+                <a:lstStyle/>
+                <a:p>
+                  <a:pPr algn="ctr"/>
+                  <a:endParaRPr kumimoji="1" lang="ja-JP" altLang="en-US" sz="1400" dirty="0">
+                    <a:ea typeface="游ゴシック" panose="020B0400000000000000" pitchFamily="50" charset="-128"/>
+                  </a:endParaRPr>
+                </a:p>
+              </p:txBody>
+            </p:sp>
+            <p:sp>
+              <p:nvSpPr>
+                <p:cNvPr id="140" name="円弧 139">
+                  <a:extLst>
+                    <a:ext uri="{FF2B5EF4-FFF2-40B4-BE49-F238E27FC236}">
+                      <a16:creationId xmlns:a16="http://schemas.microsoft.com/office/drawing/2014/main" id="{1B68A81F-3AB7-01A4-BB47-8B1D392C9264}"/>
+                    </a:ext>
+                  </a:extLst>
+                </p:cNvPr>
+                <p:cNvSpPr/>
+                <p:nvPr/>
+              </p:nvSpPr>
+              <p:spPr>
+                <a:xfrm>
+                  <a:off x="2734351" y="4242647"/>
+                  <a:ext cx="1102705" cy="1102705"/>
+                </a:xfrm>
+                <a:prstGeom prst="arc">
+                  <a:avLst>
+                    <a:gd name="adj1" fmla="val 6716678"/>
+                    <a:gd name="adj2" fmla="val 10109756"/>
+                  </a:avLst>
+                </a:prstGeom>
+                <a:ln w="38100">
+                  <a:solidFill>
+                    <a:srgbClr val="D51506"/>
+                  </a:solidFill>
+                  <a:headEnd type="triangle" w="med" len="med"/>
+                  <a:tailEnd type="none" w="med" len="med"/>
+                </a:ln>
+              </p:spPr>
+              <p:style>
+                <a:lnRef idx="1">
+                  <a:schemeClr val="accent1"/>
+                </a:lnRef>
+                <a:fillRef idx="0">
+                  <a:schemeClr val="accent1"/>
+                </a:fillRef>
+                <a:effectRef idx="0">
+                  <a:schemeClr val="accent1"/>
+                </a:effectRef>
+                <a:fontRef idx="minor">
+                  <a:schemeClr val="tx1"/>
+                </a:fontRef>
+              </p:style>
+              <p:txBody>
+                <a:bodyPr rtlCol="0" anchor="ctr"/>
+                <a:lstStyle/>
+                <a:p>
+                  <a:pPr algn="ctr"/>
+                  <a:endParaRPr kumimoji="1" lang="ja-JP" altLang="en-US" sz="1400" dirty="0">
+                    <a:ea typeface="游ゴシック" panose="020B0400000000000000" pitchFamily="50" charset="-128"/>
+                  </a:endParaRPr>
+                </a:p>
+              </p:txBody>
+            </p:sp>
+            <p:sp>
+              <p:nvSpPr>
+                <p:cNvPr id="141" name="円弧 140">
+                  <a:extLst>
+                    <a:ext uri="{FF2B5EF4-FFF2-40B4-BE49-F238E27FC236}">
+                      <a16:creationId xmlns:a16="http://schemas.microsoft.com/office/drawing/2014/main" id="{4310F1ED-88EC-BE93-9952-CBB22094CDA4}"/>
+                    </a:ext>
+                  </a:extLst>
+                </p:cNvPr>
+                <p:cNvSpPr/>
+                <p:nvPr/>
+              </p:nvSpPr>
+              <p:spPr>
+                <a:xfrm>
+                  <a:off x="2261636" y="5289903"/>
+                  <a:ext cx="1102705" cy="1102705"/>
+                </a:xfrm>
+                <a:prstGeom prst="arc">
+                  <a:avLst>
+                    <a:gd name="adj1" fmla="val 10384944"/>
+                    <a:gd name="adj2" fmla="val 13882916"/>
+                  </a:avLst>
+                </a:prstGeom>
+                <a:ln w="38100">
+                  <a:solidFill>
+                    <a:srgbClr val="D51506"/>
+                  </a:solidFill>
+                  <a:headEnd type="triangle" w="med" len="med"/>
+                  <a:tailEnd type="none" w="med" len="med"/>
+                </a:ln>
+              </p:spPr>
+              <p:style>
+                <a:lnRef idx="1">
+                  <a:schemeClr val="accent1"/>
+                </a:lnRef>
+                <a:fillRef idx="0">
+                  <a:schemeClr val="accent1"/>
+                </a:fillRef>
+                <a:effectRef idx="0">
+                  <a:schemeClr val="accent1"/>
+                </a:effectRef>
+                <a:fontRef idx="minor">
+                  <a:schemeClr val="tx1"/>
+                </a:fontRef>
+              </p:style>
+              <p:txBody>
+                <a:bodyPr rtlCol="0" anchor="ctr"/>
+                <a:lstStyle/>
+                <a:p>
+                  <a:pPr algn="ctr"/>
+                  <a:endParaRPr kumimoji="1" lang="ja-JP" altLang="en-US" sz="1400" dirty="0">
+                    <a:ea typeface="游ゴシック" panose="020B0400000000000000" pitchFamily="50" charset="-128"/>
+                  </a:endParaRPr>
+                </a:p>
+              </p:txBody>
+            </p:sp>
+            <p:sp>
+              <p:nvSpPr>
+                <p:cNvPr id="142" name="円弧 141">
+                  <a:extLst>
+                    <a:ext uri="{FF2B5EF4-FFF2-40B4-BE49-F238E27FC236}">
+                      <a16:creationId xmlns:a16="http://schemas.microsoft.com/office/drawing/2014/main" id="{56AA9B86-C397-CBCF-EEDC-FC62D77968DF}"/>
+                    </a:ext>
+                  </a:extLst>
+                </p:cNvPr>
+                <p:cNvSpPr/>
+                <p:nvPr/>
+              </p:nvSpPr>
+              <p:spPr>
+                <a:xfrm rot="20439484">
+                  <a:off x="903331" y="5189528"/>
+                  <a:ext cx="1102705" cy="1102705"/>
+                </a:xfrm>
+                <a:prstGeom prst="arc">
+                  <a:avLst>
+                    <a:gd name="adj1" fmla="val 15935009"/>
+                    <a:gd name="adj2" fmla="val 19486096"/>
+                  </a:avLst>
+                </a:prstGeom>
+                <a:ln w="38100">
+                  <a:solidFill>
+                    <a:srgbClr val="D51506"/>
+                  </a:solidFill>
+                  <a:prstDash val="sysDot"/>
+                  <a:headEnd type="triangle" w="med" len="med"/>
+                  <a:tailEnd type="none" w="med" len="med"/>
+                </a:ln>
+              </p:spPr>
+              <p:style>
+                <a:lnRef idx="1">
+                  <a:schemeClr val="accent1"/>
+                </a:lnRef>
+                <a:fillRef idx="0">
+                  <a:schemeClr val="accent1"/>
+                </a:fillRef>
+                <a:effectRef idx="0">
+                  <a:schemeClr val="accent1"/>
+                </a:effectRef>
+                <a:fontRef idx="minor">
+                  <a:schemeClr val="tx1"/>
+                </a:fontRef>
+              </p:style>
+              <p:txBody>
+                <a:bodyPr rtlCol="0" anchor="ctr"/>
+                <a:lstStyle/>
+                <a:p>
+                  <a:pPr algn="ctr"/>
+                  <a:endParaRPr kumimoji="1" lang="ja-JP" altLang="en-US" sz="1400" dirty="0">
+                    <a:ea typeface="游ゴシック" panose="020B0400000000000000" pitchFamily="50" charset="-128"/>
+                  </a:endParaRPr>
+                </a:p>
+              </p:txBody>
+            </p:sp>
+            <p:sp>
+              <p:nvSpPr>
+                <p:cNvPr id="143" name="円弧 142">
+                  <a:extLst>
+                    <a:ext uri="{FF2B5EF4-FFF2-40B4-BE49-F238E27FC236}">
+                      <a16:creationId xmlns:a16="http://schemas.microsoft.com/office/drawing/2014/main" id="{BE4B9112-488E-848C-AF78-150309D6B42F}"/>
+                    </a:ext>
+                  </a:extLst>
+                </p:cNvPr>
+                <p:cNvSpPr/>
+                <p:nvPr/>
+              </p:nvSpPr>
+              <p:spPr>
+                <a:xfrm>
+                  <a:off x="1985015" y="3328482"/>
+                  <a:ext cx="998365" cy="1102705"/>
+                </a:xfrm>
+                <a:prstGeom prst="arc">
+                  <a:avLst>
+                    <a:gd name="adj1" fmla="val 2748828"/>
+                    <a:gd name="adj2" fmla="val 6450103"/>
+                  </a:avLst>
+                </a:prstGeom>
+                <a:ln w="38100">
+                  <a:solidFill>
+                    <a:srgbClr val="D51506"/>
+                  </a:solidFill>
+                  <a:headEnd type="triangle" w="med" len="med"/>
+                  <a:tailEnd type="none" w="med" len="med"/>
+                </a:ln>
+              </p:spPr>
+              <p:style>
+                <a:lnRef idx="1">
+                  <a:schemeClr val="accent1"/>
+                </a:lnRef>
+                <a:fillRef idx="0">
+                  <a:schemeClr val="accent1"/>
+                </a:fillRef>
+                <a:effectRef idx="0">
+                  <a:schemeClr val="accent1"/>
+                </a:effectRef>
+                <a:fontRef idx="minor">
+                  <a:schemeClr val="tx1"/>
+                </a:fontRef>
+              </p:style>
+              <p:txBody>
+                <a:bodyPr rtlCol="0" anchor="ctr"/>
+                <a:lstStyle/>
+                <a:p>
+                  <a:pPr algn="ctr"/>
+                  <a:endParaRPr kumimoji="1" lang="ja-JP" altLang="en-US" sz="1400" dirty="0">
+                    <a:ea typeface="游ゴシック" panose="020B0400000000000000" pitchFamily="50" charset="-128"/>
+                  </a:endParaRPr>
+                </a:p>
+              </p:txBody>
+            </p:sp>
+          </p:grpSp>
+          <p:grpSp>
+            <p:nvGrpSpPr>
+              <p:cNvPr id="133" name="グループ化 132">
+                <a:extLst>
+                  <a:ext uri="{FF2B5EF4-FFF2-40B4-BE49-F238E27FC236}">
+                    <a16:creationId xmlns:a16="http://schemas.microsoft.com/office/drawing/2014/main" id="{C8C39CD6-F8F4-27AF-323E-7C9B6C3C1266}"/>
+                  </a:ext>
+                </a:extLst>
+              </p:cNvPr>
+              <p:cNvGrpSpPr/>
+              <p:nvPr/>
+            </p:nvGrpSpPr>
+            <p:grpSpPr>
+              <a:xfrm>
+                <a:off x="1056078" y="1764446"/>
+                <a:ext cx="1370900" cy="1370900"/>
+                <a:chOff x="1644873" y="4389133"/>
+                <a:chExt cx="1102705" cy="1102705"/>
+              </a:xfrm>
+            </p:grpSpPr>
+            <p:sp>
+              <p:nvSpPr>
+                <p:cNvPr id="134" name="円弧 133">
+                  <a:extLst>
+                    <a:ext uri="{FF2B5EF4-FFF2-40B4-BE49-F238E27FC236}">
+                      <a16:creationId xmlns:a16="http://schemas.microsoft.com/office/drawing/2014/main" id="{AF114BD2-EC9F-EA93-E8A3-51016AC3EE88}"/>
+                    </a:ext>
+                  </a:extLst>
+                </p:cNvPr>
+                <p:cNvSpPr/>
+                <p:nvPr/>
+              </p:nvSpPr>
+              <p:spPr>
+                <a:xfrm rot="3036775">
+                  <a:off x="1644873" y="4389133"/>
+                  <a:ext cx="1102705" cy="1102705"/>
+                </a:xfrm>
+                <a:prstGeom prst="arc">
+                  <a:avLst>
+                    <a:gd name="adj1" fmla="val 18234785"/>
+                    <a:gd name="adj2" fmla="val 20963355"/>
+                  </a:avLst>
+                </a:prstGeom>
+                <a:ln w="38100">
+                  <a:solidFill>
+                    <a:srgbClr val="005B82"/>
+                  </a:solidFill>
+                  <a:headEnd type="none" w="med" len="med"/>
+                  <a:tailEnd type="triangle" w="med" len="med"/>
+                </a:ln>
+              </p:spPr>
+              <p:style>
+                <a:lnRef idx="1">
+                  <a:schemeClr val="accent1"/>
+                </a:lnRef>
+                <a:fillRef idx="0">
+                  <a:schemeClr val="accent1"/>
+                </a:fillRef>
+                <a:effectRef idx="0">
+                  <a:schemeClr val="accent1"/>
+                </a:effectRef>
+                <a:fontRef idx="minor">
+                  <a:schemeClr val="tx1"/>
+                </a:fontRef>
+              </p:style>
+              <p:txBody>
+                <a:bodyPr rtlCol="0" anchor="ctr"/>
+                <a:lstStyle/>
+                <a:p>
+                  <a:pPr algn="ctr"/>
+                  <a:endParaRPr kumimoji="1" lang="ja-JP" altLang="en-US" sz="1400">
+                    <a:ea typeface="游ゴシック" panose="020B0400000000000000" pitchFamily="50" charset="-128"/>
+                  </a:endParaRPr>
+                </a:p>
+              </p:txBody>
+            </p:sp>
+            <p:sp>
+              <p:nvSpPr>
+                <p:cNvPr id="135" name="円弧 134">
+                  <a:extLst>
+                    <a:ext uri="{FF2B5EF4-FFF2-40B4-BE49-F238E27FC236}">
+                      <a16:creationId xmlns:a16="http://schemas.microsoft.com/office/drawing/2014/main" id="{56654AA4-EB53-BED0-9077-478F775C3760}"/>
+                    </a:ext>
+                  </a:extLst>
+                </p:cNvPr>
+                <p:cNvSpPr/>
+                <p:nvPr/>
+              </p:nvSpPr>
+              <p:spPr>
+                <a:xfrm rot="3036775">
+                  <a:off x="1644873" y="4389133"/>
+                  <a:ext cx="1102705" cy="1102705"/>
+                </a:xfrm>
+                <a:prstGeom prst="arc">
+                  <a:avLst>
+                    <a:gd name="adj1" fmla="val 13960208"/>
+                    <a:gd name="adj2" fmla="val 16567947"/>
+                  </a:avLst>
+                </a:prstGeom>
+                <a:ln w="38100">
+                  <a:solidFill>
+                    <a:srgbClr val="005B82"/>
+                  </a:solidFill>
+                  <a:headEnd type="none" w="med" len="med"/>
+                  <a:tailEnd type="triangle" w="med" len="med"/>
+                </a:ln>
+              </p:spPr>
+              <p:style>
+                <a:lnRef idx="1">
+                  <a:schemeClr val="accent1"/>
+                </a:lnRef>
+                <a:fillRef idx="0">
+                  <a:schemeClr val="accent1"/>
+                </a:fillRef>
+                <a:effectRef idx="0">
+                  <a:schemeClr val="accent1"/>
+                </a:effectRef>
+                <a:fontRef idx="minor">
+                  <a:schemeClr val="tx1"/>
+                </a:fontRef>
+              </p:style>
+              <p:txBody>
+                <a:bodyPr rtlCol="0" anchor="ctr"/>
+                <a:lstStyle/>
+                <a:p>
+                  <a:pPr algn="ctr"/>
+                  <a:endParaRPr kumimoji="1" lang="ja-JP" altLang="en-US" sz="1400">
+                    <a:ea typeface="游ゴシック" panose="020B0400000000000000" pitchFamily="50" charset="-128"/>
+                  </a:endParaRPr>
+                </a:p>
+              </p:txBody>
+            </p:sp>
+            <p:sp>
+              <p:nvSpPr>
+                <p:cNvPr id="136" name="円弧 135">
+                  <a:extLst>
+                    <a:ext uri="{FF2B5EF4-FFF2-40B4-BE49-F238E27FC236}">
+                      <a16:creationId xmlns:a16="http://schemas.microsoft.com/office/drawing/2014/main" id="{5BD29803-4A33-36C6-69AC-AC3153EAB973}"/>
+                    </a:ext>
+                  </a:extLst>
+                </p:cNvPr>
+                <p:cNvSpPr/>
+                <p:nvPr/>
+              </p:nvSpPr>
+              <p:spPr>
+                <a:xfrm rot="1964917">
+                  <a:off x="1644873" y="4389133"/>
+                  <a:ext cx="1102705" cy="1102705"/>
+                </a:xfrm>
+                <a:prstGeom prst="arc">
+                  <a:avLst>
+                    <a:gd name="adj1" fmla="val 6393080"/>
+                    <a:gd name="adj2" fmla="val 9397424"/>
+                  </a:avLst>
+                </a:prstGeom>
+                <a:ln w="38100">
+                  <a:solidFill>
+                    <a:srgbClr val="005B82"/>
+                  </a:solidFill>
+                  <a:prstDash val="sysDot"/>
+                  <a:headEnd type="none" w="med" len="med"/>
+                  <a:tailEnd type="triangle" w="med" len="med"/>
+                </a:ln>
+              </p:spPr>
+              <p:style>
+                <a:lnRef idx="1">
+                  <a:schemeClr val="accent1"/>
+                </a:lnRef>
+                <a:fillRef idx="0">
+                  <a:schemeClr val="accent1"/>
+                </a:fillRef>
+                <a:effectRef idx="0">
+                  <a:schemeClr val="accent1"/>
+                </a:effectRef>
+                <a:fontRef idx="minor">
+                  <a:schemeClr val="tx1"/>
+                </a:fontRef>
+              </p:style>
+              <p:txBody>
+                <a:bodyPr rtlCol="0" anchor="ctr"/>
+                <a:lstStyle/>
+                <a:p>
+                  <a:pPr algn="ctr"/>
+                  <a:endParaRPr kumimoji="1" lang="ja-JP" altLang="en-US" sz="1400">
+                    <a:ea typeface="游ゴシック" panose="020B0400000000000000" pitchFamily="50" charset="-128"/>
+                  </a:endParaRPr>
+                </a:p>
+              </p:txBody>
+            </p:sp>
+            <p:sp>
+              <p:nvSpPr>
+                <p:cNvPr id="137" name="円弧 136">
+                  <a:extLst>
+                    <a:ext uri="{FF2B5EF4-FFF2-40B4-BE49-F238E27FC236}">
+                      <a16:creationId xmlns:a16="http://schemas.microsoft.com/office/drawing/2014/main" id="{6676910F-F602-2887-7C43-F28534A31C74}"/>
+                    </a:ext>
+                  </a:extLst>
+                </p:cNvPr>
+                <p:cNvSpPr/>
+                <p:nvPr/>
+              </p:nvSpPr>
+              <p:spPr>
+                <a:xfrm rot="2446631">
+                  <a:off x="1644873" y="4389133"/>
+                  <a:ext cx="1102705" cy="1102705"/>
+                </a:xfrm>
+                <a:prstGeom prst="arc">
+                  <a:avLst>
+                    <a:gd name="adj1" fmla="val 1060883"/>
+                    <a:gd name="adj2" fmla="val 4193964"/>
+                  </a:avLst>
+                </a:prstGeom>
+                <a:ln w="38100">
+                  <a:solidFill>
+                    <a:srgbClr val="005B82"/>
+                  </a:solidFill>
+                  <a:headEnd type="none" w="med" len="med"/>
+                  <a:tailEnd type="triangle" w="med" len="med"/>
+                </a:ln>
+              </p:spPr>
+              <p:style>
+                <a:lnRef idx="1">
+                  <a:schemeClr val="accent1"/>
+                </a:lnRef>
+                <a:fillRef idx="0">
+                  <a:schemeClr val="accent1"/>
+                </a:fillRef>
+                <a:effectRef idx="0">
+                  <a:schemeClr val="accent1"/>
+                </a:effectRef>
+                <a:fontRef idx="minor">
+                  <a:schemeClr val="tx1"/>
+                </a:fontRef>
+              </p:style>
+              <p:txBody>
+                <a:bodyPr rtlCol="0" anchor="ctr"/>
+                <a:lstStyle/>
+                <a:p>
+                  <a:pPr algn="ctr"/>
+                  <a:endParaRPr kumimoji="1" lang="ja-JP" altLang="en-US" sz="1400" dirty="0">
+                    <a:ea typeface="游ゴシック" panose="020B0400000000000000" pitchFamily="50" charset="-128"/>
+                  </a:endParaRPr>
+                </a:p>
+              </p:txBody>
+            </p:sp>
+            <p:sp>
+              <p:nvSpPr>
+                <p:cNvPr id="138" name="円弧 137">
+                  <a:extLst>
+                    <a:ext uri="{FF2B5EF4-FFF2-40B4-BE49-F238E27FC236}">
+                      <a16:creationId xmlns:a16="http://schemas.microsoft.com/office/drawing/2014/main" id="{FE34149A-6AA3-536B-2145-2D443BAFFB13}"/>
+                    </a:ext>
+                  </a:extLst>
+                </p:cNvPr>
+                <p:cNvSpPr/>
+                <p:nvPr/>
+              </p:nvSpPr>
+              <p:spPr>
+                <a:xfrm rot="3036775">
+                  <a:off x="1644873" y="4389133"/>
+                  <a:ext cx="1102705" cy="1102705"/>
+                </a:xfrm>
+                <a:prstGeom prst="arc">
+                  <a:avLst>
+                    <a:gd name="adj1" fmla="val 9774902"/>
+                    <a:gd name="adj2" fmla="val 12541547"/>
+                  </a:avLst>
+                </a:prstGeom>
+                <a:ln w="38100">
+                  <a:solidFill>
+                    <a:srgbClr val="005B82"/>
+                  </a:solidFill>
+                  <a:prstDash val="solid"/>
+                  <a:headEnd type="none" w="med" len="med"/>
+                  <a:tailEnd type="triangle" w="med" len="med"/>
+                </a:ln>
+              </p:spPr>
+              <p:style>
+                <a:lnRef idx="1">
+                  <a:schemeClr val="accent1"/>
+                </a:lnRef>
+                <a:fillRef idx="0">
+                  <a:schemeClr val="accent1"/>
+                </a:fillRef>
+                <a:effectRef idx="0">
+                  <a:schemeClr val="accent1"/>
+                </a:effectRef>
+                <a:fontRef idx="minor">
+                  <a:schemeClr val="tx1"/>
+                </a:fontRef>
+              </p:style>
+              <p:txBody>
+                <a:bodyPr rtlCol="0" anchor="ctr"/>
+                <a:lstStyle/>
+                <a:p>
+                  <a:pPr algn="ctr"/>
+                  <a:endParaRPr kumimoji="1" lang="ja-JP" altLang="en-US" sz="1400">
+                    <a:ea typeface="游ゴシック" panose="020B0400000000000000" pitchFamily="50" charset="-128"/>
+                  </a:endParaRPr>
+                </a:p>
+              </p:txBody>
+            </p:sp>
+          </p:grpSp>
+        </p:grpSp>
+        <p:grpSp>
+          <p:nvGrpSpPr>
+            <p:cNvPr id="126" name="グループ化 125">
+              <a:extLst>
+                <a:ext uri="{FF2B5EF4-FFF2-40B4-BE49-F238E27FC236}">
+                  <a16:creationId xmlns:a16="http://schemas.microsoft.com/office/drawing/2014/main" id="{EDFD3E84-F077-8BFB-B31F-1A8CC84C1A18}"/>
+                </a:ext>
+              </a:extLst>
+            </p:cNvPr>
+            <p:cNvGrpSpPr/>
+            <p:nvPr/>
+          </p:nvGrpSpPr>
+          <p:grpSpPr>
+            <a:xfrm>
+              <a:off x="2071628" y="2904538"/>
+              <a:ext cx="1293312" cy="1231300"/>
+              <a:chOff x="1593968" y="4261561"/>
+              <a:chExt cx="1215407" cy="1157130"/>
+            </a:xfrm>
+          </p:grpSpPr>
+          <p:sp>
+            <p:nvSpPr>
+              <p:cNvPr id="127" name="テキスト ボックス 126">
+                <a:extLst>
+                  <a:ext uri="{FF2B5EF4-FFF2-40B4-BE49-F238E27FC236}">
+                    <a16:creationId xmlns:a16="http://schemas.microsoft.com/office/drawing/2014/main" id="{E2B1548F-BECD-7BCB-144A-756F840515E3}"/>
+                  </a:ext>
+                </a:extLst>
+              </p:cNvPr>
+              <p:cNvSpPr txBox="1"/>
+              <p:nvPr/>
+            </p:nvSpPr>
+            <p:spPr>
+              <a:xfrm>
+                <a:off x="2520736" y="4605453"/>
+                <a:ext cx="288639" cy="222809"/>
+              </a:xfrm>
+              <a:prstGeom prst="rect">
+                <a:avLst/>
+              </a:prstGeom>
+              <a:noFill/>
+            </p:spPr>
+            <p:txBody>
+              <a:bodyPr wrap="square" lIns="0" tIns="0" rIns="0" bIns="0" rtlCol="0" anchor="t" anchorCtr="0">
+                <a:spAutoFit/>
+              </a:bodyPr>
+              <a:lstStyle/>
+              <a:p>
+                <a:pPr algn="ctr"/>
+                <a:r>
+                  <a:rPr lang="en-US" altLang="ja-JP" b="1" dirty="0">
+                    <a:solidFill>
+                      <a:srgbClr val="005B82"/>
+                    </a:solidFill>
+                    <a:ea typeface="游ゴシック" panose="020B0400000000000000" pitchFamily="50" charset="-128"/>
+                    <a:cs typeface="Arial" panose="020B0604020202020204" pitchFamily="34" charset="0"/>
+                  </a:rPr>
+                  <a:t>X</a:t>
+                </a:r>
+                <a:r>
+                  <a:rPr lang="en-US" altLang="ja-JP" b="1" baseline="-25000" dirty="0">
+                    <a:solidFill>
+                      <a:srgbClr val="005B82"/>
+                    </a:solidFill>
+                    <a:ea typeface="游ゴシック" panose="020B0400000000000000" pitchFamily="50" charset="-128"/>
+                    <a:cs typeface="Arial" panose="020B0604020202020204" pitchFamily="34" charset="0"/>
+                  </a:rPr>
+                  <a:t>2</a:t>
+                </a:r>
+                <a:endParaRPr lang="ja-JP" altLang="en-US" b="1" baseline="-25000" dirty="0">
+                  <a:solidFill>
+                    <a:srgbClr val="005B82"/>
+                  </a:solidFill>
+                  <a:ea typeface="游ゴシック" panose="020B0400000000000000" pitchFamily="50" charset="-128"/>
+                  <a:cs typeface="Arial" panose="020B0604020202020204" pitchFamily="34" charset="0"/>
+                </a:endParaRPr>
+              </a:p>
+            </p:txBody>
+          </p:sp>
+          <p:sp>
+            <p:nvSpPr>
+              <p:cNvPr id="128" name="テキスト ボックス 127">
+                <a:extLst>
+                  <a:ext uri="{FF2B5EF4-FFF2-40B4-BE49-F238E27FC236}">
+                    <a16:creationId xmlns:a16="http://schemas.microsoft.com/office/drawing/2014/main" id="{FF1F8003-0E6C-CAED-78DC-665A77F3AE6D}"/>
+                  </a:ext>
+                </a:extLst>
+              </p:cNvPr>
+              <p:cNvSpPr txBox="1"/>
+              <p:nvPr/>
+            </p:nvSpPr>
+            <p:spPr>
+              <a:xfrm>
+                <a:off x="2408714" y="5184187"/>
+                <a:ext cx="288639" cy="222809"/>
+              </a:xfrm>
+              <a:prstGeom prst="rect">
+                <a:avLst/>
+              </a:prstGeom>
+              <a:noFill/>
+            </p:spPr>
+            <p:txBody>
+              <a:bodyPr wrap="square" lIns="0" tIns="0" rIns="0" bIns="0" rtlCol="0" anchor="t" anchorCtr="0">
+                <a:spAutoFit/>
+              </a:bodyPr>
+              <a:lstStyle/>
+              <a:p>
+                <a:pPr algn="ctr"/>
+                <a:r>
+                  <a:rPr lang="en-US" altLang="ja-JP" b="1" dirty="0">
+                    <a:solidFill>
+                      <a:srgbClr val="005B82"/>
+                    </a:solidFill>
+                    <a:ea typeface="游ゴシック" panose="020B0400000000000000" pitchFamily="50" charset="-128"/>
+                    <a:cs typeface="Arial" panose="020B0604020202020204" pitchFamily="34" charset="0"/>
+                  </a:rPr>
+                  <a:t>X</a:t>
+                </a:r>
+                <a:r>
+                  <a:rPr lang="en-US" altLang="ja-JP" b="1" baseline="-25000" dirty="0">
+                    <a:solidFill>
+                      <a:srgbClr val="005B82"/>
+                    </a:solidFill>
+                    <a:ea typeface="游ゴシック" panose="020B0400000000000000" pitchFamily="50" charset="-128"/>
+                    <a:cs typeface="Arial" panose="020B0604020202020204" pitchFamily="34" charset="0"/>
+                  </a:rPr>
+                  <a:t>3</a:t>
+                </a:r>
+                <a:endParaRPr lang="ja-JP" altLang="en-US" b="1" baseline="-25000" dirty="0">
+                  <a:solidFill>
+                    <a:srgbClr val="005B82"/>
+                  </a:solidFill>
+                  <a:ea typeface="游ゴシック" panose="020B0400000000000000" pitchFamily="50" charset="-128"/>
+                  <a:cs typeface="Arial" panose="020B0604020202020204" pitchFamily="34" charset="0"/>
+                </a:endParaRPr>
+              </a:p>
+            </p:txBody>
+          </p:sp>
+          <p:sp>
+            <p:nvSpPr>
+              <p:cNvPr id="129" name="テキスト ボックス 128">
+                <a:extLst>
+                  <a:ext uri="{FF2B5EF4-FFF2-40B4-BE49-F238E27FC236}">
+                    <a16:creationId xmlns:a16="http://schemas.microsoft.com/office/drawing/2014/main" id="{CA4F59EC-4E55-7649-7D1A-AF343F777555}"/>
+                  </a:ext>
+                </a:extLst>
+              </p:cNvPr>
+              <p:cNvSpPr txBox="1"/>
+              <p:nvPr/>
+            </p:nvSpPr>
+            <p:spPr>
+              <a:xfrm>
+                <a:off x="1737227" y="5195882"/>
+                <a:ext cx="288639" cy="222809"/>
+              </a:xfrm>
+              <a:prstGeom prst="rect">
+                <a:avLst/>
+              </a:prstGeom>
+              <a:noFill/>
+            </p:spPr>
+            <p:txBody>
+              <a:bodyPr wrap="square" lIns="0" tIns="0" rIns="0" bIns="0" rtlCol="0" anchor="t" anchorCtr="0">
+                <a:spAutoFit/>
+              </a:bodyPr>
+              <a:lstStyle/>
+              <a:p>
+                <a:pPr algn="ctr"/>
+                <a:r>
+                  <a:rPr lang="en-US" altLang="ja-JP" b="1" dirty="0">
+                    <a:solidFill>
+                      <a:srgbClr val="005B82"/>
+                    </a:solidFill>
+                    <a:ea typeface="游ゴシック" panose="020B0400000000000000" pitchFamily="50" charset="-128"/>
+                    <a:cs typeface="Arial" panose="020B0604020202020204" pitchFamily="34" charset="0"/>
+                  </a:rPr>
+                  <a:t>X</a:t>
+                </a:r>
+                <a:r>
+                  <a:rPr lang="en-US" altLang="ja-JP" b="1" baseline="-25000" dirty="0">
+                    <a:solidFill>
+                      <a:srgbClr val="005B82"/>
+                    </a:solidFill>
+                    <a:ea typeface="游ゴシック" panose="020B0400000000000000" pitchFamily="50" charset="-128"/>
+                    <a:cs typeface="Arial" panose="020B0604020202020204" pitchFamily="34" charset="0"/>
+                  </a:rPr>
+                  <a:t>4</a:t>
+                </a:r>
+                <a:endParaRPr lang="ja-JP" altLang="en-US" b="1" baseline="-25000" dirty="0">
+                  <a:solidFill>
+                    <a:srgbClr val="005B82"/>
+                  </a:solidFill>
+                  <a:ea typeface="游ゴシック" panose="020B0400000000000000" pitchFamily="50" charset="-128"/>
+                  <a:cs typeface="Arial" panose="020B0604020202020204" pitchFamily="34" charset="0"/>
+                </a:endParaRPr>
+              </a:p>
+            </p:txBody>
+          </p:sp>
+          <p:sp>
+            <p:nvSpPr>
+              <p:cNvPr id="130" name="テキスト ボックス 129">
+                <a:extLst>
+                  <a:ext uri="{FF2B5EF4-FFF2-40B4-BE49-F238E27FC236}">
+                    <a16:creationId xmlns:a16="http://schemas.microsoft.com/office/drawing/2014/main" id="{BD20DD6F-C3EE-2006-EE87-E7EB7D3A4F85}"/>
+                  </a:ext>
+                </a:extLst>
+              </p:cNvPr>
+              <p:cNvSpPr txBox="1"/>
+              <p:nvPr/>
+            </p:nvSpPr>
+            <p:spPr>
+              <a:xfrm>
+                <a:off x="1593968" y="4605453"/>
+                <a:ext cx="288639" cy="222809"/>
+              </a:xfrm>
+              <a:prstGeom prst="rect">
+                <a:avLst/>
+              </a:prstGeom>
+              <a:noFill/>
+            </p:spPr>
+            <p:txBody>
+              <a:bodyPr wrap="square" lIns="0" tIns="0" rIns="0" bIns="0" rtlCol="0" anchor="t" anchorCtr="0">
+                <a:spAutoFit/>
+              </a:bodyPr>
+              <a:lstStyle/>
+              <a:p>
+                <a:pPr algn="ctr"/>
+                <a:r>
+                  <a:rPr lang="en-US" altLang="ja-JP" b="1" dirty="0" err="1">
+                    <a:solidFill>
+                      <a:srgbClr val="005B82"/>
+                    </a:solidFill>
+                    <a:ea typeface="游ゴシック" panose="020B0400000000000000" pitchFamily="50" charset="-128"/>
+                    <a:cs typeface="Arial" panose="020B0604020202020204" pitchFamily="34" charset="0"/>
+                  </a:rPr>
+                  <a:t>X</a:t>
+                </a:r>
+                <a:r>
+                  <a:rPr lang="en-US" altLang="ja-JP" b="1" baseline="-25000" dirty="0" err="1">
+                    <a:solidFill>
+                      <a:srgbClr val="005B82"/>
+                    </a:solidFill>
+                    <a:ea typeface="游ゴシック" panose="020B0400000000000000" pitchFamily="50" charset="-128"/>
+                    <a:cs typeface="Arial" panose="020B0604020202020204" pitchFamily="34" charset="0"/>
+                  </a:rPr>
+                  <a:t>n</a:t>
+                </a:r>
+                <a:endParaRPr lang="ja-JP" altLang="en-US" b="1" baseline="-25000" dirty="0">
+                  <a:solidFill>
+                    <a:srgbClr val="005B82"/>
+                  </a:solidFill>
+                  <a:ea typeface="游ゴシック" panose="020B0400000000000000" pitchFamily="50" charset="-128"/>
+                  <a:cs typeface="Arial" panose="020B0604020202020204" pitchFamily="34" charset="0"/>
+                </a:endParaRPr>
+              </a:p>
+            </p:txBody>
+          </p:sp>
+          <p:sp>
+            <p:nvSpPr>
+              <p:cNvPr id="131" name="テキスト ボックス 130">
+                <a:extLst>
+                  <a:ext uri="{FF2B5EF4-FFF2-40B4-BE49-F238E27FC236}">
+                    <a16:creationId xmlns:a16="http://schemas.microsoft.com/office/drawing/2014/main" id="{8355C6AB-F8D6-3CBF-361A-DDEEFDC0BD8B}"/>
+                  </a:ext>
+                </a:extLst>
+              </p:cNvPr>
+              <p:cNvSpPr txBox="1"/>
+              <p:nvPr/>
+            </p:nvSpPr>
+            <p:spPr>
+              <a:xfrm>
+                <a:off x="2058678" y="4261561"/>
+                <a:ext cx="288639" cy="222809"/>
+              </a:xfrm>
+              <a:prstGeom prst="rect">
+                <a:avLst/>
+              </a:prstGeom>
+              <a:noFill/>
+            </p:spPr>
+            <p:txBody>
+              <a:bodyPr wrap="square" lIns="0" tIns="0" rIns="0" bIns="0" rtlCol="0" anchor="t" anchorCtr="0">
+                <a:spAutoFit/>
+              </a:bodyPr>
+              <a:lstStyle/>
+              <a:p>
+                <a:pPr algn="ctr"/>
+                <a:r>
+                  <a:rPr lang="en-US" altLang="ja-JP" b="1" dirty="0">
+                    <a:solidFill>
+                      <a:srgbClr val="005B82"/>
+                    </a:solidFill>
+                    <a:ea typeface="游ゴシック" panose="020B0400000000000000" pitchFamily="50" charset="-128"/>
+                    <a:cs typeface="Arial" panose="020B0604020202020204" pitchFamily="34" charset="0"/>
+                  </a:rPr>
+                  <a:t>X</a:t>
+                </a:r>
+                <a:r>
+                  <a:rPr lang="en-US" altLang="ja-JP" b="1" baseline="-25000" dirty="0">
+                    <a:solidFill>
+                      <a:srgbClr val="005B82"/>
+                    </a:solidFill>
+                    <a:ea typeface="游ゴシック" panose="020B0400000000000000" pitchFamily="50" charset="-128"/>
+                    <a:cs typeface="Arial" panose="020B0604020202020204" pitchFamily="34" charset="0"/>
+                  </a:rPr>
+                  <a:t>1</a:t>
+                </a:r>
+                <a:endParaRPr lang="ja-JP" altLang="en-US" b="1" baseline="-25000" dirty="0">
+                  <a:solidFill>
+                    <a:srgbClr val="005B82"/>
+                  </a:solidFill>
+                  <a:ea typeface="游ゴシック" panose="020B0400000000000000" pitchFamily="50" charset="-128"/>
+                  <a:cs typeface="Arial" panose="020B0604020202020204" pitchFamily="34" charset="0"/>
+                </a:endParaRPr>
+              </a:p>
+            </p:txBody>
+          </p:sp>
+        </p:grpSp>
+      </p:grpSp>
+      <p:grpSp>
+        <p:nvGrpSpPr>
+          <p:cNvPr id="13" name="グループ化 12">
+            <a:extLst>
+              <a:ext uri="{FF2B5EF4-FFF2-40B4-BE49-F238E27FC236}">
+                <a16:creationId xmlns:a16="http://schemas.microsoft.com/office/drawing/2014/main" id="{39CDFEE2-AECE-11B9-C775-011ADCA9A8B9}"/>
+              </a:ext>
+            </a:extLst>
+          </p:cNvPr>
+          <p:cNvGrpSpPr/>
+          <p:nvPr/>
+        </p:nvGrpSpPr>
+        <p:grpSpPr>
+          <a:xfrm>
+            <a:off x="8341935" y="2847831"/>
+            <a:ext cx="2395588" cy="1293546"/>
+            <a:chOff x="0" y="792309"/>
+            <a:chExt cx="4142574" cy="2236867"/>
+          </a:xfrm>
+        </p:grpSpPr>
+        <p:pic>
+          <p:nvPicPr>
+            <p:cNvPr id="58" name="Picture 44" descr="OWG_side2">
+              <a:extLst>
+                <a:ext uri="{FF2B5EF4-FFF2-40B4-BE49-F238E27FC236}">
+                  <a16:creationId xmlns:a16="http://schemas.microsoft.com/office/drawing/2014/main" id="{1665E6CD-CEDE-DE06-93CA-199785D939D2}"/>
+                </a:ext>
+              </a:extLst>
+            </p:cNvPr>
+            <p:cNvPicPr>
+              <a:picLocks noChangeAspect="1" noChangeArrowheads="1"/>
+            </p:cNvPicPr>
+            <p:nvPr/>
+          </p:nvPicPr>
+          <p:blipFill rotWithShape="1">
+            <a:blip r:embed="rId3" cstate="print">
+              <a:extLst>
+                <a:ext uri="{28A0092B-C50C-407E-A947-70E740481C1C}">
+                  <a14:useLocalDpi xmlns:a14="http://schemas.microsoft.com/office/drawing/2010/main" val="0"/>
+                </a:ext>
+              </a:extLst>
+            </a:blip>
+            <a:srcRect r="2523"/>
+            <a:stretch>
+              <a:fillRect/>
+            </a:stretch>
+          </p:blipFill>
+          <p:spPr bwMode="auto">
+            <a:xfrm>
+              <a:off x="18590" y="792309"/>
+              <a:ext cx="3849029" cy="2236867"/>
+            </a:xfrm>
+            <a:prstGeom prst="rect">
+              <a:avLst/>
+            </a:prstGeom>
+            <a:noFill/>
+            <a:extLst>
+              <a:ext uri="{909E8E84-426E-40DD-AFC4-6F175D3DCCD1}">
+                <a14:hiddenFill xmlns:a14="http://schemas.microsoft.com/office/drawing/2010/main">
+                  <a:solidFill>
+                    <a:srgbClr val="FFFFFF"/>
+                  </a:solidFill>
+                </a14:hiddenFill>
+              </a:ext>
+            </a:extLst>
+          </p:spPr>
+        </p:pic>
+        <p:sp>
+          <p:nvSpPr>
+            <p:cNvPr id="59" name="テキスト ボックス 58">
+              <a:extLst>
+                <a:ext uri="{FF2B5EF4-FFF2-40B4-BE49-F238E27FC236}">
+                  <a16:creationId xmlns:a16="http://schemas.microsoft.com/office/drawing/2014/main" id="{C66C00BE-5376-692D-4D73-15DD3B44C35A}"/>
+                </a:ext>
+              </a:extLst>
+            </p:cNvPr>
+            <p:cNvSpPr txBox="1"/>
+            <p:nvPr/>
+          </p:nvSpPr>
+          <p:spPr>
+            <a:xfrm>
+              <a:off x="2135539" y="1134929"/>
+              <a:ext cx="1758946" cy="372557"/>
+            </a:xfrm>
+            <a:prstGeom prst="rect">
+              <a:avLst/>
+            </a:prstGeom>
+            <a:noFill/>
+          </p:spPr>
+          <p:txBody>
+            <a:bodyPr wrap="square" rtlCol="0">
+              <a:spAutoFit/>
+            </a:bodyPr>
+            <a:lstStyle/>
+            <a:p>
+              <a:pPr algn="r"/>
+              <a:r>
+                <a:rPr lang="ja-JP" altLang="en-US" sz="800" b="1" dirty="0">
+                  <a:latin typeface="Arial" panose="020B0604020202020204" pitchFamily="34" charset="0"/>
+                  <a:cs typeface="Arial" panose="020B0604020202020204" pitchFamily="34" charset="0"/>
+                </a:rPr>
+                <a:t>対極 </a:t>
+              </a:r>
+              <a:r>
+                <a:rPr lang="en-US" altLang="ja-JP" sz="800" b="1" dirty="0">
+                  <a:latin typeface="Arial" panose="020B0604020202020204" pitchFamily="34" charset="0"/>
+                  <a:cs typeface="Arial" panose="020B0604020202020204" pitchFamily="34" charset="0"/>
+                </a:rPr>
+                <a:t>(</a:t>
+              </a:r>
+              <a:r>
+                <a:rPr lang="ja-JP" altLang="en-US" sz="800" b="1" dirty="0">
+                  <a:latin typeface="Arial" panose="020B0604020202020204" pitchFamily="34" charset="0"/>
+                  <a:cs typeface="Arial" panose="020B0604020202020204" pitchFamily="34" charset="0"/>
+                </a:rPr>
+                <a:t>白金線</a:t>
+              </a:r>
+              <a:r>
+                <a:rPr lang="en-US" altLang="ja-JP" sz="800" b="1" dirty="0">
+                  <a:latin typeface="Arial" panose="020B0604020202020204" pitchFamily="34" charset="0"/>
+                  <a:cs typeface="Arial" panose="020B0604020202020204" pitchFamily="34" charset="0"/>
+                </a:rPr>
+                <a:t>)</a:t>
+              </a:r>
+              <a:endParaRPr kumimoji="1" lang="ja-JP" altLang="en-US" sz="800" b="1" dirty="0">
+                <a:latin typeface="Arial" panose="020B0604020202020204" pitchFamily="34" charset="0"/>
+                <a:cs typeface="Arial" panose="020B0604020202020204" pitchFamily="34" charset="0"/>
+              </a:endParaRPr>
+            </a:p>
+          </p:txBody>
+        </p:sp>
+        <p:sp>
+          <p:nvSpPr>
+            <p:cNvPr id="60" name="テキスト ボックス 59">
+              <a:extLst>
+                <a:ext uri="{FF2B5EF4-FFF2-40B4-BE49-F238E27FC236}">
+                  <a16:creationId xmlns:a16="http://schemas.microsoft.com/office/drawing/2014/main" id="{07BEB8AE-917E-8228-54C5-70D12719B70D}"/>
+                </a:ext>
+              </a:extLst>
+            </p:cNvPr>
+            <p:cNvSpPr txBox="1"/>
+            <p:nvPr/>
+          </p:nvSpPr>
+          <p:spPr>
+            <a:xfrm>
+              <a:off x="0" y="1318225"/>
+              <a:ext cx="2456103" cy="372557"/>
+            </a:xfrm>
+            <a:prstGeom prst="rect">
+              <a:avLst/>
+            </a:prstGeom>
+            <a:noFill/>
+          </p:spPr>
+          <p:txBody>
+            <a:bodyPr wrap="square" rtlCol="0">
+              <a:spAutoFit/>
+            </a:bodyPr>
+            <a:lstStyle/>
+            <a:p>
+              <a:r>
+                <a:rPr lang="ja-JP" altLang="en-US" sz="800" b="1" dirty="0">
+                  <a:latin typeface="Arial" panose="020B0604020202020204" pitchFamily="34" charset="0"/>
+                  <a:cs typeface="Arial" panose="020B0604020202020204" pitchFamily="34" charset="0"/>
+                </a:rPr>
+                <a:t>参照極</a:t>
+              </a:r>
+              <a:r>
+                <a:rPr lang="en-US" altLang="ja-JP" sz="800" b="1" dirty="0">
+                  <a:latin typeface="Arial" panose="020B0604020202020204" pitchFamily="34" charset="0"/>
+                  <a:cs typeface="Arial" panose="020B0604020202020204" pitchFamily="34" charset="0"/>
+                </a:rPr>
+                <a:t> (Ag/AgCl)</a:t>
+              </a:r>
+              <a:endParaRPr kumimoji="1" lang="ja-JP" altLang="en-US" sz="800" b="1" dirty="0">
+                <a:latin typeface="Arial" panose="020B0604020202020204" pitchFamily="34" charset="0"/>
+                <a:cs typeface="Arial" panose="020B0604020202020204" pitchFamily="34" charset="0"/>
+              </a:endParaRPr>
+            </a:p>
+          </p:txBody>
+        </p:sp>
+        <p:sp>
+          <p:nvSpPr>
+            <p:cNvPr id="61" name="テキスト ボックス 60">
+              <a:extLst>
+                <a:ext uri="{FF2B5EF4-FFF2-40B4-BE49-F238E27FC236}">
+                  <a16:creationId xmlns:a16="http://schemas.microsoft.com/office/drawing/2014/main" id="{047F7F11-3282-B878-5A82-4928E053EFBB}"/>
+                </a:ext>
+              </a:extLst>
+            </p:cNvPr>
+            <p:cNvSpPr txBox="1"/>
+            <p:nvPr/>
+          </p:nvSpPr>
+          <p:spPr>
+            <a:xfrm>
+              <a:off x="2019511" y="1555814"/>
+              <a:ext cx="1874974" cy="372557"/>
+            </a:xfrm>
+            <a:prstGeom prst="rect">
+              <a:avLst/>
+            </a:prstGeom>
+            <a:noFill/>
+          </p:spPr>
+          <p:txBody>
+            <a:bodyPr wrap="square" rtlCol="0">
+              <a:spAutoFit/>
+            </a:bodyPr>
+            <a:lstStyle/>
+            <a:p>
+              <a:pPr algn="r"/>
+              <a:r>
+                <a:rPr lang="ja-JP" altLang="en-US" sz="800" b="1" dirty="0">
+                  <a:latin typeface="Arial" panose="020B0604020202020204" pitchFamily="34" charset="0"/>
+                  <a:cs typeface="Arial" panose="020B0604020202020204" pitchFamily="34" charset="0"/>
+                </a:rPr>
+                <a:t>作用極 </a:t>
+              </a:r>
+              <a:r>
+                <a:rPr lang="en-US" altLang="ja-JP" sz="800" b="1" dirty="0">
+                  <a:latin typeface="Arial" panose="020B0604020202020204" pitchFamily="34" charset="0"/>
+                  <a:cs typeface="Arial" panose="020B0604020202020204" pitchFamily="34" charset="0"/>
+                </a:rPr>
+                <a:t>(IrO</a:t>
+              </a:r>
+              <a:r>
+                <a:rPr lang="en-US" altLang="ja-JP" sz="800" b="1" baseline="-25000" dirty="0">
+                  <a:latin typeface="Arial" panose="020B0604020202020204" pitchFamily="34" charset="0"/>
+                  <a:cs typeface="Arial" panose="020B0604020202020204" pitchFamily="34" charset="0"/>
+                </a:rPr>
+                <a:t>2</a:t>
+              </a:r>
+              <a:r>
+                <a:rPr lang="en-US" altLang="ja-JP" sz="800" b="1" dirty="0">
+                  <a:latin typeface="Arial" panose="020B0604020202020204" pitchFamily="34" charset="0"/>
+                  <a:cs typeface="Arial" panose="020B0604020202020204" pitchFamily="34" charset="0"/>
+                </a:rPr>
+                <a:t>)</a:t>
+              </a:r>
+              <a:endParaRPr kumimoji="1" lang="ja-JP" altLang="en-US" sz="800" b="1" dirty="0">
+                <a:latin typeface="Arial" panose="020B0604020202020204" pitchFamily="34" charset="0"/>
+                <a:cs typeface="Arial" panose="020B0604020202020204" pitchFamily="34" charset="0"/>
+              </a:endParaRPr>
+            </a:p>
+          </p:txBody>
+        </p:sp>
+        <p:sp>
+          <p:nvSpPr>
+            <p:cNvPr id="62" name="テキスト ボックス 61">
+              <a:extLst>
+                <a:ext uri="{FF2B5EF4-FFF2-40B4-BE49-F238E27FC236}">
+                  <a16:creationId xmlns:a16="http://schemas.microsoft.com/office/drawing/2014/main" id="{B5B651A5-4BC3-4689-4620-FDDC05C92F9B}"/>
+                </a:ext>
+              </a:extLst>
+            </p:cNvPr>
+            <p:cNvSpPr txBox="1"/>
+            <p:nvPr/>
+          </p:nvSpPr>
+          <p:spPr>
+            <a:xfrm>
+              <a:off x="0" y="1615606"/>
+              <a:ext cx="1581075" cy="372557"/>
+            </a:xfrm>
+            <a:prstGeom prst="rect">
+              <a:avLst/>
+            </a:prstGeom>
+            <a:noFill/>
+          </p:spPr>
+          <p:txBody>
+            <a:bodyPr wrap="square" rtlCol="0">
+              <a:spAutoFit/>
+            </a:bodyPr>
+            <a:lstStyle/>
+            <a:p>
+              <a:r>
+                <a:rPr kumimoji="1" lang="ja-JP" altLang="en-US" sz="800" b="1" dirty="0">
+                  <a:latin typeface="Arial" panose="020B0604020202020204" pitchFamily="34" charset="0"/>
+                  <a:cs typeface="Arial" panose="020B0604020202020204" pitchFamily="34" charset="0"/>
+                </a:rPr>
+                <a:t>石英導波路</a:t>
+              </a:r>
+            </a:p>
+          </p:txBody>
+        </p:sp>
+        <p:cxnSp>
+          <p:nvCxnSpPr>
+            <p:cNvPr id="63" name="直線矢印コネクタ 62">
+              <a:extLst>
+                <a:ext uri="{FF2B5EF4-FFF2-40B4-BE49-F238E27FC236}">
+                  <a16:creationId xmlns:a16="http://schemas.microsoft.com/office/drawing/2014/main" id="{965DFD8F-28D1-7354-E247-18F22E869850}"/>
+                </a:ext>
+              </a:extLst>
+            </p:cNvPr>
+            <p:cNvCxnSpPr/>
+            <p:nvPr/>
+          </p:nvCxnSpPr>
+          <p:spPr>
+            <a:xfrm>
+              <a:off x="1334151" y="1602502"/>
+              <a:ext cx="412434" cy="436915"/>
+            </a:xfrm>
+            <a:prstGeom prst="straightConnector1">
+              <a:avLst/>
+            </a:prstGeom>
+            <a:ln w="19050">
+              <a:solidFill>
+                <a:schemeClr val="tx1">
+                  <a:lumMod val="95000"/>
+                  <a:lumOff val="5000"/>
+                </a:schemeClr>
+              </a:solidFill>
+              <a:tailEnd type="arrow"/>
+            </a:ln>
+          </p:spPr>
+          <p:style>
+            <a:lnRef idx="1">
+              <a:schemeClr val="accent1"/>
+            </a:lnRef>
+            <a:fillRef idx="0">
+              <a:schemeClr val="accent1"/>
+            </a:fillRef>
+            <a:effectRef idx="0">
+              <a:schemeClr val="accent1"/>
+            </a:effectRef>
+            <a:fontRef idx="minor">
+              <a:schemeClr val="tx1"/>
+            </a:fontRef>
+          </p:style>
+        </p:cxnSp>
+        <p:cxnSp>
+          <p:nvCxnSpPr>
+            <p:cNvPr id="64" name="直線矢印コネクタ 63">
+              <a:extLst>
+                <a:ext uri="{FF2B5EF4-FFF2-40B4-BE49-F238E27FC236}">
+                  <a16:creationId xmlns:a16="http://schemas.microsoft.com/office/drawing/2014/main" id="{FBCE9A23-2D6F-AF04-691C-9F96F4A153D7}"/>
+                </a:ext>
+              </a:extLst>
+            </p:cNvPr>
+            <p:cNvCxnSpPr>
+              <a:cxnSpLocks/>
+            </p:cNvCxnSpPr>
+            <p:nvPr/>
+          </p:nvCxnSpPr>
+          <p:spPr>
+            <a:xfrm flipH="1">
+              <a:off x="2097282" y="1462446"/>
+              <a:ext cx="678452" cy="650798"/>
+            </a:xfrm>
+            <a:prstGeom prst="straightConnector1">
+              <a:avLst/>
+            </a:prstGeom>
+            <a:ln w="19050">
+              <a:solidFill>
+                <a:schemeClr val="tx1">
+                  <a:lumMod val="95000"/>
+                  <a:lumOff val="5000"/>
+                </a:schemeClr>
+              </a:solidFill>
+              <a:tailEnd type="arrow"/>
+            </a:ln>
+          </p:spPr>
+          <p:style>
+            <a:lnRef idx="1">
+              <a:schemeClr val="accent1"/>
+            </a:lnRef>
+            <a:fillRef idx="0">
+              <a:schemeClr val="accent1"/>
+            </a:fillRef>
+            <a:effectRef idx="0">
+              <a:schemeClr val="accent1"/>
+            </a:effectRef>
+            <a:fontRef idx="minor">
+              <a:schemeClr val="tx1"/>
+            </a:fontRef>
+          </p:style>
+        </p:cxnSp>
+        <p:cxnSp>
+          <p:nvCxnSpPr>
+            <p:cNvPr id="65" name="直線矢印コネクタ 64">
+              <a:extLst>
+                <a:ext uri="{FF2B5EF4-FFF2-40B4-BE49-F238E27FC236}">
+                  <a16:creationId xmlns:a16="http://schemas.microsoft.com/office/drawing/2014/main" id="{6F6503ED-FB7E-CA17-617E-CF9BDF864AC2}"/>
+                </a:ext>
+              </a:extLst>
+            </p:cNvPr>
+            <p:cNvCxnSpPr>
+              <a:cxnSpLocks/>
+            </p:cNvCxnSpPr>
+            <p:nvPr/>
+          </p:nvCxnSpPr>
+          <p:spPr>
+            <a:xfrm flipH="1">
+              <a:off x="2322503" y="1851136"/>
+              <a:ext cx="541609" cy="466681"/>
+            </a:xfrm>
+            <a:prstGeom prst="straightConnector1">
+              <a:avLst/>
+            </a:prstGeom>
+            <a:ln w="19050">
+              <a:solidFill>
+                <a:schemeClr val="tx1">
+                  <a:lumMod val="95000"/>
+                  <a:lumOff val="5000"/>
+                </a:schemeClr>
+              </a:solidFill>
+              <a:tailEnd type="arrow"/>
+            </a:ln>
+          </p:spPr>
+          <p:style>
+            <a:lnRef idx="1">
+              <a:schemeClr val="accent1"/>
+            </a:lnRef>
+            <a:fillRef idx="0">
+              <a:schemeClr val="accent1"/>
+            </a:fillRef>
+            <a:effectRef idx="0">
+              <a:schemeClr val="accent1"/>
+            </a:effectRef>
+            <a:fontRef idx="minor">
+              <a:schemeClr val="tx1"/>
+            </a:fontRef>
+          </p:style>
+        </p:cxnSp>
+        <p:cxnSp>
+          <p:nvCxnSpPr>
+            <p:cNvPr id="66" name="直線矢印コネクタ 65">
+              <a:extLst>
+                <a:ext uri="{FF2B5EF4-FFF2-40B4-BE49-F238E27FC236}">
+                  <a16:creationId xmlns:a16="http://schemas.microsoft.com/office/drawing/2014/main" id="{4FEB261C-EEB3-6ABF-C97A-7E9C0A4FA8DE}"/>
+                </a:ext>
+              </a:extLst>
+            </p:cNvPr>
+            <p:cNvCxnSpPr>
+              <a:cxnSpLocks/>
+            </p:cNvCxnSpPr>
+            <p:nvPr/>
+          </p:nvCxnSpPr>
+          <p:spPr>
+            <a:xfrm>
+              <a:off x="819977" y="1878293"/>
+              <a:ext cx="0" cy="444584"/>
+            </a:xfrm>
+            <a:prstGeom prst="straightConnector1">
+              <a:avLst/>
+            </a:prstGeom>
+            <a:ln w="19050">
+              <a:solidFill>
+                <a:schemeClr val="tx1">
+                  <a:lumMod val="95000"/>
+                  <a:lumOff val="5000"/>
+                </a:schemeClr>
+              </a:solidFill>
+              <a:tailEnd type="arrow"/>
+            </a:ln>
+          </p:spPr>
+          <p:style>
+            <a:lnRef idx="1">
+              <a:schemeClr val="accent1"/>
+            </a:lnRef>
+            <a:fillRef idx="0">
+              <a:schemeClr val="accent1"/>
+            </a:fillRef>
+            <a:effectRef idx="0">
+              <a:schemeClr val="accent1"/>
+            </a:effectRef>
+            <a:fontRef idx="minor">
+              <a:schemeClr val="tx1"/>
+            </a:fontRef>
+          </p:style>
+        </p:cxnSp>
+        <p:grpSp>
+          <p:nvGrpSpPr>
+            <p:cNvPr id="67" name="グループ化 66">
+              <a:extLst>
+                <a:ext uri="{FF2B5EF4-FFF2-40B4-BE49-F238E27FC236}">
+                  <a16:creationId xmlns:a16="http://schemas.microsoft.com/office/drawing/2014/main" id="{AE1450D0-8B10-1DFB-FF11-3D5F68608213}"/>
+                </a:ext>
+              </a:extLst>
+            </p:cNvPr>
+            <p:cNvGrpSpPr/>
+            <p:nvPr/>
+          </p:nvGrpSpPr>
+          <p:grpSpPr>
+            <a:xfrm>
+              <a:off x="612369" y="2187583"/>
+              <a:ext cx="2645313" cy="212778"/>
+              <a:chOff x="7051089" y="3214633"/>
+              <a:chExt cx="2645313" cy="212778"/>
+            </a:xfrm>
+            <a:solidFill>
+              <a:srgbClr val="FFFF00"/>
+            </a:solidFill>
+            <a:effectLst>
+              <a:glow rad="63500">
+                <a:schemeClr val="accent4">
+                  <a:satMod val="175000"/>
+                  <a:alpha val="40000"/>
+                </a:schemeClr>
+              </a:glow>
+            </a:effectLst>
+          </p:grpSpPr>
+          <p:grpSp>
+            <p:nvGrpSpPr>
+              <p:cNvPr id="70" name="グループ化 69">
+                <a:extLst>
+                  <a:ext uri="{FF2B5EF4-FFF2-40B4-BE49-F238E27FC236}">
+                    <a16:creationId xmlns:a16="http://schemas.microsoft.com/office/drawing/2014/main" id="{96CC48B3-939A-7231-DB41-B5DC689A5D65}"/>
+                  </a:ext>
+                </a:extLst>
+              </p:cNvPr>
+              <p:cNvGrpSpPr/>
+              <p:nvPr/>
+            </p:nvGrpSpPr>
+            <p:grpSpPr>
+              <a:xfrm>
+                <a:off x="7051089" y="3247593"/>
+                <a:ext cx="409380" cy="179818"/>
+                <a:chOff x="-1862643" y="645818"/>
+                <a:chExt cx="1336209" cy="1045698"/>
+              </a:xfrm>
+              <a:grpFill/>
+            </p:grpSpPr>
+            <p:cxnSp>
+              <p:nvCxnSpPr>
+                <p:cNvPr id="106" name="直線コネクタ 105">
+                  <a:extLst>
+                    <a:ext uri="{FF2B5EF4-FFF2-40B4-BE49-F238E27FC236}">
+                      <a16:creationId xmlns:a16="http://schemas.microsoft.com/office/drawing/2014/main" id="{714FB77F-08CC-A67D-75D3-0F31A9CF41C1}"/>
+                    </a:ext>
+                  </a:extLst>
+                </p:cNvPr>
+                <p:cNvCxnSpPr>
+                  <a:cxnSpLocks/>
+                </p:cNvCxnSpPr>
+                <p:nvPr/>
+              </p:nvCxnSpPr>
+              <p:spPr>
+                <a:xfrm>
+                  <a:off x="-1862643" y="645818"/>
+                  <a:ext cx="1045701" cy="1045698"/>
+                </a:xfrm>
+                <a:prstGeom prst="line">
+                  <a:avLst/>
+                </a:prstGeom>
+                <a:grpFill/>
+                <a:ln w="19050">
+                  <a:solidFill>
+                    <a:srgbClr val="FFFF00"/>
+                  </a:solidFill>
+                </a:ln>
+              </p:spPr>
+              <p:style>
+                <a:lnRef idx="1">
+                  <a:schemeClr val="accent1"/>
+                </a:lnRef>
+                <a:fillRef idx="0">
+                  <a:schemeClr val="accent1"/>
+                </a:fillRef>
+                <a:effectRef idx="0">
+                  <a:schemeClr val="accent1"/>
+                </a:effectRef>
+                <a:fontRef idx="minor">
+                  <a:schemeClr val="tx1"/>
+                </a:fontRef>
+              </p:style>
+            </p:cxnSp>
+            <p:cxnSp>
+              <p:nvCxnSpPr>
+                <p:cNvPr id="107" name="直線コネクタ 106">
+                  <a:extLst>
+                    <a:ext uri="{FF2B5EF4-FFF2-40B4-BE49-F238E27FC236}">
+                      <a16:creationId xmlns:a16="http://schemas.microsoft.com/office/drawing/2014/main" id="{F59F3618-BF1F-CE4A-33A5-A591DC9615B4}"/>
+                    </a:ext>
+                  </a:extLst>
+                </p:cNvPr>
+                <p:cNvCxnSpPr>
+                  <a:cxnSpLocks/>
+                </p:cNvCxnSpPr>
+                <p:nvPr/>
+              </p:nvCxnSpPr>
+              <p:spPr>
+                <a:xfrm flipH="1">
+                  <a:off x="-814434" y="1403516"/>
+                  <a:ext cx="288000" cy="288000"/>
+                </a:xfrm>
+                <a:prstGeom prst="line">
+                  <a:avLst/>
+                </a:prstGeom>
+                <a:grpFill/>
+                <a:ln w="19050">
+                  <a:solidFill>
+                    <a:srgbClr val="FFFF00"/>
+                  </a:solidFill>
+                </a:ln>
+              </p:spPr>
+              <p:style>
+                <a:lnRef idx="1">
+                  <a:schemeClr val="accent1"/>
+                </a:lnRef>
+                <a:fillRef idx="0">
+                  <a:schemeClr val="accent1"/>
+                </a:fillRef>
+                <a:effectRef idx="0">
+                  <a:schemeClr val="accent1"/>
+                </a:effectRef>
+                <a:fontRef idx="minor">
+                  <a:schemeClr val="tx1"/>
+                </a:fontRef>
+              </p:style>
+            </p:cxnSp>
+          </p:grpSp>
+          <p:grpSp>
+            <p:nvGrpSpPr>
+              <p:cNvPr id="71" name="グループ化 70">
+                <a:extLst>
+                  <a:ext uri="{FF2B5EF4-FFF2-40B4-BE49-F238E27FC236}">
+                    <a16:creationId xmlns:a16="http://schemas.microsoft.com/office/drawing/2014/main" id="{29FF5ADB-F07E-C611-A1F5-AC2C68CAB81F}"/>
+                  </a:ext>
+                </a:extLst>
+              </p:cNvPr>
+              <p:cNvGrpSpPr/>
+              <p:nvPr/>
+            </p:nvGrpSpPr>
+            <p:grpSpPr>
+              <a:xfrm>
+                <a:off x="7460044" y="3377881"/>
+                <a:ext cx="177250" cy="49530"/>
+                <a:chOff x="-1104976" y="1403484"/>
+                <a:chExt cx="578542" cy="288032"/>
+              </a:xfrm>
+              <a:grpFill/>
+            </p:grpSpPr>
+            <p:cxnSp>
+              <p:nvCxnSpPr>
+                <p:cNvPr id="104" name="直線コネクタ 103">
+                  <a:extLst>
+                    <a:ext uri="{FF2B5EF4-FFF2-40B4-BE49-F238E27FC236}">
+                      <a16:creationId xmlns:a16="http://schemas.microsoft.com/office/drawing/2014/main" id="{A5F07304-A47A-7D7A-B57C-B5F78EEA8835}"/>
+                    </a:ext>
+                  </a:extLst>
+                </p:cNvPr>
+                <p:cNvCxnSpPr>
+                  <a:cxnSpLocks/>
+                </p:cNvCxnSpPr>
+                <p:nvPr/>
+              </p:nvCxnSpPr>
+              <p:spPr>
+                <a:xfrm>
+                  <a:off x="-1104976" y="1403484"/>
+                  <a:ext cx="288032" cy="288032"/>
+                </a:xfrm>
+                <a:prstGeom prst="line">
+                  <a:avLst/>
+                </a:prstGeom>
+                <a:grpFill/>
+                <a:ln w="19050">
+                  <a:solidFill>
+                    <a:srgbClr val="FFFF00"/>
+                  </a:solidFill>
+                </a:ln>
+              </p:spPr>
+              <p:style>
+                <a:lnRef idx="1">
+                  <a:schemeClr val="accent1"/>
+                </a:lnRef>
+                <a:fillRef idx="0">
+                  <a:schemeClr val="accent1"/>
+                </a:fillRef>
+                <a:effectRef idx="0">
+                  <a:schemeClr val="accent1"/>
+                </a:effectRef>
+                <a:fontRef idx="minor">
+                  <a:schemeClr val="tx1"/>
+                </a:fontRef>
+              </p:style>
+            </p:cxnSp>
+            <p:cxnSp>
+              <p:nvCxnSpPr>
+                <p:cNvPr id="105" name="直線コネクタ 104">
+                  <a:extLst>
+                    <a:ext uri="{FF2B5EF4-FFF2-40B4-BE49-F238E27FC236}">
+                      <a16:creationId xmlns:a16="http://schemas.microsoft.com/office/drawing/2014/main" id="{B24C0121-93E4-02EC-D843-ED3F2DC18B56}"/>
+                    </a:ext>
+                  </a:extLst>
+                </p:cNvPr>
+                <p:cNvCxnSpPr>
+                  <a:cxnSpLocks/>
+                </p:cNvCxnSpPr>
+                <p:nvPr/>
+              </p:nvCxnSpPr>
+              <p:spPr>
+                <a:xfrm flipH="1">
+                  <a:off x="-814434" y="1403516"/>
+                  <a:ext cx="288000" cy="288000"/>
+                </a:xfrm>
+                <a:prstGeom prst="line">
+                  <a:avLst/>
+                </a:prstGeom>
+                <a:grpFill/>
+                <a:ln w="19050">
+                  <a:solidFill>
+                    <a:srgbClr val="FFFF00"/>
+                  </a:solidFill>
+                </a:ln>
+              </p:spPr>
+              <p:style>
+                <a:lnRef idx="1">
+                  <a:schemeClr val="accent1"/>
+                </a:lnRef>
+                <a:fillRef idx="0">
+                  <a:schemeClr val="accent1"/>
+                </a:fillRef>
+                <a:effectRef idx="0">
+                  <a:schemeClr val="accent1"/>
+                </a:effectRef>
+                <a:fontRef idx="minor">
+                  <a:schemeClr val="tx1"/>
+                </a:fontRef>
+              </p:style>
+            </p:cxnSp>
+          </p:grpSp>
+          <p:grpSp>
+            <p:nvGrpSpPr>
+              <p:cNvPr id="72" name="グループ化 71">
+                <a:extLst>
+                  <a:ext uri="{FF2B5EF4-FFF2-40B4-BE49-F238E27FC236}">
+                    <a16:creationId xmlns:a16="http://schemas.microsoft.com/office/drawing/2014/main" id="{432BD082-31AC-4BAD-D71B-1C57F396009C}"/>
+                  </a:ext>
+                </a:extLst>
+              </p:cNvPr>
+              <p:cNvGrpSpPr/>
+              <p:nvPr/>
+            </p:nvGrpSpPr>
+            <p:grpSpPr>
+              <a:xfrm>
+                <a:off x="7636868" y="3377881"/>
+                <a:ext cx="177250" cy="49530"/>
+                <a:chOff x="-1104976" y="1403484"/>
+                <a:chExt cx="578542" cy="288032"/>
+              </a:xfrm>
+              <a:grpFill/>
+            </p:grpSpPr>
+            <p:cxnSp>
+              <p:nvCxnSpPr>
+                <p:cNvPr id="102" name="直線コネクタ 101">
+                  <a:extLst>
+                    <a:ext uri="{FF2B5EF4-FFF2-40B4-BE49-F238E27FC236}">
+                      <a16:creationId xmlns:a16="http://schemas.microsoft.com/office/drawing/2014/main" id="{C85CAA0C-7EC0-23AA-05DC-5143C781C931}"/>
+                    </a:ext>
+                  </a:extLst>
+                </p:cNvPr>
+                <p:cNvCxnSpPr>
+                  <a:cxnSpLocks/>
+                </p:cNvCxnSpPr>
+                <p:nvPr/>
+              </p:nvCxnSpPr>
+              <p:spPr>
+                <a:xfrm>
+                  <a:off x="-1104976" y="1403484"/>
+                  <a:ext cx="288032" cy="288032"/>
+                </a:xfrm>
+                <a:prstGeom prst="line">
+                  <a:avLst/>
+                </a:prstGeom>
+                <a:grpFill/>
+                <a:ln w="19050">
+                  <a:solidFill>
+                    <a:srgbClr val="FFFF00"/>
+                  </a:solidFill>
+                </a:ln>
+              </p:spPr>
+              <p:style>
+                <a:lnRef idx="1">
+                  <a:schemeClr val="accent1"/>
+                </a:lnRef>
+                <a:fillRef idx="0">
+                  <a:schemeClr val="accent1"/>
+                </a:fillRef>
+                <a:effectRef idx="0">
+                  <a:schemeClr val="accent1"/>
+                </a:effectRef>
+                <a:fontRef idx="minor">
+                  <a:schemeClr val="tx1"/>
+                </a:fontRef>
+              </p:style>
+            </p:cxnSp>
+            <p:cxnSp>
+              <p:nvCxnSpPr>
+                <p:cNvPr id="103" name="直線コネクタ 102">
+                  <a:extLst>
+                    <a:ext uri="{FF2B5EF4-FFF2-40B4-BE49-F238E27FC236}">
+                      <a16:creationId xmlns:a16="http://schemas.microsoft.com/office/drawing/2014/main" id="{17CC6E7B-EADB-F79E-0E3E-727C8D31D997}"/>
+                    </a:ext>
+                  </a:extLst>
+                </p:cNvPr>
+                <p:cNvCxnSpPr>
+                  <a:cxnSpLocks/>
+                </p:cNvCxnSpPr>
+                <p:nvPr/>
+              </p:nvCxnSpPr>
+              <p:spPr>
+                <a:xfrm flipH="1">
+                  <a:off x="-814434" y="1403516"/>
+                  <a:ext cx="288000" cy="288000"/>
+                </a:xfrm>
+                <a:prstGeom prst="line">
+                  <a:avLst/>
+                </a:prstGeom>
+                <a:grpFill/>
+                <a:ln w="19050">
+                  <a:solidFill>
+                    <a:srgbClr val="FFFF00"/>
+                  </a:solidFill>
+                </a:ln>
+              </p:spPr>
+              <p:style>
+                <a:lnRef idx="1">
+                  <a:schemeClr val="accent1"/>
+                </a:lnRef>
+                <a:fillRef idx="0">
+                  <a:schemeClr val="accent1"/>
+                </a:fillRef>
+                <a:effectRef idx="0">
+                  <a:schemeClr val="accent1"/>
+                </a:effectRef>
+                <a:fontRef idx="minor">
+                  <a:schemeClr val="tx1"/>
+                </a:fontRef>
+              </p:style>
+            </p:cxnSp>
+          </p:grpSp>
+          <p:grpSp>
+            <p:nvGrpSpPr>
+              <p:cNvPr id="73" name="グループ化 72">
+                <a:extLst>
+                  <a:ext uri="{FF2B5EF4-FFF2-40B4-BE49-F238E27FC236}">
+                    <a16:creationId xmlns:a16="http://schemas.microsoft.com/office/drawing/2014/main" id="{0EB36650-84BF-29D8-7D55-046A8F2134AF}"/>
+                  </a:ext>
+                </a:extLst>
+              </p:cNvPr>
+              <p:cNvGrpSpPr/>
+              <p:nvPr/>
+            </p:nvGrpSpPr>
+            <p:grpSpPr>
+              <a:xfrm>
+                <a:off x="7813693" y="3377881"/>
+                <a:ext cx="177250" cy="49530"/>
+                <a:chOff x="-1104976" y="1403484"/>
+                <a:chExt cx="578542" cy="288032"/>
+              </a:xfrm>
+              <a:grpFill/>
+            </p:grpSpPr>
+            <p:cxnSp>
+              <p:nvCxnSpPr>
+                <p:cNvPr id="100" name="直線コネクタ 99">
+                  <a:extLst>
+                    <a:ext uri="{FF2B5EF4-FFF2-40B4-BE49-F238E27FC236}">
+                      <a16:creationId xmlns:a16="http://schemas.microsoft.com/office/drawing/2014/main" id="{F26A6377-CC6B-6EFF-C876-ED573FF70F4A}"/>
+                    </a:ext>
+                  </a:extLst>
+                </p:cNvPr>
+                <p:cNvCxnSpPr>
+                  <a:cxnSpLocks/>
+                </p:cNvCxnSpPr>
+                <p:nvPr/>
+              </p:nvCxnSpPr>
+              <p:spPr>
+                <a:xfrm>
+                  <a:off x="-1104976" y="1403484"/>
+                  <a:ext cx="288032" cy="288032"/>
+                </a:xfrm>
+                <a:prstGeom prst="line">
+                  <a:avLst/>
+                </a:prstGeom>
+                <a:grpFill/>
+                <a:ln w="19050">
+                  <a:solidFill>
+                    <a:srgbClr val="FFFF00"/>
+                  </a:solidFill>
+                </a:ln>
+              </p:spPr>
+              <p:style>
+                <a:lnRef idx="1">
+                  <a:schemeClr val="accent1"/>
+                </a:lnRef>
+                <a:fillRef idx="0">
+                  <a:schemeClr val="accent1"/>
+                </a:fillRef>
+                <a:effectRef idx="0">
+                  <a:schemeClr val="accent1"/>
+                </a:effectRef>
+                <a:fontRef idx="minor">
+                  <a:schemeClr val="tx1"/>
+                </a:fontRef>
+              </p:style>
+            </p:cxnSp>
+            <p:cxnSp>
+              <p:nvCxnSpPr>
+                <p:cNvPr id="101" name="直線コネクタ 100">
+                  <a:extLst>
+                    <a:ext uri="{FF2B5EF4-FFF2-40B4-BE49-F238E27FC236}">
+                      <a16:creationId xmlns:a16="http://schemas.microsoft.com/office/drawing/2014/main" id="{FE6101AF-429C-DE8A-653D-0A10AEDFDB81}"/>
+                    </a:ext>
+                  </a:extLst>
+                </p:cNvPr>
+                <p:cNvCxnSpPr>
+                  <a:cxnSpLocks/>
+                </p:cNvCxnSpPr>
+                <p:nvPr/>
+              </p:nvCxnSpPr>
+              <p:spPr>
+                <a:xfrm flipH="1">
+                  <a:off x="-814434" y="1403516"/>
+                  <a:ext cx="288000" cy="288000"/>
+                </a:xfrm>
+                <a:prstGeom prst="line">
+                  <a:avLst/>
+                </a:prstGeom>
+                <a:grpFill/>
+                <a:ln w="19050">
+                  <a:solidFill>
+                    <a:srgbClr val="FFFF00"/>
+                  </a:solidFill>
+                </a:ln>
+              </p:spPr>
+              <p:style>
+                <a:lnRef idx="1">
+                  <a:schemeClr val="accent1"/>
+                </a:lnRef>
+                <a:fillRef idx="0">
+                  <a:schemeClr val="accent1"/>
+                </a:fillRef>
+                <a:effectRef idx="0">
+                  <a:schemeClr val="accent1"/>
+                </a:effectRef>
+                <a:fontRef idx="minor">
+                  <a:schemeClr val="tx1"/>
+                </a:fontRef>
+              </p:style>
+            </p:cxnSp>
+          </p:grpSp>
+          <p:grpSp>
+            <p:nvGrpSpPr>
+              <p:cNvPr id="74" name="グループ化 73">
+                <a:extLst>
+                  <a:ext uri="{FF2B5EF4-FFF2-40B4-BE49-F238E27FC236}">
+                    <a16:creationId xmlns:a16="http://schemas.microsoft.com/office/drawing/2014/main" id="{624AA7E4-E072-6E13-B67A-055D2DAA9A1D}"/>
+                  </a:ext>
+                </a:extLst>
+              </p:cNvPr>
+              <p:cNvGrpSpPr/>
+              <p:nvPr/>
+            </p:nvGrpSpPr>
+            <p:grpSpPr>
+              <a:xfrm>
+                <a:off x="7990517" y="3377881"/>
+                <a:ext cx="177250" cy="49530"/>
+                <a:chOff x="-1104976" y="1403484"/>
+                <a:chExt cx="578542" cy="288032"/>
+              </a:xfrm>
+              <a:grpFill/>
+            </p:grpSpPr>
+            <p:cxnSp>
+              <p:nvCxnSpPr>
+                <p:cNvPr id="98" name="直線コネクタ 97">
+                  <a:extLst>
+                    <a:ext uri="{FF2B5EF4-FFF2-40B4-BE49-F238E27FC236}">
+                      <a16:creationId xmlns:a16="http://schemas.microsoft.com/office/drawing/2014/main" id="{447607B2-1D66-822E-956F-95AB4417B2F8}"/>
+                    </a:ext>
+                  </a:extLst>
+                </p:cNvPr>
+                <p:cNvCxnSpPr>
+                  <a:cxnSpLocks/>
+                </p:cNvCxnSpPr>
+                <p:nvPr/>
+              </p:nvCxnSpPr>
+              <p:spPr>
+                <a:xfrm>
+                  <a:off x="-1104976" y="1403484"/>
+                  <a:ext cx="288032" cy="288032"/>
+                </a:xfrm>
+                <a:prstGeom prst="line">
+                  <a:avLst/>
+                </a:prstGeom>
+                <a:grpFill/>
+                <a:ln w="19050">
+                  <a:solidFill>
+                    <a:srgbClr val="FFFF00"/>
+                  </a:solidFill>
+                </a:ln>
+              </p:spPr>
+              <p:style>
+                <a:lnRef idx="1">
+                  <a:schemeClr val="accent1"/>
+                </a:lnRef>
+                <a:fillRef idx="0">
+                  <a:schemeClr val="accent1"/>
+                </a:fillRef>
+                <a:effectRef idx="0">
+                  <a:schemeClr val="accent1"/>
+                </a:effectRef>
+                <a:fontRef idx="minor">
+                  <a:schemeClr val="tx1"/>
+                </a:fontRef>
+              </p:style>
+            </p:cxnSp>
+            <p:cxnSp>
+              <p:nvCxnSpPr>
+                <p:cNvPr id="99" name="直線コネクタ 98">
+                  <a:extLst>
+                    <a:ext uri="{FF2B5EF4-FFF2-40B4-BE49-F238E27FC236}">
+                      <a16:creationId xmlns:a16="http://schemas.microsoft.com/office/drawing/2014/main" id="{E0FC4653-7753-C25D-F040-FFC80AB9C016}"/>
+                    </a:ext>
+                  </a:extLst>
+                </p:cNvPr>
+                <p:cNvCxnSpPr>
+                  <a:cxnSpLocks/>
+                </p:cNvCxnSpPr>
+                <p:nvPr/>
+              </p:nvCxnSpPr>
+              <p:spPr>
+                <a:xfrm flipH="1">
+                  <a:off x="-814434" y="1403516"/>
+                  <a:ext cx="288000" cy="288000"/>
+                </a:xfrm>
+                <a:prstGeom prst="line">
+                  <a:avLst/>
+                </a:prstGeom>
+                <a:grpFill/>
+                <a:ln w="19050">
+                  <a:solidFill>
+                    <a:srgbClr val="FFFF00"/>
+                  </a:solidFill>
+                </a:ln>
+              </p:spPr>
+              <p:style>
+                <a:lnRef idx="1">
+                  <a:schemeClr val="accent1"/>
+                </a:lnRef>
+                <a:fillRef idx="0">
+                  <a:schemeClr val="accent1"/>
+                </a:fillRef>
+                <a:effectRef idx="0">
+                  <a:schemeClr val="accent1"/>
+                </a:effectRef>
+                <a:fontRef idx="minor">
+                  <a:schemeClr val="tx1"/>
+                </a:fontRef>
+              </p:style>
+            </p:cxnSp>
+          </p:grpSp>
+          <p:grpSp>
+            <p:nvGrpSpPr>
+              <p:cNvPr id="75" name="グループ化 74">
+                <a:extLst>
+                  <a:ext uri="{FF2B5EF4-FFF2-40B4-BE49-F238E27FC236}">
+                    <a16:creationId xmlns:a16="http://schemas.microsoft.com/office/drawing/2014/main" id="{D3AA023E-90F4-81CC-BD0F-FC9B681D3427}"/>
+                  </a:ext>
+                </a:extLst>
+              </p:cNvPr>
+              <p:cNvGrpSpPr/>
+              <p:nvPr/>
+            </p:nvGrpSpPr>
+            <p:grpSpPr>
+              <a:xfrm>
+                <a:off x="8167342" y="3377881"/>
+                <a:ext cx="177250" cy="49530"/>
+                <a:chOff x="-1104976" y="1403484"/>
+                <a:chExt cx="578542" cy="288032"/>
+              </a:xfrm>
+              <a:grpFill/>
+            </p:grpSpPr>
+            <p:cxnSp>
+              <p:nvCxnSpPr>
+                <p:cNvPr id="96" name="直線コネクタ 95">
+                  <a:extLst>
+                    <a:ext uri="{FF2B5EF4-FFF2-40B4-BE49-F238E27FC236}">
+                      <a16:creationId xmlns:a16="http://schemas.microsoft.com/office/drawing/2014/main" id="{184F539D-5278-9F10-60E5-6FECE26A2EC8}"/>
+                    </a:ext>
+                  </a:extLst>
+                </p:cNvPr>
+                <p:cNvCxnSpPr>
+                  <a:cxnSpLocks/>
+                </p:cNvCxnSpPr>
+                <p:nvPr/>
+              </p:nvCxnSpPr>
+              <p:spPr>
+                <a:xfrm>
+                  <a:off x="-1104976" y="1403484"/>
+                  <a:ext cx="288032" cy="288032"/>
+                </a:xfrm>
+                <a:prstGeom prst="line">
+                  <a:avLst/>
+                </a:prstGeom>
+                <a:grpFill/>
+                <a:ln w="19050">
+                  <a:solidFill>
+                    <a:srgbClr val="FFFF00"/>
+                  </a:solidFill>
+                </a:ln>
+              </p:spPr>
+              <p:style>
+                <a:lnRef idx="1">
+                  <a:schemeClr val="accent1"/>
+                </a:lnRef>
+                <a:fillRef idx="0">
+                  <a:schemeClr val="accent1"/>
+                </a:fillRef>
+                <a:effectRef idx="0">
+                  <a:schemeClr val="accent1"/>
+                </a:effectRef>
+                <a:fontRef idx="minor">
+                  <a:schemeClr val="tx1"/>
+                </a:fontRef>
+              </p:style>
+            </p:cxnSp>
+            <p:cxnSp>
+              <p:nvCxnSpPr>
+                <p:cNvPr id="97" name="直線コネクタ 96">
+                  <a:extLst>
+                    <a:ext uri="{FF2B5EF4-FFF2-40B4-BE49-F238E27FC236}">
+                      <a16:creationId xmlns:a16="http://schemas.microsoft.com/office/drawing/2014/main" id="{C3AC86DC-48D1-476D-60D1-98BB5DA07396}"/>
+                    </a:ext>
+                  </a:extLst>
+                </p:cNvPr>
+                <p:cNvCxnSpPr>
+                  <a:cxnSpLocks/>
+                </p:cNvCxnSpPr>
+                <p:nvPr/>
+              </p:nvCxnSpPr>
+              <p:spPr>
+                <a:xfrm flipH="1">
+                  <a:off x="-814434" y="1403516"/>
+                  <a:ext cx="288000" cy="288000"/>
+                </a:xfrm>
+                <a:prstGeom prst="line">
+                  <a:avLst/>
+                </a:prstGeom>
+                <a:grpFill/>
+                <a:ln w="19050">
+                  <a:solidFill>
+                    <a:srgbClr val="FFFF00"/>
+                  </a:solidFill>
+                </a:ln>
+              </p:spPr>
+              <p:style>
+                <a:lnRef idx="1">
+                  <a:schemeClr val="accent1"/>
+                </a:lnRef>
+                <a:fillRef idx="0">
+                  <a:schemeClr val="accent1"/>
+                </a:fillRef>
+                <a:effectRef idx="0">
+                  <a:schemeClr val="accent1"/>
+                </a:effectRef>
+                <a:fontRef idx="minor">
+                  <a:schemeClr val="tx1"/>
+                </a:fontRef>
+              </p:style>
+            </p:cxnSp>
+          </p:grpSp>
+          <p:grpSp>
+            <p:nvGrpSpPr>
+              <p:cNvPr id="76" name="グループ化 75">
+                <a:extLst>
+                  <a:ext uri="{FF2B5EF4-FFF2-40B4-BE49-F238E27FC236}">
+                    <a16:creationId xmlns:a16="http://schemas.microsoft.com/office/drawing/2014/main" id="{C89AEB28-4D8C-CBAF-F3EC-EFAF4F61CF8B}"/>
+                  </a:ext>
+                </a:extLst>
+              </p:cNvPr>
+              <p:cNvGrpSpPr/>
+              <p:nvPr/>
+            </p:nvGrpSpPr>
+            <p:grpSpPr>
+              <a:xfrm>
+                <a:off x="8344167" y="3377881"/>
+                <a:ext cx="177250" cy="49530"/>
+                <a:chOff x="-1104976" y="1403484"/>
+                <a:chExt cx="578542" cy="288032"/>
+              </a:xfrm>
+              <a:grpFill/>
+            </p:grpSpPr>
+            <p:cxnSp>
+              <p:nvCxnSpPr>
+                <p:cNvPr id="94" name="直線コネクタ 93">
+                  <a:extLst>
+                    <a:ext uri="{FF2B5EF4-FFF2-40B4-BE49-F238E27FC236}">
+                      <a16:creationId xmlns:a16="http://schemas.microsoft.com/office/drawing/2014/main" id="{7C80ED46-1D3D-7463-F63D-8329A61717DA}"/>
+                    </a:ext>
+                  </a:extLst>
+                </p:cNvPr>
+                <p:cNvCxnSpPr>
+                  <a:cxnSpLocks/>
+                </p:cNvCxnSpPr>
+                <p:nvPr/>
+              </p:nvCxnSpPr>
+              <p:spPr>
+                <a:xfrm>
+                  <a:off x="-1104976" y="1403484"/>
+                  <a:ext cx="288032" cy="288032"/>
+                </a:xfrm>
+                <a:prstGeom prst="line">
+                  <a:avLst/>
+                </a:prstGeom>
+                <a:grpFill/>
+                <a:ln w="19050">
+                  <a:solidFill>
+                    <a:srgbClr val="FFFF00"/>
+                  </a:solidFill>
+                </a:ln>
+              </p:spPr>
+              <p:style>
+                <a:lnRef idx="1">
+                  <a:schemeClr val="accent1"/>
+                </a:lnRef>
+                <a:fillRef idx="0">
+                  <a:schemeClr val="accent1"/>
+                </a:fillRef>
+                <a:effectRef idx="0">
+                  <a:schemeClr val="accent1"/>
+                </a:effectRef>
+                <a:fontRef idx="minor">
+                  <a:schemeClr val="tx1"/>
+                </a:fontRef>
+              </p:style>
+            </p:cxnSp>
+            <p:cxnSp>
+              <p:nvCxnSpPr>
+                <p:cNvPr id="95" name="直線コネクタ 94">
+                  <a:extLst>
+                    <a:ext uri="{FF2B5EF4-FFF2-40B4-BE49-F238E27FC236}">
+                      <a16:creationId xmlns:a16="http://schemas.microsoft.com/office/drawing/2014/main" id="{68FE91B0-E0C4-5283-7EC2-C28A3AC7FB81}"/>
+                    </a:ext>
+                  </a:extLst>
+                </p:cNvPr>
+                <p:cNvCxnSpPr>
+                  <a:cxnSpLocks/>
+                </p:cNvCxnSpPr>
+                <p:nvPr/>
+              </p:nvCxnSpPr>
+              <p:spPr>
+                <a:xfrm flipH="1">
+                  <a:off x="-814434" y="1403516"/>
+                  <a:ext cx="288000" cy="288000"/>
+                </a:xfrm>
+                <a:prstGeom prst="line">
+                  <a:avLst/>
+                </a:prstGeom>
+                <a:grpFill/>
+                <a:ln w="19050">
+                  <a:solidFill>
+                    <a:srgbClr val="FFFF00"/>
+                  </a:solidFill>
+                </a:ln>
+              </p:spPr>
+              <p:style>
+                <a:lnRef idx="1">
+                  <a:schemeClr val="accent1"/>
+                </a:lnRef>
+                <a:fillRef idx="0">
+                  <a:schemeClr val="accent1"/>
+                </a:fillRef>
+                <a:effectRef idx="0">
+                  <a:schemeClr val="accent1"/>
+                </a:effectRef>
+                <a:fontRef idx="minor">
+                  <a:schemeClr val="tx1"/>
+                </a:fontRef>
+              </p:style>
+            </p:cxnSp>
+          </p:grpSp>
+          <p:grpSp>
+            <p:nvGrpSpPr>
+              <p:cNvPr id="77" name="グループ化 76">
+                <a:extLst>
+                  <a:ext uri="{FF2B5EF4-FFF2-40B4-BE49-F238E27FC236}">
+                    <a16:creationId xmlns:a16="http://schemas.microsoft.com/office/drawing/2014/main" id="{94696B4C-B7F4-A33F-4E3B-CD74EECC4D59}"/>
+                  </a:ext>
+                </a:extLst>
+              </p:cNvPr>
+              <p:cNvGrpSpPr/>
+              <p:nvPr/>
+            </p:nvGrpSpPr>
+            <p:grpSpPr>
+              <a:xfrm>
+                <a:off x="8520991" y="3377881"/>
+                <a:ext cx="177250" cy="49530"/>
+                <a:chOff x="-1104976" y="1403484"/>
+                <a:chExt cx="578542" cy="288032"/>
+              </a:xfrm>
+              <a:grpFill/>
+            </p:grpSpPr>
+            <p:cxnSp>
+              <p:nvCxnSpPr>
+                <p:cNvPr id="92" name="直線コネクタ 91">
+                  <a:extLst>
+                    <a:ext uri="{FF2B5EF4-FFF2-40B4-BE49-F238E27FC236}">
+                      <a16:creationId xmlns:a16="http://schemas.microsoft.com/office/drawing/2014/main" id="{C5678D79-95FF-D229-62F6-D1603A16A60E}"/>
+                    </a:ext>
+                  </a:extLst>
+                </p:cNvPr>
+                <p:cNvCxnSpPr>
+                  <a:cxnSpLocks/>
+                </p:cNvCxnSpPr>
+                <p:nvPr/>
+              </p:nvCxnSpPr>
+              <p:spPr>
+                <a:xfrm>
+                  <a:off x="-1104976" y="1403484"/>
+                  <a:ext cx="288032" cy="288032"/>
+                </a:xfrm>
+                <a:prstGeom prst="line">
+                  <a:avLst/>
+                </a:prstGeom>
+                <a:grpFill/>
+                <a:ln w="19050">
+                  <a:solidFill>
+                    <a:srgbClr val="FFFF00"/>
+                  </a:solidFill>
+                </a:ln>
+              </p:spPr>
+              <p:style>
+                <a:lnRef idx="1">
+                  <a:schemeClr val="accent1"/>
+                </a:lnRef>
+                <a:fillRef idx="0">
+                  <a:schemeClr val="accent1"/>
+                </a:fillRef>
+                <a:effectRef idx="0">
+                  <a:schemeClr val="accent1"/>
+                </a:effectRef>
+                <a:fontRef idx="minor">
+                  <a:schemeClr val="tx1"/>
+                </a:fontRef>
+              </p:style>
+            </p:cxnSp>
+            <p:cxnSp>
+              <p:nvCxnSpPr>
+                <p:cNvPr id="93" name="直線コネクタ 92">
+                  <a:extLst>
+                    <a:ext uri="{FF2B5EF4-FFF2-40B4-BE49-F238E27FC236}">
+                      <a16:creationId xmlns:a16="http://schemas.microsoft.com/office/drawing/2014/main" id="{BEB04FA5-915E-8007-334D-9C068E4AACEA}"/>
+                    </a:ext>
+                  </a:extLst>
+                </p:cNvPr>
+                <p:cNvCxnSpPr>
+                  <a:cxnSpLocks/>
+                </p:cNvCxnSpPr>
+                <p:nvPr/>
+              </p:nvCxnSpPr>
+              <p:spPr>
+                <a:xfrm flipH="1">
+                  <a:off x="-814434" y="1403516"/>
+                  <a:ext cx="288000" cy="288000"/>
+                </a:xfrm>
+                <a:prstGeom prst="line">
+                  <a:avLst/>
+                </a:prstGeom>
+                <a:grpFill/>
+                <a:ln w="19050">
+                  <a:solidFill>
+                    <a:srgbClr val="FFFF00"/>
+                  </a:solidFill>
+                </a:ln>
+              </p:spPr>
+              <p:style>
+                <a:lnRef idx="1">
+                  <a:schemeClr val="accent1"/>
+                </a:lnRef>
+                <a:fillRef idx="0">
+                  <a:schemeClr val="accent1"/>
+                </a:fillRef>
+                <a:effectRef idx="0">
+                  <a:schemeClr val="accent1"/>
+                </a:effectRef>
+                <a:fontRef idx="minor">
+                  <a:schemeClr val="tx1"/>
+                </a:fontRef>
+              </p:style>
+            </p:cxnSp>
+          </p:grpSp>
+          <p:grpSp>
+            <p:nvGrpSpPr>
+              <p:cNvPr id="78" name="グループ化 77">
+                <a:extLst>
+                  <a:ext uri="{FF2B5EF4-FFF2-40B4-BE49-F238E27FC236}">
+                    <a16:creationId xmlns:a16="http://schemas.microsoft.com/office/drawing/2014/main" id="{6269776A-5389-3339-DC93-6165D165AA9C}"/>
+                  </a:ext>
+                </a:extLst>
+              </p:cNvPr>
+              <p:cNvGrpSpPr/>
+              <p:nvPr/>
+            </p:nvGrpSpPr>
+            <p:grpSpPr>
+              <a:xfrm>
+                <a:off x="8697816" y="3377881"/>
+                <a:ext cx="177250" cy="49530"/>
+                <a:chOff x="-1104976" y="1403484"/>
+                <a:chExt cx="578542" cy="288032"/>
+              </a:xfrm>
+              <a:grpFill/>
+            </p:grpSpPr>
+            <p:cxnSp>
+              <p:nvCxnSpPr>
+                <p:cNvPr id="90" name="直線コネクタ 89">
+                  <a:extLst>
+                    <a:ext uri="{FF2B5EF4-FFF2-40B4-BE49-F238E27FC236}">
+                      <a16:creationId xmlns:a16="http://schemas.microsoft.com/office/drawing/2014/main" id="{08684FCF-7B77-B049-C564-B470FA2FE119}"/>
+                    </a:ext>
+                  </a:extLst>
+                </p:cNvPr>
+                <p:cNvCxnSpPr>
+                  <a:cxnSpLocks/>
+                </p:cNvCxnSpPr>
+                <p:nvPr/>
+              </p:nvCxnSpPr>
+              <p:spPr>
+                <a:xfrm>
+                  <a:off x="-1104976" y="1403484"/>
+                  <a:ext cx="288032" cy="288032"/>
+                </a:xfrm>
+                <a:prstGeom prst="line">
+                  <a:avLst/>
+                </a:prstGeom>
+                <a:grpFill/>
+                <a:ln w="19050">
+                  <a:solidFill>
+                    <a:srgbClr val="FFFF00"/>
+                  </a:solidFill>
+                </a:ln>
+              </p:spPr>
+              <p:style>
+                <a:lnRef idx="1">
+                  <a:schemeClr val="accent1"/>
+                </a:lnRef>
+                <a:fillRef idx="0">
+                  <a:schemeClr val="accent1"/>
+                </a:fillRef>
+                <a:effectRef idx="0">
+                  <a:schemeClr val="accent1"/>
+                </a:effectRef>
+                <a:fontRef idx="minor">
+                  <a:schemeClr val="tx1"/>
+                </a:fontRef>
+              </p:style>
+            </p:cxnSp>
+            <p:cxnSp>
+              <p:nvCxnSpPr>
+                <p:cNvPr id="91" name="直線コネクタ 90">
+                  <a:extLst>
+                    <a:ext uri="{FF2B5EF4-FFF2-40B4-BE49-F238E27FC236}">
+                      <a16:creationId xmlns:a16="http://schemas.microsoft.com/office/drawing/2014/main" id="{0C6555E7-41C8-D501-F270-A1BEFAB0177E}"/>
+                    </a:ext>
+                  </a:extLst>
+                </p:cNvPr>
+                <p:cNvCxnSpPr>
+                  <a:cxnSpLocks/>
+                </p:cNvCxnSpPr>
+                <p:nvPr/>
+              </p:nvCxnSpPr>
+              <p:spPr>
+                <a:xfrm flipH="1">
+                  <a:off x="-814434" y="1403516"/>
+                  <a:ext cx="288000" cy="288000"/>
+                </a:xfrm>
+                <a:prstGeom prst="line">
+                  <a:avLst/>
+                </a:prstGeom>
+                <a:grpFill/>
+                <a:ln w="19050">
+                  <a:solidFill>
+                    <a:srgbClr val="FFFF00"/>
+                  </a:solidFill>
+                </a:ln>
+              </p:spPr>
+              <p:style>
+                <a:lnRef idx="1">
+                  <a:schemeClr val="accent1"/>
+                </a:lnRef>
+                <a:fillRef idx="0">
+                  <a:schemeClr val="accent1"/>
+                </a:fillRef>
+                <a:effectRef idx="0">
+                  <a:schemeClr val="accent1"/>
+                </a:effectRef>
+                <a:fontRef idx="minor">
+                  <a:schemeClr val="tx1"/>
+                </a:fontRef>
+              </p:style>
+            </p:cxnSp>
+          </p:grpSp>
+          <p:grpSp>
+            <p:nvGrpSpPr>
+              <p:cNvPr id="79" name="グループ化 78">
+                <a:extLst>
+                  <a:ext uri="{FF2B5EF4-FFF2-40B4-BE49-F238E27FC236}">
+                    <a16:creationId xmlns:a16="http://schemas.microsoft.com/office/drawing/2014/main" id="{35FD20EC-758C-1E8B-E23C-BC194A43E6A9}"/>
+                  </a:ext>
+                </a:extLst>
+              </p:cNvPr>
+              <p:cNvGrpSpPr/>
+              <p:nvPr/>
+            </p:nvGrpSpPr>
+            <p:grpSpPr>
+              <a:xfrm>
+                <a:off x="8874641" y="3377881"/>
+                <a:ext cx="177250" cy="49530"/>
+                <a:chOff x="-1104976" y="1403484"/>
+                <a:chExt cx="578542" cy="288032"/>
+              </a:xfrm>
+              <a:grpFill/>
+            </p:grpSpPr>
+            <p:cxnSp>
+              <p:nvCxnSpPr>
+                <p:cNvPr id="88" name="直線コネクタ 87">
+                  <a:extLst>
+                    <a:ext uri="{FF2B5EF4-FFF2-40B4-BE49-F238E27FC236}">
+                      <a16:creationId xmlns:a16="http://schemas.microsoft.com/office/drawing/2014/main" id="{33CA9789-2A42-7D2C-9787-0015B649DE3F}"/>
+                    </a:ext>
+                  </a:extLst>
+                </p:cNvPr>
+                <p:cNvCxnSpPr>
+                  <a:cxnSpLocks/>
+                </p:cNvCxnSpPr>
+                <p:nvPr/>
+              </p:nvCxnSpPr>
+              <p:spPr>
+                <a:xfrm>
+                  <a:off x="-1104976" y="1403484"/>
+                  <a:ext cx="288032" cy="288032"/>
+                </a:xfrm>
+                <a:prstGeom prst="line">
+                  <a:avLst/>
+                </a:prstGeom>
+                <a:grpFill/>
+                <a:ln w="19050">
+                  <a:solidFill>
+                    <a:srgbClr val="FFFF00"/>
+                  </a:solidFill>
+                </a:ln>
+              </p:spPr>
+              <p:style>
+                <a:lnRef idx="1">
+                  <a:schemeClr val="accent1"/>
+                </a:lnRef>
+                <a:fillRef idx="0">
+                  <a:schemeClr val="accent1"/>
+                </a:fillRef>
+                <a:effectRef idx="0">
+                  <a:schemeClr val="accent1"/>
+                </a:effectRef>
+                <a:fontRef idx="minor">
+                  <a:schemeClr val="tx1"/>
+                </a:fontRef>
+              </p:style>
+            </p:cxnSp>
+            <p:cxnSp>
+              <p:nvCxnSpPr>
+                <p:cNvPr id="89" name="直線コネクタ 88">
+                  <a:extLst>
+                    <a:ext uri="{FF2B5EF4-FFF2-40B4-BE49-F238E27FC236}">
+                      <a16:creationId xmlns:a16="http://schemas.microsoft.com/office/drawing/2014/main" id="{244D048A-531D-730B-10EF-A14503D77FD5}"/>
+                    </a:ext>
+                  </a:extLst>
+                </p:cNvPr>
+                <p:cNvCxnSpPr>
+                  <a:cxnSpLocks/>
+                </p:cNvCxnSpPr>
+                <p:nvPr/>
+              </p:nvCxnSpPr>
+              <p:spPr>
+                <a:xfrm flipH="1">
+                  <a:off x="-814434" y="1403516"/>
+                  <a:ext cx="288000" cy="288000"/>
+                </a:xfrm>
+                <a:prstGeom prst="line">
+                  <a:avLst/>
+                </a:prstGeom>
+                <a:grpFill/>
+                <a:ln w="19050">
+                  <a:solidFill>
+                    <a:srgbClr val="FFFF00"/>
+                  </a:solidFill>
+                </a:ln>
+              </p:spPr>
+              <p:style>
+                <a:lnRef idx="1">
+                  <a:schemeClr val="accent1"/>
+                </a:lnRef>
+                <a:fillRef idx="0">
+                  <a:schemeClr val="accent1"/>
+                </a:fillRef>
+                <a:effectRef idx="0">
+                  <a:schemeClr val="accent1"/>
+                </a:effectRef>
+                <a:fontRef idx="minor">
+                  <a:schemeClr val="tx1"/>
+                </a:fontRef>
+              </p:style>
+            </p:cxnSp>
+          </p:grpSp>
+          <p:grpSp>
+            <p:nvGrpSpPr>
+              <p:cNvPr id="80" name="グループ化 79">
+                <a:extLst>
+                  <a:ext uri="{FF2B5EF4-FFF2-40B4-BE49-F238E27FC236}">
+                    <a16:creationId xmlns:a16="http://schemas.microsoft.com/office/drawing/2014/main" id="{46D71541-C311-E3F4-EC1F-3C27B97C71FA}"/>
+                  </a:ext>
+                </a:extLst>
+              </p:cNvPr>
+              <p:cNvGrpSpPr/>
+              <p:nvPr/>
+            </p:nvGrpSpPr>
+            <p:grpSpPr>
+              <a:xfrm>
+                <a:off x="9051465" y="3377881"/>
+                <a:ext cx="177250" cy="49530"/>
+                <a:chOff x="-1104976" y="1403484"/>
+                <a:chExt cx="578542" cy="288032"/>
+              </a:xfrm>
+              <a:grpFill/>
+            </p:grpSpPr>
+            <p:cxnSp>
+              <p:nvCxnSpPr>
+                <p:cNvPr id="86" name="直線コネクタ 85">
+                  <a:extLst>
+                    <a:ext uri="{FF2B5EF4-FFF2-40B4-BE49-F238E27FC236}">
+                      <a16:creationId xmlns:a16="http://schemas.microsoft.com/office/drawing/2014/main" id="{6E7C6A48-AC96-BBFF-1D9C-E48B1D4F210E}"/>
+                    </a:ext>
+                  </a:extLst>
+                </p:cNvPr>
+                <p:cNvCxnSpPr>
+                  <a:cxnSpLocks/>
+                </p:cNvCxnSpPr>
+                <p:nvPr/>
+              </p:nvCxnSpPr>
+              <p:spPr>
+                <a:xfrm>
+                  <a:off x="-1104976" y="1403484"/>
+                  <a:ext cx="288032" cy="288032"/>
+                </a:xfrm>
+                <a:prstGeom prst="line">
+                  <a:avLst/>
+                </a:prstGeom>
+                <a:grpFill/>
+                <a:ln w="19050">
+                  <a:solidFill>
+                    <a:srgbClr val="FFFF00"/>
+                  </a:solidFill>
+                </a:ln>
+              </p:spPr>
+              <p:style>
+                <a:lnRef idx="1">
+                  <a:schemeClr val="accent1"/>
+                </a:lnRef>
+                <a:fillRef idx="0">
+                  <a:schemeClr val="accent1"/>
+                </a:fillRef>
+                <a:effectRef idx="0">
+                  <a:schemeClr val="accent1"/>
+                </a:effectRef>
+                <a:fontRef idx="minor">
+                  <a:schemeClr val="tx1"/>
+                </a:fontRef>
+              </p:style>
+            </p:cxnSp>
+            <p:cxnSp>
+              <p:nvCxnSpPr>
+                <p:cNvPr id="87" name="直線コネクタ 86">
+                  <a:extLst>
+                    <a:ext uri="{FF2B5EF4-FFF2-40B4-BE49-F238E27FC236}">
+                      <a16:creationId xmlns:a16="http://schemas.microsoft.com/office/drawing/2014/main" id="{63E8FDBD-CF65-A11E-626A-1968A91A0DD5}"/>
+                    </a:ext>
+                  </a:extLst>
+                </p:cNvPr>
+                <p:cNvCxnSpPr>
+                  <a:cxnSpLocks/>
+                </p:cNvCxnSpPr>
+                <p:nvPr/>
+              </p:nvCxnSpPr>
+              <p:spPr>
+                <a:xfrm flipH="1">
+                  <a:off x="-814434" y="1403516"/>
+                  <a:ext cx="288000" cy="288000"/>
+                </a:xfrm>
+                <a:prstGeom prst="line">
+                  <a:avLst/>
+                </a:prstGeom>
+                <a:grpFill/>
+                <a:ln w="19050">
+                  <a:solidFill>
+                    <a:srgbClr val="FFFF00"/>
+                  </a:solidFill>
+                </a:ln>
+              </p:spPr>
+              <p:style>
+                <a:lnRef idx="1">
+                  <a:schemeClr val="accent1"/>
+                </a:lnRef>
+                <a:fillRef idx="0">
+                  <a:schemeClr val="accent1"/>
+                </a:fillRef>
+                <a:effectRef idx="0">
+                  <a:schemeClr val="accent1"/>
+                </a:effectRef>
+                <a:fontRef idx="minor">
+                  <a:schemeClr val="tx1"/>
+                </a:fontRef>
+              </p:style>
+            </p:cxnSp>
+          </p:grpSp>
+          <p:grpSp>
+            <p:nvGrpSpPr>
+              <p:cNvPr id="81" name="グループ化 80">
+                <a:extLst>
+                  <a:ext uri="{FF2B5EF4-FFF2-40B4-BE49-F238E27FC236}">
+                    <a16:creationId xmlns:a16="http://schemas.microsoft.com/office/drawing/2014/main" id="{594AD380-1E9A-2E7D-A8F9-1DEE1004C444}"/>
+                  </a:ext>
+                </a:extLst>
+              </p:cNvPr>
+              <p:cNvGrpSpPr/>
+              <p:nvPr/>
+            </p:nvGrpSpPr>
+            <p:grpSpPr>
+              <a:xfrm>
+                <a:off x="9228290" y="3214633"/>
+                <a:ext cx="468112" cy="212778"/>
+                <a:chOff x="-1104976" y="454146"/>
+                <a:chExt cx="1527910" cy="1237370"/>
+              </a:xfrm>
+              <a:grpFill/>
+            </p:grpSpPr>
+            <p:cxnSp>
+              <p:nvCxnSpPr>
+                <p:cNvPr id="84" name="直線コネクタ 83">
+                  <a:extLst>
+                    <a:ext uri="{FF2B5EF4-FFF2-40B4-BE49-F238E27FC236}">
+                      <a16:creationId xmlns:a16="http://schemas.microsoft.com/office/drawing/2014/main" id="{DD1EC6C2-0B7A-A265-1D2E-FEBE99AB764A}"/>
+                    </a:ext>
+                  </a:extLst>
+                </p:cNvPr>
+                <p:cNvCxnSpPr>
+                  <a:cxnSpLocks/>
+                </p:cNvCxnSpPr>
+                <p:nvPr/>
+              </p:nvCxnSpPr>
+              <p:spPr>
+                <a:xfrm>
+                  <a:off x="-1104976" y="1403484"/>
+                  <a:ext cx="288032" cy="288032"/>
+                </a:xfrm>
+                <a:prstGeom prst="line">
+                  <a:avLst/>
+                </a:prstGeom>
+                <a:grpFill/>
+                <a:ln w="19050">
+                  <a:solidFill>
+                    <a:srgbClr val="FFFF00"/>
+                  </a:solidFill>
+                </a:ln>
+              </p:spPr>
+              <p:style>
+                <a:lnRef idx="1">
+                  <a:schemeClr val="accent1"/>
+                </a:lnRef>
+                <a:fillRef idx="0">
+                  <a:schemeClr val="accent1"/>
+                </a:fillRef>
+                <a:effectRef idx="0">
+                  <a:schemeClr val="accent1"/>
+                </a:effectRef>
+                <a:fontRef idx="minor">
+                  <a:schemeClr val="tx1"/>
+                </a:fontRef>
+              </p:style>
+            </p:cxnSp>
+            <p:cxnSp>
+              <p:nvCxnSpPr>
+                <p:cNvPr id="85" name="直線コネクタ 84">
+                  <a:extLst>
+                    <a:ext uri="{FF2B5EF4-FFF2-40B4-BE49-F238E27FC236}">
+                      <a16:creationId xmlns:a16="http://schemas.microsoft.com/office/drawing/2014/main" id="{CC685E98-E83E-D511-C746-C60408A0B038}"/>
+                    </a:ext>
+                  </a:extLst>
+                </p:cNvPr>
+                <p:cNvCxnSpPr>
+                  <a:cxnSpLocks/>
+                </p:cNvCxnSpPr>
+                <p:nvPr/>
+              </p:nvCxnSpPr>
+              <p:spPr>
+                <a:xfrm flipH="1">
+                  <a:off x="-814435" y="454146"/>
+                  <a:ext cx="1237369" cy="1237370"/>
+                </a:xfrm>
+                <a:prstGeom prst="line">
+                  <a:avLst/>
+                </a:prstGeom>
+                <a:grpFill/>
+                <a:ln w="19050">
+                  <a:solidFill>
+                    <a:srgbClr val="FFFF00"/>
+                  </a:solidFill>
+                </a:ln>
+              </p:spPr>
+              <p:style>
+                <a:lnRef idx="1">
+                  <a:schemeClr val="accent1"/>
+                </a:lnRef>
+                <a:fillRef idx="0">
+                  <a:schemeClr val="accent1"/>
+                </a:fillRef>
+                <a:effectRef idx="0">
+                  <a:schemeClr val="accent1"/>
+                </a:effectRef>
+                <a:fontRef idx="minor">
+                  <a:schemeClr val="tx1"/>
+                </a:fontRef>
+              </p:style>
+            </p:cxnSp>
+          </p:grpSp>
+          <p:sp>
+            <p:nvSpPr>
+              <p:cNvPr id="82" name="二等辺三角形 81">
+                <a:extLst>
+                  <a:ext uri="{FF2B5EF4-FFF2-40B4-BE49-F238E27FC236}">
+                    <a16:creationId xmlns:a16="http://schemas.microsoft.com/office/drawing/2014/main" id="{62982980-716E-EEC0-6B19-8DA29345F83B}"/>
+                  </a:ext>
+                </a:extLst>
+              </p:cNvPr>
+              <p:cNvSpPr/>
+              <p:nvPr/>
+            </p:nvSpPr>
+            <p:spPr>
+              <a:xfrm rot="7744247">
+                <a:off x="7119077" y="3270395"/>
+                <a:ext cx="66285" cy="65936"/>
+              </a:xfrm>
+              <a:prstGeom prst="triangle">
+                <a:avLst/>
+              </a:prstGeom>
+              <a:grpFill/>
+              <a:ln>
+                <a:solidFill>
+                  <a:srgbClr val="FFFF00"/>
+                </a:solidFill>
+              </a:ln>
+              <a:effectLst/>
+            </p:spPr>
+            <p:style>
+              <a:lnRef idx="2">
+                <a:schemeClr val="accent1">
+                  <a:shade val="15000"/>
+                </a:schemeClr>
+              </a:lnRef>
+              <a:fillRef idx="1">
+                <a:schemeClr val="accent1"/>
+              </a:fillRef>
+              <a:effectRef idx="0">
+                <a:schemeClr val="accent1"/>
+              </a:effectRef>
+              <a:fontRef idx="minor">
+                <a:schemeClr val="lt1"/>
+              </a:fontRef>
+            </p:style>
+            <p:txBody>
+              <a:bodyPr rtlCol="0" anchor="ctr"/>
+              <a:lstStyle/>
+              <a:p>
+                <a:pPr algn="ctr"/>
+                <a:endParaRPr kumimoji="1" lang="ja-JP" altLang="en-US" sz="800" dirty="0"/>
+              </a:p>
+            </p:txBody>
+          </p:sp>
+          <p:sp>
+            <p:nvSpPr>
+              <p:cNvPr id="83" name="二等辺三角形 82">
+                <a:extLst>
+                  <a:ext uri="{FF2B5EF4-FFF2-40B4-BE49-F238E27FC236}">
+                    <a16:creationId xmlns:a16="http://schemas.microsoft.com/office/drawing/2014/main" id="{B6359083-6FA7-2075-E505-7E4D47DF5515}"/>
+                  </a:ext>
+                </a:extLst>
+              </p:cNvPr>
+              <p:cNvSpPr/>
+              <p:nvPr/>
+            </p:nvSpPr>
+            <p:spPr>
+              <a:xfrm rot="2972123">
+                <a:off x="9551772" y="3246365"/>
+                <a:ext cx="66285" cy="65936"/>
+              </a:xfrm>
+              <a:prstGeom prst="triangle">
+                <a:avLst/>
+              </a:prstGeom>
+              <a:grpFill/>
+              <a:ln>
+                <a:solidFill>
+                  <a:srgbClr val="FFFF00"/>
+                </a:solidFill>
+              </a:ln>
+              <a:effectLst/>
+            </p:spPr>
+            <p:style>
+              <a:lnRef idx="2">
+                <a:schemeClr val="accent1">
+                  <a:shade val="15000"/>
+                </a:schemeClr>
+              </a:lnRef>
+              <a:fillRef idx="1">
+                <a:schemeClr val="accent1"/>
+              </a:fillRef>
+              <a:effectRef idx="0">
+                <a:schemeClr val="accent1"/>
+              </a:effectRef>
+              <a:fontRef idx="minor">
+                <a:schemeClr val="lt1"/>
+              </a:fontRef>
+            </p:style>
+            <p:txBody>
+              <a:bodyPr rtlCol="0" anchor="ctr"/>
+              <a:lstStyle/>
+              <a:p>
+                <a:pPr algn="ctr"/>
+                <a:endParaRPr kumimoji="1" lang="ja-JP" altLang="en-US" sz="800"/>
+              </a:p>
+            </p:txBody>
+          </p:sp>
+        </p:grpSp>
+        <p:sp>
+          <p:nvSpPr>
+            <p:cNvPr id="68" name="テキスト ボックス 67">
+              <a:extLst>
+                <a:ext uri="{FF2B5EF4-FFF2-40B4-BE49-F238E27FC236}">
+                  <a16:creationId xmlns:a16="http://schemas.microsoft.com/office/drawing/2014/main" id="{28CBEF79-147B-633A-F3CB-3473C004320A}"/>
+                </a:ext>
+              </a:extLst>
+            </p:cNvPr>
+            <p:cNvSpPr txBox="1"/>
+            <p:nvPr/>
+          </p:nvSpPr>
+          <p:spPr>
+            <a:xfrm>
+              <a:off x="0" y="1910742"/>
+              <a:ext cx="885524" cy="372557"/>
+            </a:xfrm>
+            <a:prstGeom prst="rect">
+              <a:avLst/>
+            </a:prstGeom>
+            <a:noFill/>
+          </p:spPr>
+          <p:txBody>
+            <a:bodyPr wrap="square" rtlCol="0">
+              <a:spAutoFit/>
+            </a:bodyPr>
+            <a:lstStyle/>
+            <a:p>
+              <a:r>
+                <a:rPr kumimoji="1" lang="ja-JP" altLang="en-US" sz="800" b="1" dirty="0">
+                  <a:solidFill>
+                    <a:srgbClr val="FFFF00"/>
+                  </a:solidFill>
+                  <a:latin typeface="Arial" panose="020B0604020202020204" pitchFamily="34" charset="0"/>
+                  <a:cs typeface="Arial" panose="020B0604020202020204" pitchFamily="34" charset="0"/>
+                </a:rPr>
+                <a:t>入射光</a:t>
+              </a:r>
+            </a:p>
+          </p:txBody>
+        </p:sp>
+        <p:sp>
+          <p:nvSpPr>
+            <p:cNvPr id="69" name="テキスト ボックス 68">
+              <a:extLst>
+                <a:ext uri="{FF2B5EF4-FFF2-40B4-BE49-F238E27FC236}">
+                  <a16:creationId xmlns:a16="http://schemas.microsoft.com/office/drawing/2014/main" id="{0013E2BF-CF27-79E7-88CE-8BBC299DA28A}"/>
+                </a:ext>
+              </a:extLst>
+            </p:cNvPr>
+            <p:cNvSpPr txBox="1"/>
+            <p:nvPr/>
+          </p:nvSpPr>
+          <p:spPr>
+            <a:xfrm>
+              <a:off x="2712459" y="1910742"/>
+              <a:ext cx="1430115" cy="372557"/>
+            </a:xfrm>
+            <a:prstGeom prst="rect">
+              <a:avLst/>
+            </a:prstGeom>
+            <a:noFill/>
+          </p:spPr>
+          <p:txBody>
+            <a:bodyPr wrap="square" rtlCol="0">
+              <a:spAutoFit/>
+            </a:bodyPr>
+            <a:lstStyle/>
+            <a:p>
+              <a:r>
+                <a:rPr kumimoji="1" lang="en-US" altLang="ja-JP" sz="800" b="1" dirty="0">
+                  <a:solidFill>
+                    <a:srgbClr val="FFFF00"/>
+                  </a:solidFill>
+                  <a:latin typeface="Arial" panose="020B0604020202020204" pitchFamily="34" charset="0"/>
+                  <a:cs typeface="Arial" panose="020B0604020202020204" pitchFamily="34" charset="0"/>
+                </a:rPr>
+                <a:t>CCD</a:t>
+              </a:r>
+              <a:r>
+                <a:rPr kumimoji="1" lang="ja-JP" altLang="en-US" sz="800" b="1" dirty="0">
+                  <a:solidFill>
+                    <a:srgbClr val="FFFF00"/>
+                  </a:solidFill>
+                  <a:latin typeface="Arial" panose="020B0604020202020204" pitchFamily="34" charset="0"/>
+                  <a:cs typeface="Arial" panose="020B0604020202020204" pitchFamily="34" charset="0"/>
+                </a:rPr>
+                <a:t>検出器へ</a:t>
+              </a:r>
+            </a:p>
+          </p:txBody>
+        </p:sp>
+      </p:grpSp>
+      <p:sp>
+        <p:nvSpPr>
+          <p:cNvPr id="148" name="テキスト ボックス 147">
+            <a:extLst>
+              <a:ext uri="{FF2B5EF4-FFF2-40B4-BE49-F238E27FC236}">
+                <a16:creationId xmlns:a16="http://schemas.microsoft.com/office/drawing/2014/main" id="{6B5D9055-4F00-0527-B3E1-6A16337F82D6}"/>
+              </a:ext>
+            </a:extLst>
+          </p:cNvPr>
+          <p:cNvSpPr txBox="1"/>
+          <p:nvPr/>
+        </p:nvSpPr>
+        <p:spPr>
+          <a:xfrm>
+            <a:off x="4747389" y="1852277"/>
+            <a:ext cx="2827455" cy="492443"/>
+          </a:xfrm>
+          <a:prstGeom prst="rect">
+            <a:avLst/>
+          </a:prstGeom>
+          <a:noFill/>
+        </p:spPr>
+        <p:txBody>
+          <a:bodyPr wrap="square" lIns="0" tIns="0" rIns="0" bIns="0" rtlCol="0">
+            <a:spAutoFit/>
+          </a:bodyPr>
+          <a:lstStyle/>
+          <a:p>
+            <a:pPr algn="ctr"/>
+            <a:r>
+              <a:rPr kumimoji="1" lang="ja-JP" altLang="en-US" sz="3200" b="1" dirty="0">
+                <a:solidFill>
+                  <a:srgbClr val="D51506"/>
+                </a:solidFill>
+                <a:latin typeface="Arial" panose="020B0604020202020204" pitchFamily="34" charset="0"/>
+                <a:cs typeface="Arial" panose="020B0604020202020204" pitchFamily="34" charset="0"/>
+              </a:rPr>
+              <a:t>情報科学</a:t>
+            </a:r>
+          </a:p>
+        </p:txBody>
+      </p:sp>
+      <p:sp>
+        <p:nvSpPr>
+          <p:cNvPr id="149" name="正方形/長方形 148">
+            <a:extLst>
+              <a:ext uri="{FF2B5EF4-FFF2-40B4-BE49-F238E27FC236}">
+                <a16:creationId xmlns:a16="http://schemas.microsoft.com/office/drawing/2014/main" id="{3FBAD4CE-25B1-DC16-313C-764C54FD4564}"/>
+              </a:ext>
+            </a:extLst>
+          </p:cNvPr>
+          <p:cNvSpPr/>
+          <p:nvPr/>
+        </p:nvSpPr>
+        <p:spPr>
+          <a:xfrm>
+            <a:off x="4979011" y="2602238"/>
+            <a:ext cx="2364210" cy="1884406"/>
+          </a:xfrm>
+          <a:prstGeom prst="rect">
+            <a:avLst/>
+          </a:prstGeom>
+          <a:noFill/>
+          <a:ln w="76200">
+            <a:solidFill>
+              <a:srgbClr val="D51506"/>
+            </a:solidFill>
+          </a:ln>
+        </p:spPr>
+        <p:style>
+          <a:lnRef idx="2">
+            <a:schemeClr val="accent1">
+              <a:shade val="15000"/>
+            </a:schemeClr>
+          </a:lnRef>
+          <a:fillRef idx="1">
+            <a:schemeClr val="accent1"/>
+          </a:fillRef>
+          <a:effectRef idx="0">
+            <a:schemeClr val="accent1"/>
+          </a:effectRef>
+          <a:fontRef idx="minor">
+            <a:schemeClr val="lt1"/>
+          </a:fontRef>
+        </p:style>
+        <p:txBody>
+          <a:bodyPr rtlCol="0" anchor="ctr"/>
+          <a:lstStyle/>
+          <a:p>
+            <a:pPr algn="ctr"/>
+            <a:endParaRPr kumimoji="1" lang="ja-JP" altLang="en-US">
+              <a:solidFill>
+                <a:srgbClr val="FFFFFF"/>
+              </a:solidFill>
+            </a:endParaRPr>
+          </a:p>
+        </p:txBody>
+      </p:sp>
+      <p:sp>
+        <p:nvSpPr>
+          <p:cNvPr id="150" name="正方形/長方形 149">
+            <a:extLst>
+              <a:ext uri="{FF2B5EF4-FFF2-40B4-BE49-F238E27FC236}">
+                <a16:creationId xmlns:a16="http://schemas.microsoft.com/office/drawing/2014/main" id="{287834B3-CEDB-BD09-B0F6-57F2BEFA9FBC}"/>
+              </a:ext>
+            </a:extLst>
+          </p:cNvPr>
+          <p:cNvSpPr/>
+          <p:nvPr/>
+        </p:nvSpPr>
+        <p:spPr>
+          <a:xfrm>
+            <a:off x="1727114" y="2602238"/>
+            <a:ext cx="2364210" cy="1884406"/>
+          </a:xfrm>
+          <a:prstGeom prst="rect">
+            <a:avLst/>
+          </a:prstGeom>
+          <a:noFill/>
+          <a:ln w="76200">
+            <a:solidFill>
+              <a:srgbClr val="005B82"/>
+            </a:solidFill>
+          </a:ln>
+        </p:spPr>
+        <p:style>
+          <a:lnRef idx="2">
+            <a:schemeClr val="accent1">
+              <a:shade val="15000"/>
+            </a:schemeClr>
+          </a:lnRef>
+          <a:fillRef idx="1">
+            <a:schemeClr val="accent1"/>
+          </a:fillRef>
+          <a:effectRef idx="0">
+            <a:schemeClr val="accent1"/>
+          </a:effectRef>
+          <a:fontRef idx="minor">
+            <a:schemeClr val="lt1"/>
+          </a:fontRef>
+        </p:style>
+        <p:txBody>
+          <a:bodyPr rtlCol="0" anchor="ctr"/>
+          <a:lstStyle/>
+          <a:p>
+            <a:pPr algn="ctr"/>
+            <a:endParaRPr kumimoji="1" lang="ja-JP" altLang="en-US">
+              <a:solidFill>
+                <a:srgbClr val="005B82"/>
+              </a:solidFill>
+            </a:endParaRPr>
+          </a:p>
+        </p:txBody>
+      </p:sp>
+      <p:sp>
+        <p:nvSpPr>
+          <p:cNvPr id="152" name="テキスト ボックス 151">
+            <a:extLst>
+              <a:ext uri="{FF2B5EF4-FFF2-40B4-BE49-F238E27FC236}">
+                <a16:creationId xmlns:a16="http://schemas.microsoft.com/office/drawing/2014/main" id="{036CE0F7-C20A-B11E-D7B5-CE603676D528}"/>
+              </a:ext>
+            </a:extLst>
+          </p:cNvPr>
+          <p:cNvSpPr txBox="1"/>
+          <p:nvPr/>
+        </p:nvSpPr>
+        <p:spPr>
+          <a:xfrm>
+            <a:off x="1495492" y="1829391"/>
+            <a:ext cx="2827455" cy="492443"/>
+          </a:xfrm>
+          <a:prstGeom prst="rect">
+            <a:avLst/>
+          </a:prstGeom>
+          <a:noFill/>
+        </p:spPr>
+        <p:txBody>
+          <a:bodyPr wrap="square" lIns="0" tIns="0" rIns="0" bIns="0" rtlCol="0">
+            <a:spAutoFit/>
+          </a:bodyPr>
+          <a:lstStyle/>
+          <a:p>
+            <a:pPr algn="ctr"/>
+            <a:r>
+              <a:rPr kumimoji="1" lang="ja-JP" altLang="en-US" sz="3200" b="1" dirty="0">
+                <a:solidFill>
+                  <a:srgbClr val="005B82"/>
+                </a:solidFill>
+                <a:latin typeface="Arial" panose="020B0604020202020204" pitchFamily="34" charset="0"/>
+                <a:cs typeface="Arial" panose="020B0604020202020204" pitchFamily="34" charset="0"/>
+              </a:rPr>
+              <a:t>応用数理</a:t>
+            </a:r>
+          </a:p>
+        </p:txBody>
+      </p:sp>
+      <p:sp>
+        <p:nvSpPr>
+          <p:cNvPr id="153" name="テキスト ボックス 152">
+            <a:extLst>
+              <a:ext uri="{FF2B5EF4-FFF2-40B4-BE49-F238E27FC236}">
+                <a16:creationId xmlns:a16="http://schemas.microsoft.com/office/drawing/2014/main" id="{D6F2A61F-F944-A2D9-0E8C-3A2655025E5E}"/>
+              </a:ext>
+            </a:extLst>
+          </p:cNvPr>
+          <p:cNvSpPr txBox="1"/>
+          <p:nvPr/>
+        </p:nvSpPr>
+        <p:spPr>
+          <a:xfrm>
+            <a:off x="1495492" y="2287990"/>
+            <a:ext cx="2827455" cy="276999"/>
+          </a:xfrm>
+          <a:prstGeom prst="rect">
+            <a:avLst/>
+          </a:prstGeom>
+          <a:noFill/>
+        </p:spPr>
+        <p:txBody>
+          <a:bodyPr wrap="square" lIns="0" tIns="0" rIns="0" bIns="0" rtlCol="0">
+            <a:spAutoFit/>
+          </a:bodyPr>
+          <a:lstStyle/>
+          <a:p>
+            <a:pPr algn="ctr"/>
+            <a:r>
+              <a:rPr kumimoji="1" lang="en-US" altLang="ja-JP" b="1" dirty="0">
+                <a:solidFill>
+                  <a:srgbClr val="005B82"/>
+                </a:solidFill>
+                <a:latin typeface="Arial" panose="020B0604020202020204" pitchFamily="34" charset="0"/>
+                <a:cs typeface="Arial" panose="020B0604020202020204" pitchFamily="34" charset="0"/>
+              </a:rPr>
+              <a:t>(</a:t>
+            </a:r>
+            <a:r>
+              <a:rPr kumimoji="1" lang="ja-JP" altLang="en-US" b="1" dirty="0">
+                <a:solidFill>
+                  <a:srgbClr val="005B82"/>
+                </a:solidFill>
+                <a:latin typeface="Arial" panose="020B0604020202020204" pitchFamily="34" charset="0"/>
+                <a:cs typeface="Arial" panose="020B0604020202020204" pitchFamily="34" charset="0"/>
+              </a:rPr>
+              <a:t>モデル構築・予測</a:t>
+            </a:r>
+            <a:r>
+              <a:rPr kumimoji="1" lang="en-US" altLang="ja-JP" b="1" dirty="0">
+                <a:solidFill>
+                  <a:srgbClr val="005B82"/>
+                </a:solidFill>
+                <a:latin typeface="Arial" panose="020B0604020202020204" pitchFamily="34" charset="0"/>
+                <a:cs typeface="Arial" panose="020B0604020202020204" pitchFamily="34" charset="0"/>
+              </a:rPr>
+              <a:t>)</a:t>
+            </a:r>
+            <a:endParaRPr kumimoji="1" lang="ja-JP" altLang="en-US" b="1" dirty="0">
+              <a:solidFill>
+                <a:srgbClr val="005B82"/>
+              </a:solidFill>
+              <a:latin typeface="Arial" panose="020B0604020202020204" pitchFamily="34" charset="0"/>
+              <a:cs typeface="Arial" panose="020B0604020202020204" pitchFamily="34" charset="0"/>
+            </a:endParaRPr>
+          </a:p>
+        </p:txBody>
+      </p:sp>
+      <p:sp>
+        <p:nvSpPr>
+          <p:cNvPr id="154" name="テキスト ボックス 153">
+            <a:extLst>
+              <a:ext uri="{FF2B5EF4-FFF2-40B4-BE49-F238E27FC236}">
+                <a16:creationId xmlns:a16="http://schemas.microsoft.com/office/drawing/2014/main" id="{9F82ECA0-CAD8-4DB8-D25E-501B0D15FBA6}"/>
+              </a:ext>
+            </a:extLst>
+          </p:cNvPr>
+          <p:cNvSpPr txBox="1"/>
+          <p:nvPr/>
+        </p:nvSpPr>
+        <p:spPr>
+          <a:xfrm>
+            <a:off x="4105619" y="2287990"/>
+            <a:ext cx="4110995" cy="276999"/>
+          </a:xfrm>
+          <a:prstGeom prst="rect">
+            <a:avLst/>
+          </a:prstGeom>
+          <a:noFill/>
+        </p:spPr>
+        <p:txBody>
+          <a:bodyPr wrap="square" lIns="0" tIns="0" rIns="0" bIns="0" rtlCol="0">
+            <a:spAutoFit/>
+          </a:bodyPr>
+          <a:lstStyle/>
+          <a:p>
+            <a:pPr algn="ctr"/>
+            <a:r>
+              <a:rPr kumimoji="1" lang="en-US" altLang="ja-JP" b="1" dirty="0">
+                <a:solidFill>
+                  <a:srgbClr val="D51506"/>
+                </a:solidFill>
+                <a:latin typeface="Arial" panose="020B0604020202020204" pitchFamily="34" charset="0"/>
+                <a:cs typeface="Arial" panose="020B0604020202020204" pitchFamily="34" charset="0"/>
+              </a:rPr>
+              <a:t>(</a:t>
+            </a:r>
+            <a:r>
+              <a:rPr kumimoji="1" lang="ja-JP" altLang="en-US" b="1" dirty="0">
+                <a:solidFill>
+                  <a:srgbClr val="D51506"/>
+                </a:solidFill>
+                <a:latin typeface="Arial" panose="020B0604020202020204" pitchFamily="34" charset="0"/>
+                <a:cs typeface="Arial" panose="020B0604020202020204" pitchFamily="34" charset="0"/>
+              </a:rPr>
+              <a:t>速度定数抽出・実験検証</a:t>
+            </a:r>
+            <a:r>
+              <a:rPr kumimoji="1" lang="en-US" altLang="ja-JP" b="1" dirty="0">
+                <a:solidFill>
+                  <a:srgbClr val="D51506"/>
+                </a:solidFill>
+                <a:latin typeface="Arial" panose="020B0604020202020204" pitchFamily="34" charset="0"/>
+                <a:cs typeface="Arial" panose="020B0604020202020204" pitchFamily="34" charset="0"/>
+              </a:rPr>
+              <a:t>)</a:t>
+            </a:r>
+            <a:endParaRPr kumimoji="1" lang="ja-JP" altLang="en-US" b="1" dirty="0">
+              <a:solidFill>
+                <a:srgbClr val="D51506"/>
+              </a:solidFill>
+              <a:latin typeface="Arial" panose="020B0604020202020204" pitchFamily="34" charset="0"/>
+              <a:cs typeface="Arial" panose="020B0604020202020204" pitchFamily="34" charset="0"/>
+            </a:endParaRPr>
+          </a:p>
+        </p:txBody>
+      </p:sp>
+      <p:sp>
+        <p:nvSpPr>
+          <p:cNvPr id="156" name="正方形/長方形 155">
+            <a:extLst>
+              <a:ext uri="{FF2B5EF4-FFF2-40B4-BE49-F238E27FC236}">
+                <a16:creationId xmlns:a16="http://schemas.microsoft.com/office/drawing/2014/main" id="{0A6E4AD4-8EE0-7E01-39AF-70615E449447}"/>
+              </a:ext>
+            </a:extLst>
+          </p:cNvPr>
+          <p:cNvSpPr/>
+          <p:nvPr/>
+        </p:nvSpPr>
+        <p:spPr>
+          <a:xfrm>
+            <a:off x="8290844" y="2603041"/>
+            <a:ext cx="2365200" cy="1882800"/>
+          </a:xfrm>
+          <a:prstGeom prst="rect">
+            <a:avLst/>
+          </a:prstGeom>
+          <a:noFill/>
+          <a:ln w="76200">
+            <a:solidFill>
+              <a:srgbClr val="F79E02"/>
+            </a:solidFill>
+          </a:ln>
+        </p:spPr>
+        <p:style>
+          <a:lnRef idx="2">
+            <a:schemeClr val="accent1">
+              <a:shade val="15000"/>
+            </a:schemeClr>
+          </a:lnRef>
+          <a:fillRef idx="1">
+            <a:schemeClr val="accent1"/>
+          </a:fillRef>
+          <a:effectRef idx="0">
+            <a:schemeClr val="accent1"/>
+          </a:effectRef>
+          <a:fontRef idx="minor">
+            <a:schemeClr val="lt1"/>
+          </a:fontRef>
+        </p:style>
+        <p:txBody>
+          <a:bodyPr rtlCol="0" anchor="ctr"/>
+          <a:lstStyle/>
+          <a:p>
+            <a:pPr algn="ctr"/>
+            <a:endParaRPr kumimoji="1" lang="ja-JP" altLang="en-US">
+              <a:solidFill>
+                <a:srgbClr val="F79E02"/>
+              </a:solidFill>
+            </a:endParaRPr>
+          </a:p>
+        </p:txBody>
+      </p:sp>
+      <p:sp>
+        <p:nvSpPr>
+          <p:cNvPr id="157" name="テキスト ボックス 156">
+            <a:extLst>
+              <a:ext uri="{FF2B5EF4-FFF2-40B4-BE49-F238E27FC236}">
+                <a16:creationId xmlns:a16="http://schemas.microsoft.com/office/drawing/2014/main" id="{6F2AB93B-0E41-755E-9411-C5F953F490F8}"/>
+              </a:ext>
+            </a:extLst>
+          </p:cNvPr>
+          <p:cNvSpPr txBox="1"/>
+          <p:nvPr/>
+        </p:nvSpPr>
+        <p:spPr>
+          <a:xfrm>
+            <a:off x="7998200" y="1866862"/>
+            <a:ext cx="2950490" cy="492443"/>
+          </a:xfrm>
+          <a:prstGeom prst="rect">
+            <a:avLst/>
+          </a:prstGeom>
+          <a:noFill/>
+        </p:spPr>
+        <p:txBody>
+          <a:bodyPr wrap="square" lIns="0" tIns="0" rIns="0" bIns="0" rtlCol="0">
+            <a:spAutoFit/>
+          </a:bodyPr>
+          <a:lstStyle/>
+          <a:p>
+            <a:pPr algn="ctr"/>
+            <a:r>
+              <a:rPr kumimoji="1" lang="ja-JP" altLang="en-US" sz="3200" b="1" dirty="0">
+                <a:solidFill>
+                  <a:srgbClr val="F79E02"/>
+                </a:solidFill>
+                <a:latin typeface="Arial" panose="020B0604020202020204" pitchFamily="34" charset="0"/>
+                <a:cs typeface="Arial" panose="020B0604020202020204" pitchFamily="34" charset="0"/>
+              </a:rPr>
+              <a:t>光導波路分光法</a:t>
+            </a:r>
+          </a:p>
+        </p:txBody>
+      </p:sp>
+      <p:sp>
+        <p:nvSpPr>
+          <p:cNvPr id="158" name="テキスト ボックス 157">
+            <a:extLst>
+              <a:ext uri="{FF2B5EF4-FFF2-40B4-BE49-F238E27FC236}">
+                <a16:creationId xmlns:a16="http://schemas.microsoft.com/office/drawing/2014/main" id="{8766375D-61C5-79BA-4861-CAE47E7B1BC7}"/>
+              </a:ext>
+            </a:extLst>
+          </p:cNvPr>
+          <p:cNvSpPr txBox="1"/>
+          <p:nvPr/>
+        </p:nvSpPr>
+        <p:spPr>
+          <a:xfrm>
+            <a:off x="7905453" y="2287990"/>
+            <a:ext cx="3135983" cy="276999"/>
+          </a:xfrm>
+          <a:prstGeom prst="rect">
+            <a:avLst/>
+          </a:prstGeom>
+          <a:noFill/>
+        </p:spPr>
+        <p:txBody>
+          <a:bodyPr wrap="square" lIns="0" tIns="0" rIns="0" bIns="0" rtlCol="0">
+            <a:spAutoFit/>
+          </a:bodyPr>
+          <a:lstStyle/>
+          <a:p>
+            <a:pPr algn="ctr"/>
+            <a:r>
+              <a:rPr kumimoji="1" lang="en-US" altLang="ja-JP" b="1" dirty="0">
+                <a:solidFill>
+                  <a:srgbClr val="F79E02"/>
+                </a:solidFill>
+                <a:latin typeface="Arial" panose="020B0604020202020204" pitchFamily="34" charset="0"/>
+                <a:cs typeface="Arial" panose="020B0604020202020204" pitchFamily="34" charset="0"/>
+              </a:rPr>
+              <a:t>(In-situ</a:t>
+            </a:r>
+            <a:r>
+              <a:rPr kumimoji="1" lang="ja-JP" altLang="en-US" b="1" dirty="0">
+                <a:solidFill>
+                  <a:srgbClr val="F79E02"/>
+                </a:solidFill>
+                <a:latin typeface="Arial" panose="020B0604020202020204" pitchFamily="34" charset="0"/>
+                <a:cs typeface="Arial" panose="020B0604020202020204" pitchFamily="34" charset="0"/>
+              </a:rPr>
+              <a:t>・表面高感度</a:t>
+            </a:r>
+            <a:r>
+              <a:rPr kumimoji="1" lang="en-US" altLang="ja-JP" b="1" dirty="0">
+                <a:solidFill>
+                  <a:srgbClr val="F79E02"/>
+                </a:solidFill>
+                <a:latin typeface="Arial" panose="020B0604020202020204" pitchFamily="34" charset="0"/>
+                <a:cs typeface="Arial" panose="020B0604020202020204" pitchFamily="34" charset="0"/>
+              </a:rPr>
+              <a:t>)</a:t>
+            </a:r>
+          </a:p>
+        </p:txBody>
+      </p:sp>
+      <p:sp>
+        <p:nvSpPr>
+          <p:cNvPr id="163" name="十字形 162">
+            <a:extLst>
+              <a:ext uri="{FF2B5EF4-FFF2-40B4-BE49-F238E27FC236}">
+                <a16:creationId xmlns:a16="http://schemas.microsoft.com/office/drawing/2014/main" id="{AB15BED7-8C2A-7B77-8C6D-CDE0C296C005}"/>
+              </a:ext>
+            </a:extLst>
+          </p:cNvPr>
+          <p:cNvSpPr/>
+          <p:nvPr/>
+        </p:nvSpPr>
+        <p:spPr>
+          <a:xfrm rot="2754931">
+            <a:off x="4266657" y="3305061"/>
+            <a:ext cx="514558" cy="514558"/>
+          </a:xfrm>
+          <a:prstGeom prst="plus">
+            <a:avLst>
+              <a:gd name="adj" fmla="val 42994"/>
+            </a:avLst>
+          </a:prstGeom>
+          <a:solidFill>
+            <a:schemeClr val="tx1">
+              <a:lumMod val="85000"/>
+              <a:lumOff val="15000"/>
+            </a:schemeClr>
+          </a:solidFill>
+          <a:ln>
+            <a:solidFill>
+              <a:schemeClr val="tx1">
+                <a:lumMod val="85000"/>
+                <a:lumOff val="15000"/>
+              </a:schemeClr>
+            </a:solidFill>
+          </a:ln>
+        </p:spPr>
+        <p:style>
+          <a:lnRef idx="2">
+            <a:schemeClr val="accent1">
+              <a:shade val="15000"/>
+            </a:schemeClr>
+          </a:lnRef>
+          <a:fillRef idx="1">
+            <a:schemeClr val="accent1"/>
+          </a:fillRef>
+          <a:effectRef idx="0">
+            <a:schemeClr val="accent1"/>
+          </a:effectRef>
+          <a:fontRef idx="minor">
+            <a:schemeClr val="lt1"/>
+          </a:fontRef>
+        </p:style>
+        <p:txBody>
+          <a:bodyPr rtlCol="0" anchor="ctr"/>
+          <a:lstStyle/>
+          <a:p>
+            <a:pPr algn="ctr"/>
+            <a:endParaRPr kumimoji="1" lang="ja-JP" altLang="en-US"/>
+          </a:p>
+        </p:txBody>
+      </p:sp>
+      <p:sp>
+        <p:nvSpPr>
+          <p:cNvPr id="164" name="十字形 163">
+            <a:extLst>
+              <a:ext uri="{FF2B5EF4-FFF2-40B4-BE49-F238E27FC236}">
+                <a16:creationId xmlns:a16="http://schemas.microsoft.com/office/drawing/2014/main" id="{5CB411D5-59AF-2D0F-FCDC-7D20EECE039F}"/>
+              </a:ext>
+            </a:extLst>
+          </p:cNvPr>
+          <p:cNvSpPr/>
+          <p:nvPr/>
+        </p:nvSpPr>
+        <p:spPr>
+          <a:xfrm rot="2754931">
+            <a:off x="7542986" y="3305061"/>
+            <a:ext cx="514558" cy="514558"/>
+          </a:xfrm>
+          <a:prstGeom prst="plus">
+            <a:avLst>
+              <a:gd name="adj" fmla="val 42994"/>
+            </a:avLst>
+          </a:prstGeom>
+          <a:solidFill>
+            <a:schemeClr val="tx1">
+              <a:lumMod val="85000"/>
+              <a:lumOff val="15000"/>
+            </a:schemeClr>
+          </a:solidFill>
+          <a:ln>
+            <a:solidFill>
+              <a:schemeClr val="tx1">
+                <a:lumMod val="85000"/>
+                <a:lumOff val="15000"/>
+              </a:schemeClr>
+            </a:solidFill>
+          </a:ln>
+        </p:spPr>
+        <p:style>
+          <a:lnRef idx="2">
+            <a:schemeClr val="accent1">
+              <a:shade val="15000"/>
+            </a:schemeClr>
+          </a:lnRef>
+          <a:fillRef idx="1">
+            <a:schemeClr val="accent1"/>
+          </a:fillRef>
+          <a:effectRef idx="0">
+            <a:schemeClr val="accent1"/>
+          </a:effectRef>
+          <a:fontRef idx="minor">
+            <a:schemeClr val="lt1"/>
+          </a:fontRef>
+        </p:style>
+        <p:txBody>
+          <a:bodyPr rtlCol="0" anchor="ctr"/>
+          <a:lstStyle/>
+          <a:p>
+            <a:pPr algn="ctr"/>
+            <a:endParaRPr kumimoji="1" lang="ja-JP" altLang="en-US"/>
+          </a:p>
+        </p:txBody>
+      </p:sp>
+    </p:spTree>
+    <p:extLst>
+      <p:ext uri="{BB962C8B-B14F-4D97-AF65-F5344CB8AC3E}">
+        <p14:creationId xmlns:p14="http://schemas.microsoft.com/office/powerpoint/2010/main" val="2931404450"/>
+      </p:ext>
+    </p:extLst>
+  </p:cSld>
+  <p:clrMapOvr>
+    <a:masterClrMapping/>
+  </p:clrMapOvr>
+</p:sld>
+</file>
+
 <file path=ppt/theme/theme1.xml><?xml version="1.0" encoding="utf-8"?>
 <a:theme xmlns:a="http://schemas.openxmlformats.org/drawingml/2006/main" name="Office 2013 - 2022 テーマ">
   <a:themeElements>
